--- a/Pixels.pptx
+++ b/Pixels.pptx
@@ -1,6 +1,6 @@
 
 <file path=ppt/presentation.xml><?xml version="1.0" encoding="utf-8"?>
-<p:presentation xmlns:a="http://schemas.openxmlformats.org/drawingml/2006/main" xmlns:r="http://schemas.openxmlformats.org/officeDocument/2006/relationships" xmlns:p="http://schemas.openxmlformats.org/presentationml/2006/main" xmlns:m="http://schemas.openxmlformats.org/officeDocument/2006/math" xmlns:w="http://schemas.openxmlformats.org/wordprocessingml/2006/main" autoCompressPictures="0" embedTrueTypeFonts="1" saveSubsetFonts="1">
+<p:presentation xmlns:a="http://schemas.openxmlformats.org/drawingml/2006/main" xmlns:r="http://schemas.openxmlformats.org/officeDocument/2006/relationships" xmlns:p="http://schemas.openxmlformats.org/presentationml/2006/main" embedTrueTypeFonts="1" saveSubsetFonts="1" autoCompressPictures="0">
   <p:sldMasterIdLst>
     <p:sldMasterId id="2147483648" r:id="rId1"/>
   </p:sldMasterIdLst>
@@ -8,9 +8,10 @@
     <p:notesMasterId r:id="rId13"/>
   </p:notesMasterIdLst>
   <p:sldIdLst>
-    <p:sldId id="256" r:id="rId3"/>
-    <p:sldId id="257" r:id="rId4"/>
-    <p:sldId id="258" r:id="rId5"/>
+    <p:sldId id="256" r:id="rId2"/>
+    <p:sldId id="257" r:id="rId3"/>
+    <p:sldId id="258" r:id="rId4"/>
+    <p:sldId id="266" r:id="rId5"/>
     <p:sldId id="259" r:id="rId6"/>
     <p:sldId id="260" r:id="rId7"/>
     <p:sldId id="261" r:id="rId8"/>
@@ -21,12 +22,159 @@
   </p:sldIdLst>
   <p:sldSz cx="14630400" cy="8229600"/>
   <p:notesSz cx="8229600" cy="14630400"/>
+  <p:embeddedFontLst>
+    <p:embeddedFont>
+      <p:font typeface="Consolas" panose="020B0609020204030204" pitchFamily="49" charset="0"/>
+      <p:regular r:id="rId14"/>
+      <p:bold r:id="rId15"/>
+      <p:italic r:id="rId16"/>
+      <p:boldItalic r:id="rId17"/>
+    </p:embeddedFont>
+    <p:embeddedFont>
+      <p:font typeface="IBM Plex Sans Light" panose="020B0403050203000203" pitchFamily="34" charset="0"/>
+      <p:regular r:id="rId18"/>
+      <p:italic r:id="rId19"/>
+    </p:embeddedFont>
+    <p:embeddedFont>
+      <p:font typeface="IBM Plex Sans Medium" panose="020B0603050203000203" pitchFamily="34" charset="0"/>
+      <p:regular r:id="rId20"/>
+      <p:italic r:id="rId21"/>
+    </p:embeddedFont>
+    <p:embeddedFont>
+      <p:font typeface="Roboto" panose="02000000000000000000" pitchFamily="2" charset="0"/>
+      <p:regular r:id="rId22"/>
+      <p:bold r:id="rId23"/>
+      <p:italic r:id="rId24"/>
+      <p:boldItalic r:id="rId25"/>
+    </p:embeddedFont>
+  </p:embeddedFontLst>
+  <p:defaultTextStyle>
+    <a:defPPr>
+      <a:defRPr lang="ru-RU"/>
+    </a:defPPr>
+    <a:lvl1pPr marL="0" algn="l" defTabSz="914400" rtl="0" eaLnBrk="1" latinLnBrk="0" hangingPunct="1">
+      <a:defRPr sz="1800" kern="1200">
+        <a:solidFill>
+          <a:schemeClr val="tx1"/>
+        </a:solidFill>
+        <a:latin typeface="+mn-lt"/>
+        <a:ea typeface="+mn-ea"/>
+        <a:cs typeface="+mn-cs"/>
+      </a:defRPr>
+    </a:lvl1pPr>
+    <a:lvl2pPr marL="457200" algn="l" defTabSz="914400" rtl="0" eaLnBrk="1" latinLnBrk="0" hangingPunct="1">
+      <a:defRPr sz="1800" kern="1200">
+        <a:solidFill>
+          <a:schemeClr val="tx1"/>
+        </a:solidFill>
+        <a:latin typeface="+mn-lt"/>
+        <a:ea typeface="+mn-ea"/>
+        <a:cs typeface="+mn-cs"/>
+      </a:defRPr>
+    </a:lvl2pPr>
+    <a:lvl3pPr marL="914400" algn="l" defTabSz="914400" rtl="0" eaLnBrk="1" latinLnBrk="0" hangingPunct="1">
+      <a:defRPr sz="1800" kern="1200">
+        <a:solidFill>
+          <a:schemeClr val="tx1"/>
+        </a:solidFill>
+        <a:latin typeface="+mn-lt"/>
+        <a:ea typeface="+mn-ea"/>
+        <a:cs typeface="+mn-cs"/>
+      </a:defRPr>
+    </a:lvl3pPr>
+    <a:lvl4pPr marL="1371600" algn="l" defTabSz="914400" rtl="0" eaLnBrk="1" latinLnBrk="0" hangingPunct="1">
+      <a:defRPr sz="1800" kern="1200">
+        <a:solidFill>
+          <a:schemeClr val="tx1"/>
+        </a:solidFill>
+        <a:latin typeface="+mn-lt"/>
+        <a:ea typeface="+mn-ea"/>
+        <a:cs typeface="+mn-cs"/>
+      </a:defRPr>
+    </a:lvl4pPr>
+    <a:lvl5pPr marL="1828800" algn="l" defTabSz="914400" rtl="0" eaLnBrk="1" latinLnBrk="0" hangingPunct="1">
+      <a:defRPr sz="1800" kern="1200">
+        <a:solidFill>
+          <a:schemeClr val="tx1"/>
+        </a:solidFill>
+        <a:latin typeface="+mn-lt"/>
+        <a:ea typeface="+mn-ea"/>
+        <a:cs typeface="+mn-cs"/>
+      </a:defRPr>
+    </a:lvl5pPr>
+    <a:lvl6pPr marL="2286000" algn="l" defTabSz="914400" rtl="0" eaLnBrk="1" latinLnBrk="0" hangingPunct="1">
+      <a:defRPr sz="1800" kern="1200">
+        <a:solidFill>
+          <a:schemeClr val="tx1"/>
+        </a:solidFill>
+        <a:latin typeface="+mn-lt"/>
+        <a:ea typeface="+mn-ea"/>
+        <a:cs typeface="+mn-cs"/>
+      </a:defRPr>
+    </a:lvl6pPr>
+    <a:lvl7pPr marL="2743200" algn="l" defTabSz="914400" rtl="0" eaLnBrk="1" latinLnBrk="0" hangingPunct="1">
+      <a:defRPr sz="1800" kern="1200">
+        <a:solidFill>
+          <a:schemeClr val="tx1"/>
+        </a:solidFill>
+        <a:latin typeface="+mn-lt"/>
+        <a:ea typeface="+mn-ea"/>
+        <a:cs typeface="+mn-cs"/>
+      </a:defRPr>
+    </a:lvl7pPr>
+    <a:lvl8pPr marL="3200400" algn="l" defTabSz="914400" rtl="0" eaLnBrk="1" latinLnBrk="0" hangingPunct="1">
+      <a:defRPr sz="1800" kern="1200">
+        <a:solidFill>
+          <a:schemeClr val="tx1"/>
+        </a:solidFill>
+        <a:latin typeface="+mn-lt"/>
+        <a:ea typeface="+mn-ea"/>
+        <a:cs typeface="+mn-cs"/>
+      </a:defRPr>
+    </a:lvl8pPr>
+    <a:lvl9pPr marL="3657600" algn="l" defTabSz="914400" rtl="0" eaLnBrk="1" latinLnBrk="0" hangingPunct="1">
+      <a:defRPr sz="1800" kern="1200">
+        <a:solidFill>
+          <a:schemeClr val="tx1"/>
+        </a:solidFill>
+        <a:latin typeface="+mn-lt"/>
+        <a:ea typeface="+mn-ea"/>
+        <a:cs typeface="+mn-cs"/>
+      </a:defRPr>
+    </a:lvl9pPr>
+  </p:defaultTextStyle>
+  <p:extLst>
+    <p:ext uri="{EFAFB233-063F-42B5-8137-9DF3F51BA10A}">
+      <p15:sldGuideLst xmlns:p15="http://schemas.microsoft.com/office/powerpoint/2012/main">
+        <p15:guide id="1" pos="4608">
+          <p15:clr>
+            <a:srgbClr val="A4A3A4"/>
+          </p15:clr>
+        </p15:guide>
+        <p15:guide id="2" orient="horz" pos="2592">
+          <p15:clr>
+            <a:srgbClr val="A4A3A4"/>
+          </p15:clr>
+        </p15:guide>
+      </p15:sldGuideLst>
+    </p:ext>
+  </p:extLst>
 </p:presentation>
+</file>
+
+<file path=ppt/revisionInfo.xml><?xml version="1.0" encoding="utf-8"?>
+<p1510:revInfo xmlns:a="http://schemas.openxmlformats.org/drawingml/2006/main" xmlns:r="http://schemas.openxmlformats.org/officeDocument/2006/relationships" xmlns:p1510="http://schemas.microsoft.com/office/powerpoint/2015/10/main">
+  <p1510:revLst>
+    <p1510:client id="{535E85B4-9BD9-48CF-82DC-138DE78B7F14}" v="12" dt="2026-01-31T17:47:40.005"/>
+    <p1510:client id="{949E5214-F716-458F-B181-FEA170A16C11}" v="210" dt="2026-01-31T17:43:35.510"/>
+    <p1510:client id="{B5F40E67-4598-4285-B9E0-0F2A56892A56}" v="25" dt="2026-01-31T17:45:23.478"/>
+  </p1510:revLst>
+</p1510:revInfo>
 </file>
 
 <file path=ppt/notesMasters/notesMaster1.xml><?xml version="1.0" encoding="utf-8"?>
 <p:notesMaster xmlns:a="http://schemas.openxmlformats.org/drawingml/2006/main" xmlns:r="http://schemas.openxmlformats.org/officeDocument/2006/relationships" xmlns:p="http://schemas.openxmlformats.org/presentationml/2006/main">
-  <p:cSld name="">
+  <p:cSld>
     <p:bg>
       <p:bgRef idx="1001">
         <a:schemeClr val="bg1"/>
@@ -112,7 +260,7 @@
             </a:pPr>
             <a:fld id="{5282F153-3F37-0F45-9E97-73ACFA13230C}" type="datetimeFigureOut">
               <a:rPr lang="en-US"/>
-              <a:t>7/23/19</a:t>
+              <a:t>1/31/2026</a:t>
             </a:fld>
             <a:endParaRPr lang="en-US"/>
           </a:p>
@@ -122,7 +270,7 @@
         <p:nvSpPr>
           <p:cNvPr id="335944446" name="Slide Image Placeholder 3"/>
           <p:cNvSpPr>
-            <a:spLocks noChangeAspect="1" noGrp="1" noRot="1"/>
+            <a:spLocks noGrp="1" noRot="1" noChangeAspect="1"/>
           </p:cNvSpPr>
           <p:nvPr>
             <p:ph type="sldImg" idx="2"/>
@@ -399,8 +547,8 @@
 </file>
 
 <file path=ppt/notesSlides/notesSlide1.xml><?xml version="1.0" encoding="utf-8"?>
-<p:notes xmlns:a="http://schemas.openxmlformats.org/drawingml/2006/main" xmlns:r="http://schemas.openxmlformats.org/officeDocument/2006/relationships" xmlns:p="http://schemas.openxmlformats.org/presentationml/2006/main" xmlns:m="http://schemas.openxmlformats.org/officeDocument/2006/math" xmlns:w="http://schemas.openxmlformats.org/wordprocessingml/2006/main">
-  <p:cSld name="">
+<p:notes xmlns:a="http://schemas.openxmlformats.org/drawingml/2006/main" xmlns:r="http://schemas.openxmlformats.org/officeDocument/2006/relationships" xmlns:p="http://schemas.openxmlformats.org/presentationml/2006/main">
+  <p:cSld>
     <p:spTree>
       <p:nvGrpSpPr>
         <p:cNvPr id="1" name=""/>
@@ -419,7 +567,7 @@
         <p:nvSpPr>
           <p:cNvPr id="936227941" name="Slide Image Placeholder 1"/>
           <p:cNvSpPr>
-            <a:spLocks noChangeAspect="1" noGrp="1" noRot="1"/>
+            <a:spLocks noGrp="1" noRot="1" noChangeAspect="1"/>
           </p:cNvSpPr>
           <p:nvPr>
             <p:ph type="sldImg"/>
@@ -484,8 +632,8 @@
 </file>
 
 <file path=ppt/notesSlides/notesSlide10.xml><?xml version="1.0" encoding="utf-8"?>
-<p:notes xmlns:a="http://schemas.openxmlformats.org/drawingml/2006/main" xmlns:r="http://schemas.openxmlformats.org/officeDocument/2006/relationships" xmlns:p="http://schemas.openxmlformats.org/presentationml/2006/main" xmlns:m="http://schemas.openxmlformats.org/officeDocument/2006/math" xmlns:w="http://schemas.openxmlformats.org/wordprocessingml/2006/main">
-  <p:cSld name="">
+<p:notes xmlns:a="http://schemas.openxmlformats.org/drawingml/2006/main" xmlns:r="http://schemas.openxmlformats.org/officeDocument/2006/relationships" xmlns:p="http://schemas.openxmlformats.org/presentationml/2006/main">
+  <p:cSld>
     <p:spTree>
       <p:nvGrpSpPr>
         <p:cNvPr id="1" name=""/>
@@ -502,9 +650,9 @@
       </p:grpSpPr>
       <p:sp>
         <p:nvSpPr>
-          <p:cNvPr id="761025171" name="Slide Image Placeholder 1"/>
+          <p:cNvPr id="137049927" name="Slide Image Placeholder 1"/>
           <p:cNvSpPr>
-            <a:spLocks noChangeAspect="1" noGrp="1" noRot="1"/>
+            <a:spLocks noGrp="1" noRot="1" noChangeAspect="1"/>
           </p:cNvSpPr>
           <p:nvPr>
             <p:ph type="sldImg"/>
@@ -514,7 +662,7 @@
       </p:sp>
       <p:sp>
         <p:nvSpPr>
-          <p:cNvPr id="762107261" name="Notes Placeholder 2"/>
+          <p:cNvPr id="1411302840" name="Notes Placeholder 2"/>
           <p:cNvSpPr>
             <a:spLocks noGrp="1"/>
           </p:cNvSpPr>
@@ -536,7 +684,7 @@
       </p:sp>
       <p:sp>
         <p:nvSpPr>
-          <p:cNvPr id="1720853033" name="Slide Number Placeholder 3"/>
+          <p:cNvPr id="327399372" name="Slide Number Placeholder 3"/>
           <p:cNvSpPr>
             <a:spLocks noGrp="1"/>
           </p:cNvSpPr>
@@ -552,9 +700,9 @@
             <a:pPr>
               <a:defRPr/>
             </a:pPr>
-            <a:fld id="{3E51F95B-00B0-9378-C025-ECCDB0EB8C91}" type="slidenum">
+            <a:fld id="{F7021451-1387-4CA6-816F-3879F97B5CBC}" type="slidenum">
               <a:rPr lang="en-US"/>
-              <a:t/>
+              <a:t>10</a:t>
             </a:fld>
             <a:endParaRPr lang="en-US"/>
           </a:p>
@@ -568,9 +716,9 @@
 </p:notes>
 </file>
 
-<file path=ppt/notesSlides/notesSlide2.xml><?xml version="1.0" encoding="utf-8"?>
-<p:notes xmlns:a="http://schemas.openxmlformats.org/drawingml/2006/main" xmlns:r="http://schemas.openxmlformats.org/officeDocument/2006/relationships" xmlns:p="http://schemas.openxmlformats.org/presentationml/2006/main" xmlns:m="http://schemas.openxmlformats.org/officeDocument/2006/math" xmlns:w="http://schemas.openxmlformats.org/wordprocessingml/2006/main">
-  <p:cSld name="">
+<file path=ppt/notesSlides/notesSlide11.xml><?xml version="1.0" encoding="utf-8"?>
+<p:notes xmlns:a="http://schemas.openxmlformats.org/drawingml/2006/main" xmlns:r="http://schemas.openxmlformats.org/officeDocument/2006/relationships" xmlns:p="http://schemas.openxmlformats.org/presentationml/2006/main">
+  <p:cSld>
     <p:spTree>
       <p:nvGrpSpPr>
         <p:cNvPr id="1" name=""/>
@@ -587,9 +735,9 @@
       </p:grpSpPr>
       <p:sp>
         <p:nvSpPr>
-          <p:cNvPr id="1488809151" name="Slide Image Placeholder 1"/>
+          <p:cNvPr id="761025171" name="Slide Image Placeholder 1"/>
           <p:cNvSpPr>
-            <a:spLocks noChangeAspect="1" noGrp="1" noRot="1"/>
+            <a:spLocks noGrp="1" noRot="1" noChangeAspect="1"/>
           </p:cNvSpPr>
           <p:nvPr>
             <p:ph type="sldImg"/>
@@ -599,7 +747,7 @@
       </p:sp>
       <p:sp>
         <p:nvSpPr>
-          <p:cNvPr id="1309448526" name="Notes Placeholder 2"/>
+          <p:cNvPr id="762107261" name="Notes Placeholder 2"/>
           <p:cNvSpPr>
             <a:spLocks noGrp="1"/>
           </p:cNvSpPr>
@@ -621,7 +769,7 @@
       </p:sp>
       <p:sp>
         <p:nvSpPr>
-          <p:cNvPr id="560618185" name="Slide Number Placeholder 3"/>
+          <p:cNvPr id="1720853033" name="Slide Number Placeholder 3"/>
           <p:cNvSpPr>
             <a:spLocks noGrp="1"/>
           </p:cNvSpPr>
@@ -637,9 +785,9 @@
             <a:pPr>
               <a:defRPr/>
             </a:pPr>
-            <a:fld id="{F7021451-1387-4CA6-816F-3879F97B5CBC}" type="slidenum">
+            <a:fld id="{3E51F95B-00B0-9378-C025-ECCDB0EB8C91}" type="slidenum">
               <a:rPr lang="en-US"/>
-              <a:t>2</a:t>
+              <a:t>11</a:t>
             </a:fld>
             <a:endParaRPr lang="en-US"/>
           </a:p>
@@ -653,9 +801,9 @@
 </p:notes>
 </file>
 
-<file path=ppt/notesSlides/notesSlide3.xml><?xml version="1.0" encoding="utf-8"?>
-<p:notes xmlns:a="http://schemas.openxmlformats.org/drawingml/2006/main" xmlns:r="http://schemas.openxmlformats.org/officeDocument/2006/relationships" xmlns:p="http://schemas.openxmlformats.org/presentationml/2006/main" xmlns:m="http://schemas.openxmlformats.org/officeDocument/2006/math" xmlns:w="http://schemas.openxmlformats.org/wordprocessingml/2006/main">
-  <p:cSld name="">
+<file path=ppt/notesSlides/notesSlide2.xml><?xml version="1.0" encoding="utf-8"?>
+<p:notes xmlns:a="http://schemas.openxmlformats.org/drawingml/2006/main" xmlns:r="http://schemas.openxmlformats.org/officeDocument/2006/relationships" xmlns:p="http://schemas.openxmlformats.org/presentationml/2006/main">
+  <p:cSld>
     <p:spTree>
       <p:nvGrpSpPr>
         <p:cNvPr id="1" name=""/>
@@ -672,9 +820,9 @@
       </p:grpSpPr>
       <p:sp>
         <p:nvSpPr>
-          <p:cNvPr id="1528521434" name="Slide Image Placeholder 1"/>
+          <p:cNvPr id="1488809151" name="Slide Image Placeholder 1"/>
           <p:cNvSpPr>
-            <a:spLocks noChangeAspect="1" noGrp="1" noRot="1"/>
+            <a:spLocks noGrp="1" noRot="1" noChangeAspect="1"/>
           </p:cNvSpPr>
           <p:nvPr>
             <p:ph type="sldImg"/>
@@ -684,7 +832,7 @@
       </p:sp>
       <p:sp>
         <p:nvSpPr>
-          <p:cNvPr id="190101599" name="Notes Placeholder 2"/>
+          <p:cNvPr id="1309448526" name="Notes Placeholder 2"/>
           <p:cNvSpPr>
             <a:spLocks noGrp="1"/>
           </p:cNvSpPr>
@@ -706,7 +854,7 @@
       </p:sp>
       <p:sp>
         <p:nvSpPr>
-          <p:cNvPr id="557234395" name="Slide Number Placeholder 3"/>
+          <p:cNvPr id="560618185" name="Slide Number Placeholder 3"/>
           <p:cNvSpPr>
             <a:spLocks noGrp="1"/>
           </p:cNvSpPr>
@@ -724,7 +872,7 @@
             </a:pPr>
             <a:fld id="{F7021451-1387-4CA6-816F-3879F97B5CBC}" type="slidenum">
               <a:rPr lang="en-US"/>
-              <a:t>3</a:t>
+              <a:t>2</a:t>
             </a:fld>
             <a:endParaRPr lang="en-US"/>
           </a:p>
@@ -738,9 +886,9 @@
 </p:notes>
 </file>
 
-<file path=ppt/notesSlides/notesSlide4.xml><?xml version="1.0" encoding="utf-8"?>
-<p:notes xmlns:a="http://schemas.openxmlformats.org/drawingml/2006/main" xmlns:r="http://schemas.openxmlformats.org/officeDocument/2006/relationships" xmlns:p="http://schemas.openxmlformats.org/presentationml/2006/main" xmlns:m="http://schemas.openxmlformats.org/officeDocument/2006/math" xmlns:w="http://schemas.openxmlformats.org/wordprocessingml/2006/main">
-  <p:cSld name="">
+<file path=ppt/notesSlides/notesSlide3.xml><?xml version="1.0" encoding="utf-8"?>
+<p:notes xmlns:a="http://schemas.openxmlformats.org/drawingml/2006/main" xmlns:r="http://schemas.openxmlformats.org/officeDocument/2006/relationships" xmlns:p="http://schemas.openxmlformats.org/presentationml/2006/main">
+  <p:cSld>
     <p:spTree>
       <p:nvGrpSpPr>
         <p:cNvPr id="1" name=""/>
@@ -757,9 +905,9 @@
       </p:grpSpPr>
       <p:sp>
         <p:nvSpPr>
-          <p:cNvPr id="1156869439" name="Slide Image Placeholder 1"/>
+          <p:cNvPr id="1528521434" name="Slide Image Placeholder 1"/>
           <p:cNvSpPr>
-            <a:spLocks noChangeAspect="1" noGrp="1" noRot="1"/>
+            <a:spLocks noGrp="1" noRot="1" noChangeAspect="1"/>
           </p:cNvSpPr>
           <p:nvPr>
             <p:ph type="sldImg"/>
@@ -769,7 +917,7 @@
       </p:sp>
       <p:sp>
         <p:nvSpPr>
-          <p:cNvPr id="869660160" name="Notes Placeholder 2"/>
+          <p:cNvPr id="190101599" name="Notes Placeholder 2"/>
           <p:cNvSpPr>
             <a:spLocks noGrp="1"/>
           </p:cNvSpPr>
@@ -791,7 +939,7 @@
       </p:sp>
       <p:sp>
         <p:nvSpPr>
-          <p:cNvPr id="493002724" name="Slide Number Placeholder 3"/>
+          <p:cNvPr id="557234395" name="Slide Number Placeholder 3"/>
           <p:cNvSpPr>
             <a:spLocks noGrp="1"/>
           </p:cNvSpPr>
@@ -809,7 +957,7 @@
             </a:pPr>
             <a:fld id="{F7021451-1387-4CA6-816F-3879F97B5CBC}" type="slidenum">
               <a:rPr lang="en-US"/>
-              <a:t>4</a:t>
+              <a:t>3</a:t>
             </a:fld>
             <a:endParaRPr lang="en-US"/>
           </a:p>
@@ -823,9 +971,123 @@
 </p:notes>
 </file>
 
+<file path=ppt/notesSlides/notesSlide4.xml><?xml version="1.0" encoding="utf-8"?>
+<p:notes xmlns:a="http://schemas.openxmlformats.org/drawingml/2006/main" xmlns:r="http://schemas.openxmlformats.org/officeDocument/2006/relationships" xmlns:p="http://schemas.openxmlformats.org/presentationml/2006/main">
+  <p:cSld>
+    <p:spTree>
+      <p:nvGrpSpPr>
+        <p:cNvPr id="1" name="">
+          <a:extLst>
+            <a:ext uri="{FF2B5EF4-FFF2-40B4-BE49-F238E27FC236}">
+              <a16:creationId xmlns:a16="http://schemas.microsoft.com/office/drawing/2014/main" id="{731C2CA7-5EF6-B722-B52C-CF507248DA71}"/>
+            </a:ext>
+          </a:extLst>
+        </p:cNvPr>
+        <p:cNvGrpSpPr/>
+        <p:nvPr/>
+      </p:nvGrpSpPr>
+      <p:grpSpPr bwMode="auto">
+        <a:xfrm>
+          <a:off x="0" y="0"/>
+          <a:ext cx="0" cy="0"/>
+          <a:chOff x="0" y="0"/>
+          <a:chExt cx="0" cy="0"/>
+        </a:xfrm>
+      </p:grpSpPr>
+      <p:sp>
+        <p:nvSpPr>
+          <p:cNvPr id="1528521434" name="Slide Image Placeholder 1">
+            <a:extLst>
+              <a:ext uri="{FF2B5EF4-FFF2-40B4-BE49-F238E27FC236}">
+                <a16:creationId xmlns:a16="http://schemas.microsoft.com/office/drawing/2014/main" id="{B5191E80-6DD9-41BA-AB28-706A44F1E64B}"/>
+              </a:ext>
+            </a:extLst>
+          </p:cNvPr>
+          <p:cNvSpPr>
+            <a:spLocks noGrp="1" noRot="1" noChangeAspect="1"/>
+          </p:cNvSpPr>
+          <p:nvPr>
+            <p:ph type="sldImg"/>
+          </p:nvPr>
+        </p:nvSpPr>
+        <p:spPr bwMode="auto"/>
+      </p:sp>
+      <p:sp>
+        <p:nvSpPr>
+          <p:cNvPr id="190101599" name="Notes Placeholder 2">
+            <a:extLst>
+              <a:ext uri="{FF2B5EF4-FFF2-40B4-BE49-F238E27FC236}">
+                <a16:creationId xmlns:a16="http://schemas.microsoft.com/office/drawing/2014/main" id="{9564F542-3F7B-600C-F051-BD145768864E}"/>
+              </a:ext>
+            </a:extLst>
+          </p:cNvPr>
+          <p:cNvSpPr>
+            <a:spLocks noGrp="1"/>
+          </p:cNvSpPr>
+          <p:nvPr>
+            <p:ph type="body" idx="1"/>
+          </p:nvPr>
+        </p:nvSpPr>
+        <p:spPr bwMode="auto"/>
+        <p:txBody>
+          <a:bodyPr/>
+          <a:lstStyle/>
+          <a:p>
+            <a:pPr>
+              <a:defRPr/>
+            </a:pPr>
+            <a:endParaRPr lang="en-US"/>
+          </a:p>
+        </p:txBody>
+      </p:sp>
+      <p:sp>
+        <p:nvSpPr>
+          <p:cNvPr id="557234395" name="Slide Number Placeholder 3">
+            <a:extLst>
+              <a:ext uri="{FF2B5EF4-FFF2-40B4-BE49-F238E27FC236}">
+                <a16:creationId xmlns:a16="http://schemas.microsoft.com/office/drawing/2014/main" id="{4C220B32-0D4C-BC8E-F38F-466BAB4C8F06}"/>
+              </a:ext>
+            </a:extLst>
+          </p:cNvPr>
+          <p:cNvSpPr>
+            <a:spLocks noGrp="1"/>
+          </p:cNvSpPr>
+          <p:nvPr>
+            <p:ph type="sldNum" sz="quarter" idx="10"/>
+          </p:nvPr>
+        </p:nvSpPr>
+        <p:spPr bwMode="auto"/>
+        <p:txBody>
+          <a:bodyPr/>
+          <a:lstStyle/>
+          <a:p>
+            <a:pPr>
+              <a:defRPr/>
+            </a:pPr>
+            <a:fld id="{F7021451-1387-4CA6-816F-3879F97B5CBC}" type="slidenum">
+              <a:rPr lang="en-US"/>
+              <a:t>4</a:t>
+            </a:fld>
+            <a:endParaRPr lang="en-US"/>
+          </a:p>
+        </p:txBody>
+      </p:sp>
+    </p:spTree>
+    <p:extLst>
+      <p:ext uri="{BB962C8B-B14F-4D97-AF65-F5344CB8AC3E}">
+        <p14:creationId xmlns:p14="http://schemas.microsoft.com/office/powerpoint/2010/main" val="226331049"/>
+      </p:ext>
+    </p:extLst>
+  </p:cSld>
+  <p:clrMapOvr>
+    <a:masterClrMapping/>
+  </p:clrMapOvr>
+</p:notes>
+</file>
+
 <file path=ppt/notesSlides/notesSlide5.xml><?xml version="1.0" encoding="utf-8"?>
-<p:notes xmlns:a="http://schemas.openxmlformats.org/drawingml/2006/main" xmlns:r="http://schemas.openxmlformats.org/officeDocument/2006/relationships" xmlns:p="http://schemas.openxmlformats.org/presentationml/2006/main" xmlns:m="http://schemas.openxmlformats.org/officeDocument/2006/math" xmlns:w="http://schemas.openxmlformats.org/wordprocessingml/2006/main">
-  <p:cSld name="">
+<p:notes xmlns:a="http://schemas.openxmlformats.org/drawingml/2006/main" xmlns:r="http://schemas.openxmlformats.org/officeDocument/2006/relationships" xmlns:p="http://schemas.openxmlformats.org/presentationml/2006/main">
+  <p:cSld>
     <p:spTree>
       <p:nvGrpSpPr>
         <p:cNvPr id="1" name=""/>
@@ -842,9 +1104,9 @@
       </p:grpSpPr>
       <p:sp>
         <p:nvSpPr>
-          <p:cNvPr id="1929073818" name="Slide Image Placeholder 1"/>
+          <p:cNvPr id="1156869439" name="Slide Image Placeholder 1"/>
           <p:cNvSpPr>
-            <a:spLocks noChangeAspect="1" noGrp="1" noRot="1"/>
+            <a:spLocks noGrp="1" noRot="1" noChangeAspect="1"/>
           </p:cNvSpPr>
           <p:nvPr>
             <p:ph type="sldImg"/>
@@ -854,7 +1116,7 @@
       </p:sp>
       <p:sp>
         <p:nvSpPr>
-          <p:cNvPr id="990785344" name="Notes Placeholder 2"/>
+          <p:cNvPr id="869660160" name="Notes Placeholder 2"/>
           <p:cNvSpPr>
             <a:spLocks noGrp="1"/>
           </p:cNvSpPr>
@@ -876,7 +1138,7 @@
       </p:sp>
       <p:sp>
         <p:nvSpPr>
-          <p:cNvPr id="1358138362" name="Slide Number Placeholder 3"/>
+          <p:cNvPr id="493002724" name="Slide Number Placeholder 3"/>
           <p:cNvSpPr>
             <a:spLocks noGrp="1"/>
           </p:cNvSpPr>
@@ -909,8 +1171,8 @@
 </file>
 
 <file path=ppt/notesSlides/notesSlide6.xml><?xml version="1.0" encoding="utf-8"?>
-<p:notes xmlns:a="http://schemas.openxmlformats.org/drawingml/2006/main" xmlns:r="http://schemas.openxmlformats.org/officeDocument/2006/relationships" xmlns:p="http://schemas.openxmlformats.org/presentationml/2006/main" xmlns:m="http://schemas.openxmlformats.org/officeDocument/2006/math" xmlns:w="http://schemas.openxmlformats.org/wordprocessingml/2006/main">
-  <p:cSld name="">
+<p:notes xmlns:a="http://schemas.openxmlformats.org/drawingml/2006/main" xmlns:r="http://schemas.openxmlformats.org/officeDocument/2006/relationships" xmlns:p="http://schemas.openxmlformats.org/presentationml/2006/main">
+  <p:cSld>
     <p:spTree>
       <p:nvGrpSpPr>
         <p:cNvPr id="1" name=""/>
@@ -927,9 +1189,9 @@
       </p:grpSpPr>
       <p:sp>
         <p:nvSpPr>
-          <p:cNvPr id="439771538" name="Slide Image Placeholder 1"/>
+          <p:cNvPr id="1929073818" name="Slide Image Placeholder 1"/>
           <p:cNvSpPr>
-            <a:spLocks noChangeAspect="1" noGrp="1" noRot="1"/>
+            <a:spLocks noGrp="1" noRot="1" noChangeAspect="1"/>
           </p:cNvSpPr>
           <p:nvPr>
             <p:ph type="sldImg"/>
@@ -939,7 +1201,7 @@
       </p:sp>
       <p:sp>
         <p:nvSpPr>
-          <p:cNvPr id="1489482034" name="Notes Placeholder 2"/>
+          <p:cNvPr id="990785344" name="Notes Placeholder 2"/>
           <p:cNvSpPr>
             <a:spLocks noGrp="1"/>
           </p:cNvSpPr>
@@ -961,7 +1223,7 @@
       </p:sp>
       <p:sp>
         <p:nvSpPr>
-          <p:cNvPr id="1339991857" name="Slide Number Placeholder 3"/>
+          <p:cNvPr id="1358138362" name="Slide Number Placeholder 3"/>
           <p:cNvSpPr>
             <a:spLocks noGrp="1"/>
           </p:cNvSpPr>
@@ -994,8 +1256,8 @@
 </file>
 
 <file path=ppt/notesSlides/notesSlide7.xml><?xml version="1.0" encoding="utf-8"?>
-<p:notes xmlns:a="http://schemas.openxmlformats.org/drawingml/2006/main" xmlns:r="http://schemas.openxmlformats.org/officeDocument/2006/relationships" xmlns:p="http://schemas.openxmlformats.org/presentationml/2006/main" xmlns:m="http://schemas.openxmlformats.org/officeDocument/2006/math" xmlns:w="http://schemas.openxmlformats.org/wordprocessingml/2006/main">
-  <p:cSld name="">
+<p:notes xmlns:a="http://schemas.openxmlformats.org/drawingml/2006/main" xmlns:r="http://schemas.openxmlformats.org/officeDocument/2006/relationships" xmlns:p="http://schemas.openxmlformats.org/presentationml/2006/main">
+  <p:cSld>
     <p:spTree>
       <p:nvGrpSpPr>
         <p:cNvPr id="1" name=""/>
@@ -1012,9 +1274,9 @@
       </p:grpSpPr>
       <p:sp>
         <p:nvSpPr>
-          <p:cNvPr id="1867022375" name="Slide Image Placeholder 1"/>
+          <p:cNvPr id="439771538" name="Slide Image Placeholder 1"/>
           <p:cNvSpPr>
-            <a:spLocks noChangeAspect="1" noGrp="1" noRot="1"/>
+            <a:spLocks noGrp="1" noRot="1" noChangeAspect="1"/>
           </p:cNvSpPr>
           <p:nvPr>
             <p:ph type="sldImg"/>
@@ -1024,7 +1286,7 @@
       </p:sp>
       <p:sp>
         <p:nvSpPr>
-          <p:cNvPr id="1392575262" name="Notes Placeholder 2"/>
+          <p:cNvPr id="1489482034" name="Notes Placeholder 2"/>
           <p:cNvSpPr>
             <a:spLocks noGrp="1"/>
           </p:cNvSpPr>
@@ -1046,7 +1308,7 @@
       </p:sp>
       <p:sp>
         <p:nvSpPr>
-          <p:cNvPr id="1360790406" name="Slide Number Placeholder 3"/>
+          <p:cNvPr id="1339991857" name="Slide Number Placeholder 3"/>
           <p:cNvSpPr>
             <a:spLocks noGrp="1"/>
           </p:cNvSpPr>
@@ -1079,8 +1341,8 @@
 </file>
 
 <file path=ppt/notesSlides/notesSlide8.xml><?xml version="1.0" encoding="utf-8"?>
-<p:notes xmlns:a="http://schemas.openxmlformats.org/drawingml/2006/main" xmlns:r="http://schemas.openxmlformats.org/officeDocument/2006/relationships" xmlns:p="http://schemas.openxmlformats.org/presentationml/2006/main" xmlns:m="http://schemas.openxmlformats.org/officeDocument/2006/math" xmlns:w="http://schemas.openxmlformats.org/wordprocessingml/2006/main">
-  <p:cSld name="">
+<p:notes xmlns:a="http://schemas.openxmlformats.org/drawingml/2006/main" xmlns:r="http://schemas.openxmlformats.org/officeDocument/2006/relationships" xmlns:p="http://schemas.openxmlformats.org/presentationml/2006/main">
+  <p:cSld>
     <p:spTree>
       <p:nvGrpSpPr>
         <p:cNvPr id="1" name=""/>
@@ -1097,9 +1359,9 @@
       </p:grpSpPr>
       <p:sp>
         <p:nvSpPr>
-          <p:cNvPr id="1807158865" name="Slide Image Placeholder 1"/>
+          <p:cNvPr id="1867022375" name="Slide Image Placeholder 1"/>
           <p:cNvSpPr>
-            <a:spLocks noChangeAspect="1" noGrp="1" noRot="1"/>
+            <a:spLocks noGrp="1" noRot="1" noChangeAspect="1"/>
           </p:cNvSpPr>
           <p:nvPr>
             <p:ph type="sldImg"/>
@@ -1109,7 +1371,7 @@
       </p:sp>
       <p:sp>
         <p:nvSpPr>
-          <p:cNvPr id="1983644926" name="Notes Placeholder 2"/>
+          <p:cNvPr id="1392575262" name="Notes Placeholder 2"/>
           <p:cNvSpPr>
             <a:spLocks noGrp="1"/>
           </p:cNvSpPr>
@@ -1131,7 +1393,7 @@
       </p:sp>
       <p:sp>
         <p:nvSpPr>
-          <p:cNvPr id="977044513" name="Slide Number Placeholder 3"/>
+          <p:cNvPr id="1360790406" name="Slide Number Placeholder 3"/>
           <p:cNvSpPr>
             <a:spLocks noGrp="1"/>
           </p:cNvSpPr>
@@ -1164,8 +1426,8 @@
 </file>
 
 <file path=ppt/notesSlides/notesSlide9.xml><?xml version="1.0" encoding="utf-8"?>
-<p:notes xmlns:a="http://schemas.openxmlformats.org/drawingml/2006/main" xmlns:r="http://schemas.openxmlformats.org/officeDocument/2006/relationships" xmlns:p="http://schemas.openxmlformats.org/presentationml/2006/main" xmlns:m="http://schemas.openxmlformats.org/officeDocument/2006/math" xmlns:w="http://schemas.openxmlformats.org/wordprocessingml/2006/main">
-  <p:cSld name="">
+<p:notes xmlns:a="http://schemas.openxmlformats.org/drawingml/2006/main" xmlns:r="http://schemas.openxmlformats.org/officeDocument/2006/relationships" xmlns:p="http://schemas.openxmlformats.org/presentationml/2006/main">
+  <p:cSld>
     <p:spTree>
       <p:nvGrpSpPr>
         <p:cNvPr id="1" name=""/>
@@ -1182,9 +1444,9 @@
       </p:grpSpPr>
       <p:sp>
         <p:nvSpPr>
-          <p:cNvPr id="137049927" name="Slide Image Placeholder 1"/>
+          <p:cNvPr id="1807158865" name="Slide Image Placeholder 1"/>
           <p:cNvSpPr>
-            <a:spLocks noChangeAspect="1" noGrp="1" noRot="1"/>
+            <a:spLocks noGrp="1" noRot="1" noChangeAspect="1"/>
           </p:cNvSpPr>
           <p:nvPr>
             <p:ph type="sldImg"/>
@@ -1194,7 +1456,7 @@
       </p:sp>
       <p:sp>
         <p:nvSpPr>
-          <p:cNvPr id="1411302840" name="Notes Placeholder 2"/>
+          <p:cNvPr id="1983644926" name="Notes Placeholder 2"/>
           <p:cNvSpPr>
             <a:spLocks noGrp="1"/>
           </p:cNvSpPr>
@@ -1216,7 +1478,7 @@
       </p:sp>
       <p:sp>
         <p:nvSpPr>
-          <p:cNvPr id="327399372" name="Slide Number Placeholder 3"/>
+          <p:cNvPr id="977044513" name="Slide Number Placeholder 3"/>
           <p:cNvSpPr>
             <a:spLocks noGrp="1"/>
           </p:cNvSpPr>
@@ -1249,7 +1511,7 @@
 </file>
 
 <file path=ppt/slideLayouts/slideLayout1.xml><?xml version="1.0" encoding="utf-8"?>
-<p:sldLayout xmlns:a="http://schemas.openxmlformats.org/drawingml/2006/main" xmlns:r="http://schemas.openxmlformats.org/officeDocument/2006/relationships" xmlns:p="http://schemas.openxmlformats.org/presentationml/2006/main" xmlns:m="http://schemas.openxmlformats.org/officeDocument/2006/math" xmlns:w="http://schemas.openxmlformats.org/wordprocessingml/2006/main" matchingName="" preserve="1" showMasterPhAnim="0" showMasterSp="1" userDrawn="1">
+<p:sldLayout xmlns:a="http://schemas.openxmlformats.org/drawingml/2006/main" xmlns:r="http://schemas.openxmlformats.org/officeDocument/2006/relationships" xmlns:p="http://schemas.openxmlformats.org/presentationml/2006/main" showMasterPhAnim="0" preserve="1" userDrawn="1">
   <p:cSld name="DEFAULT">
     <p:bg>
       <p:bgRef idx="1001">
@@ -1279,7 +1541,7 @@
 </file>
 
 <file path=ppt/slideLayouts/slideLayout10.xml><?xml version="1.0" encoding="utf-8"?>
-<p:sldLayout xmlns:a="http://schemas.openxmlformats.org/drawingml/2006/main" xmlns:r="http://schemas.openxmlformats.org/officeDocument/2006/relationships" xmlns:p="http://schemas.openxmlformats.org/presentationml/2006/main" xmlns:m="http://schemas.openxmlformats.org/officeDocument/2006/math" xmlns:w="http://schemas.openxmlformats.org/wordprocessingml/2006/main" matchingName="" preserve="1" showMasterPhAnim="0" showMasterSp="1" userDrawn="1">
+<p:sldLayout xmlns:a="http://schemas.openxmlformats.org/drawingml/2006/main" xmlns:r="http://schemas.openxmlformats.org/officeDocument/2006/relationships" xmlns:p="http://schemas.openxmlformats.org/presentationml/2006/main" showMasterPhAnim="0" preserve="1" userDrawn="1">
   <p:cSld name="Slide 9 master">
     <p:spTree>
       <p:nvGrpSpPr>
@@ -1338,7 +1600,7 @@
       <p:pic>
         <p:nvPicPr>
           <p:cNvPr id="1555348736" name="Image 0" descr="preencoded.png">
-            <a:hlinkClick r:id="rId2" tooltip=""/>
+            <a:hlinkClick r:id="rId2"/>
           </p:cNvPr>
           <p:cNvPicPr>
             <a:picLocks noChangeAspect="1"/>
@@ -1368,7 +1630,7 @@
 </file>
 
 <file path=ppt/slideLayouts/slideLayout2.xml><?xml version="1.0" encoding="utf-8"?>
-<p:sldLayout xmlns:a="http://schemas.openxmlformats.org/drawingml/2006/main" xmlns:r="http://schemas.openxmlformats.org/officeDocument/2006/relationships" xmlns:p="http://schemas.openxmlformats.org/presentationml/2006/main" xmlns:m="http://schemas.openxmlformats.org/officeDocument/2006/math" xmlns:w="http://schemas.openxmlformats.org/wordprocessingml/2006/main" matchingName="" preserve="1" showMasterPhAnim="0" showMasterSp="1" userDrawn="1">
+<p:sldLayout xmlns:a="http://schemas.openxmlformats.org/drawingml/2006/main" xmlns:r="http://schemas.openxmlformats.org/officeDocument/2006/relationships" xmlns:p="http://schemas.openxmlformats.org/presentationml/2006/main" showMasterPhAnim="0" preserve="1" userDrawn="1">
   <p:cSld name="Slide 1 master">
     <p:spTree>
       <p:nvGrpSpPr>
@@ -1427,7 +1689,7 @@
       <p:pic>
         <p:nvPicPr>
           <p:cNvPr id="1229097491" name="Image 0" descr="preencoded.png">
-            <a:hlinkClick r:id="rId2" tooltip=""/>
+            <a:hlinkClick r:id="rId2"/>
           </p:cNvPr>
           <p:cNvPicPr>
             <a:picLocks noChangeAspect="1"/>
@@ -1457,7 +1719,7 @@
 </file>
 
 <file path=ppt/slideLayouts/slideLayout3.xml><?xml version="1.0" encoding="utf-8"?>
-<p:sldLayout xmlns:a="http://schemas.openxmlformats.org/drawingml/2006/main" xmlns:r="http://schemas.openxmlformats.org/officeDocument/2006/relationships" xmlns:p="http://schemas.openxmlformats.org/presentationml/2006/main" xmlns:m="http://schemas.openxmlformats.org/officeDocument/2006/math" xmlns:w="http://schemas.openxmlformats.org/wordprocessingml/2006/main" matchingName="" preserve="1" showMasterPhAnim="0" showMasterSp="1" userDrawn="1">
+<p:sldLayout xmlns:a="http://schemas.openxmlformats.org/drawingml/2006/main" xmlns:r="http://schemas.openxmlformats.org/officeDocument/2006/relationships" xmlns:p="http://schemas.openxmlformats.org/presentationml/2006/main" showMasterPhAnim="0" preserve="1" userDrawn="1">
   <p:cSld name="Slide 2 master">
     <p:spTree>
       <p:nvGrpSpPr>
@@ -1516,7 +1778,7 @@
       <p:pic>
         <p:nvPicPr>
           <p:cNvPr id="946022007" name="Image 0" descr="preencoded.png">
-            <a:hlinkClick r:id="rId2" tooltip=""/>
+            <a:hlinkClick r:id="rId2"/>
           </p:cNvPr>
           <p:cNvPicPr>
             <a:picLocks noChangeAspect="1"/>
@@ -1546,7 +1808,7 @@
 </file>
 
 <file path=ppt/slideLayouts/slideLayout4.xml><?xml version="1.0" encoding="utf-8"?>
-<p:sldLayout xmlns:a="http://schemas.openxmlformats.org/drawingml/2006/main" xmlns:r="http://schemas.openxmlformats.org/officeDocument/2006/relationships" xmlns:p="http://schemas.openxmlformats.org/presentationml/2006/main" xmlns:m="http://schemas.openxmlformats.org/officeDocument/2006/math" xmlns:w="http://schemas.openxmlformats.org/wordprocessingml/2006/main" matchingName="" preserve="1" showMasterPhAnim="0" showMasterSp="1" userDrawn="1">
+<p:sldLayout xmlns:a="http://schemas.openxmlformats.org/drawingml/2006/main" xmlns:r="http://schemas.openxmlformats.org/officeDocument/2006/relationships" xmlns:p="http://schemas.openxmlformats.org/presentationml/2006/main" showMasterPhAnim="0" preserve="1" userDrawn="1">
   <p:cSld name="Slide 3 master">
     <p:spTree>
       <p:nvGrpSpPr>
@@ -1605,7 +1867,7 @@
       <p:pic>
         <p:nvPicPr>
           <p:cNvPr id="808878570" name="Image 0" descr="preencoded.png">
-            <a:hlinkClick r:id="rId2" tooltip=""/>
+            <a:hlinkClick r:id="rId2"/>
           </p:cNvPr>
           <p:cNvPicPr>
             <a:picLocks noChangeAspect="1"/>
@@ -1635,7 +1897,7 @@
 </file>
 
 <file path=ppt/slideLayouts/slideLayout5.xml><?xml version="1.0" encoding="utf-8"?>
-<p:sldLayout xmlns:a="http://schemas.openxmlformats.org/drawingml/2006/main" xmlns:r="http://schemas.openxmlformats.org/officeDocument/2006/relationships" xmlns:p="http://schemas.openxmlformats.org/presentationml/2006/main" xmlns:m="http://schemas.openxmlformats.org/officeDocument/2006/math" xmlns:w="http://schemas.openxmlformats.org/wordprocessingml/2006/main" matchingName="" preserve="1" showMasterPhAnim="0" showMasterSp="1" userDrawn="1">
+<p:sldLayout xmlns:a="http://schemas.openxmlformats.org/drawingml/2006/main" xmlns:r="http://schemas.openxmlformats.org/officeDocument/2006/relationships" xmlns:p="http://schemas.openxmlformats.org/presentationml/2006/main" showMasterPhAnim="0" preserve="1" userDrawn="1">
   <p:cSld name="Slide 4 master">
     <p:spTree>
       <p:nvGrpSpPr>
@@ -1694,7 +1956,7 @@
       <p:pic>
         <p:nvPicPr>
           <p:cNvPr id="1959191267" name="Image 0" descr="preencoded.png">
-            <a:hlinkClick r:id="rId2" tooltip=""/>
+            <a:hlinkClick r:id="rId2"/>
           </p:cNvPr>
           <p:cNvPicPr>
             <a:picLocks noChangeAspect="1"/>
@@ -1724,7 +1986,7 @@
 </file>
 
 <file path=ppt/slideLayouts/slideLayout6.xml><?xml version="1.0" encoding="utf-8"?>
-<p:sldLayout xmlns:a="http://schemas.openxmlformats.org/drawingml/2006/main" xmlns:r="http://schemas.openxmlformats.org/officeDocument/2006/relationships" xmlns:p="http://schemas.openxmlformats.org/presentationml/2006/main" xmlns:m="http://schemas.openxmlformats.org/officeDocument/2006/math" xmlns:w="http://schemas.openxmlformats.org/wordprocessingml/2006/main" matchingName="" preserve="1" showMasterPhAnim="0" showMasterSp="1" userDrawn="1">
+<p:sldLayout xmlns:a="http://schemas.openxmlformats.org/drawingml/2006/main" xmlns:r="http://schemas.openxmlformats.org/officeDocument/2006/relationships" xmlns:p="http://schemas.openxmlformats.org/presentationml/2006/main" showMasterPhAnim="0" preserve="1" userDrawn="1">
   <p:cSld name="Slide 5 master">
     <p:spTree>
       <p:nvGrpSpPr>
@@ -1783,7 +2045,7 @@
       <p:pic>
         <p:nvPicPr>
           <p:cNvPr id="876445039" name="Image 0" descr="preencoded.png">
-            <a:hlinkClick r:id="rId2" tooltip=""/>
+            <a:hlinkClick r:id="rId2"/>
           </p:cNvPr>
           <p:cNvPicPr>
             <a:picLocks noChangeAspect="1"/>
@@ -1813,7 +2075,7 @@
 </file>
 
 <file path=ppt/slideLayouts/slideLayout7.xml><?xml version="1.0" encoding="utf-8"?>
-<p:sldLayout xmlns:a="http://schemas.openxmlformats.org/drawingml/2006/main" xmlns:r="http://schemas.openxmlformats.org/officeDocument/2006/relationships" xmlns:p="http://schemas.openxmlformats.org/presentationml/2006/main" xmlns:m="http://schemas.openxmlformats.org/officeDocument/2006/math" xmlns:w="http://schemas.openxmlformats.org/wordprocessingml/2006/main" matchingName="" preserve="1" showMasterPhAnim="0" showMasterSp="1" userDrawn="1">
+<p:sldLayout xmlns:a="http://schemas.openxmlformats.org/drawingml/2006/main" xmlns:r="http://schemas.openxmlformats.org/officeDocument/2006/relationships" xmlns:p="http://schemas.openxmlformats.org/presentationml/2006/main" showMasterPhAnim="0" preserve="1" userDrawn="1">
   <p:cSld name="Slide 6 master">
     <p:spTree>
       <p:nvGrpSpPr>
@@ -1872,7 +2134,7 @@
       <p:pic>
         <p:nvPicPr>
           <p:cNvPr id="1947315523" name="Image 0" descr="preencoded.png">
-            <a:hlinkClick r:id="rId2" tooltip=""/>
+            <a:hlinkClick r:id="rId2"/>
           </p:cNvPr>
           <p:cNvPicPr>
             <a:picLocks noChangeAspect="1"/>
@@ -1902,7 +2164,7 @@
 </file>
 
 <file path=ppt/slideLayouts/slideLayout8.xml><?xml version="1.0" encoding="utf-8"?>
-<p:sldLayout xmlns:a="http://schemas.openxmlformats.org/drawingml/2006/main" xmlns:r="http://schemas.openxmlformats.org/officeDocument/2006/relationships" xmlns:p="http://schemas.openxmlformats.org/presentationml/2006/main" xmlns:m="http://schemas.openxmlformats.org/officeDocument/2006/math" xmlns:w="http://schemas.openxmlformats.org/wordprocessingml/2006/main" matchingName="" preserve="1" showMasterPhAnim="0" showMasterSp="1" userDrawn="1">
+<p:sldLayout xmlns:a="http://schemas.openxmlformats.org/drawingml/2006/main" xmlns:r="http://schemas.openxmlformats.org/officeDocument/2006/relationships" xmlns:p="http://schemas.openxmlformats.org/presentationml/2006/main" showMasterPhAnim="0" preserve="1" userDrawn="1">
   <p:cSld name="Slide 7 master">
     <p:spTree>
       <p:nvGrpSpPr>
@@ -1961,7 +2223,7 @@
       <p:pic>
         <p:nvPicPr>
           <p:cNvPr id="287620402" name="Image 0" descr="preencoded.png">
-            <a:hlinkClick r:id="rId2" tooltip=""/>
+            <a:hlinkClick r:id="rId2"/>
           </p:cNvPr>
           <p:cNvPicPr>
             <a:picLocks noChangeAspect="1"/>
@@ -1991,7 +2253,7 @@
 </file>
 
 <file path=ppt/slideLayouts/slideLayout9.xml><?xml version="1.0" encoding="utf-8"?>
-<p:sldLayout xmlns:a="http://schemas.openxmlformats.org/drawingml/2006/main" xmlns:r="http://schemas.openxmlformats.org/officeDocument/2006/relationships" xmlns:p="http://schemas.openxmlformats.org/presentationml/2006/main" xmlns:m="http://schemas.openxmlformats.org/officeDocument/2006/math" xmlns:w="http://schemas.openxmlformats.org/wordprocessingml/2006/main" matchingName="" preserve="1" showMasterPhAnim="0" showMasterSp="1" userDrawn="1">
+<p:sldLayout xmlns:a="http://schemas.openxmlformats.org/drawingml/2006/main" xmlns:r="http://schemas.openxmlformats.org/officeDocument/2006/relationships" xmlns:p="http://schemas.openxmlformats.org/presentationml/2006/main" showMasterPhAnim="0" preserve="1" userDrawn="1">
   <p:cSld name="Slide 8 master">
     <p:spTree>
       <p:nvGrpSpPr>
@@ -2050,7 +2312,7 @@
       <p:pic>
         <p:nvPicPr>
           <p:cNvPr id="717018877" name="Image 0" descr="preencoded.png">
-            <a:hlinkClick r:id="rId2" tooltip=""/>
+            <a:hlinkClick r:id="rId2"/>
           </p:cNvPr>
           <p:cNvPicPr>
             <a:picLocks noChangeAspect="1"/>
@@ -2080,8 +2342,13 @@
 </file>
 
 <file path=ppt/slideMasters/slideMaster1.xml><?xml version="1.0" encoding="utf-8"?>
-<p:sldMaster xmlns:a="http://schemas.openxmlformats.org/drawingml/2006/main" xmlns:r="http://schemas.openxmlformats.org/officeDocument/2006/relationships" xmlns:p="http://schemas.openxmlformats.org/presentationml/2006/main" xmlns:m="http://schemas.openxmlformats.org/officeDocument/2006/math" xmlns:w="http://schemas.openxmlformats.org/wordprocessingml/2006/main" preserve="0">
-  <p:cSld name="">
+<p:sldMaster xmlns:a="http://schemas.openxmlformats.org/drawingml/2006/main" xmlns:r="http://schemas.openxmlformats.org/officeDocument/2006/relationships" xmlns:p="http://schemas.openxmlformats.org/presentationml/2006/main">
+  <p:cSld>
+    <p:bg>
+      <p:bgRef idx="1001">
+        <a:schemeClr val="bg1"/>
+      </p:bgRef>
+    </p:bg>
     <p:spTree>
       <p:nvGrpSpPr>
         <p:cNvPr id="1" name=""/>
@@ -2111,7 +2378,7 @@
     <p:sldLayoutId id="2147483657" r:id="rId9"/>
     <p:sldLayoutId id="2147483658" r:id="rId10"/>
   </p:sldLayoutIdLst>
-  <p:hf dt="0" ftr="0" hdr="0" sldNum="0"/>
+  <p:hf sldNum="0" hdr="0" ftr="0" dt="0"/>
   <p:txStyles>
     <p:titleStyle>
       <a:lvl1pPr algn="ctr" defTabSz="914400" rtl="0">
@@ -2366,7 +2633,7 @@
 </file>
 
 <file path=ppt/slides/slide1.xml><?xml version="1.0" encoding="utf-8"?>
-<p:sld xmlns:a="http://schemas.openxmlformats.org/drawingml/2006/main" xmlns:r="http://schemas.openxmlformats.org/officeDocument/2006/relationships" xmlns:p="http://schemas.openxmlformats.org/presentationml/2006/main" xmlns:m="http://schemas.openxmlformats.org/officeDocument/2006/math" xmlns:w="http://schemas.openxmlformats.org/wordprocessingml/2006/main" xmlns:mc="http://schemas.openxmlformats.org/markup-compatibility/2006" showMasterPhAnim="0" showMasterSp="1" show="1">
+<p:sld xmlns:a="http://schemas.openxmlformats.org/drawingml/2006/main" xmlns:r="http://schemas.openxmlformats.org/officeDocument/2006/relationships" xmlns:p="http://schemas.openxmlformats.org/presentationml/2006/main" showMasterPhAnim="0">
   <p:cSld name="Slide 1">
     <p:spTree>
       <p:nvGrpSpPr>
@@ -2513,7 +2780,7 @@
       </p:sp>
       <p:pic>
         <p:nvPicPr>
-          <p:cNvPr id="394231213" name=""/>
+          <p:cNvPr id="394231213" name="Рисунок 394231212"/>
           <p:cNvPicPr>
             <a:picLocks noChangeAspect="1"/>
           </p:cNvPicPr>
@@ -2538,19 +2805,11 @@
   <p:clrMapOvr>
     <a:masterClrMapping/>
   </p:clrMapOvr>
-  <mc:AlternateContent xmlns:mc="http://schemas.openxmlformats.org/markup-compatibility/2006">
-    <mc:Choice xmlns:p159="http://schemas.microsoft.com/office/powerpoint/2015/09/main" xmlns:p14="http://schemas.microsoft.com/office/powerpoint/2010/main" Requires="p159">
-      <p:transition p14:dur="2000" advClick="1"/>
-    </mc:Choice>
-    <mc:Fallback>
-      <p:transition advClick="1"/>
-    </mc:Fallback>
-  </mc:AlternateContent>
 </p:sld>
 </file>
 
 <file path=ppt/slides/slide10.xml><?xml version="1.0" encoding="utf-8"?>
-<p:sld xmlns:a="http://schemas.openxmlformats.org/drawingml/2006/main" xmlns:r="http://schemas.openxmlformats.org/officeDocument/2006/relationships" xmlns:p="http://schemas.openxmlformats.org/presentationml/2006/main" xmlns:m="http://schemas.openxmlformats.org/officeDocument/2006/math" xmlns:w="http://schemas.openxmlformats.org/wordprocessingml/2006/main" xmlns:mc="http://schemas.openxmlformats.org/markup-compatibility/2006" showMasterPhAnim="0" showMasterSp="1" show="1">
+<p:sld xmlns:a="http://schemas.openxmlformats.org/drawingml/2006/main" xmlns:r="http://schemas.openxmlformats.org/officeDocument/2006/relationships" xmlns:p="http://schemas.openxmlformats.org/presentationml/2006/main" showMasterPhAnim="0">
   <p:cSld name="Slide 9">
     <p:spTree>
       <p:nvGrpSpPr>
@@ -2568,14 +2827,14 @@
       </p:grpSpPr>
       <p:sp>
         <p:nvSpPr>
-          <p:cNvPr id="1053305527" name="Text 0"/>
-          <p:cNvSpPr/>
-          <p:nvPr/>
-        </p:nvSpPr>
-        <p:spPr bwMode="auto">
-          <a:xfrm>
-            <a:off x="2329812" y="3387660"/>
-            <a:ext cx="10180563" cy="727138"/>
+          <p:cNvPr id="2130163748" name="Text 0"/>
+          <p:cNvSpPr/>
+          <p:nvPr/>
+        </p:nvSpPr>
+        <p:spPr bwMode="auto">
+          <a:xfrm>
+            <a:off x="793790" y="1692831"/>
+            <a:ext cx="8461058" cy="708779"/>
           </a:xfrm>
           <a:prstGeom prst="rect">
             <a:avLst/>
@@ -2589,13 +2848,13 @@
           <a:p>
             <a:pPr marL="0" indent="0" algn="l">
               <a:lnSpc>
-                <a:spcPts val="5549"/>
+                <a:spcPts val="5550"/>
               </a:lnSpc>
               <a:buNone/>
               <a:defRPr/>
             </a:pPr>
             <a:r>
-              <a:rPr lang="ru-RU" sz="7200">
+              <a:rPr lang="en-US" sz="4450">
                 <a:solidFill>
                   <a:srgbClr val="F3F3F2"/>
                 </a:solidFill>
@@ -2603,22 +2862,22 @@
                 <a:ea typeface="IBM Plex Sans Medium"/>
                 <a:cs typeface="IBM Plex Sans Medium"/>
               </a:rPr>
-              <a:t>Спасибо за внимание</a:t>
-            </a:r>
-            <a:endParaRPr sz="7200"/>
-          </a:p>
-        </p:txBody>
-      </p:sp>
-      <p:sp>
-        <p:nvSpPr>
-          <p:cNvPr id="2052193394" name="Text 7"/>
-          <p:cNvSpPr/>
-          <p:nvPr/>
-        </p:nvSpPr>
-        <p:spPr bwMode="auto">
-          <a:xfrm>
-            <a:off x="5397538" y="4114800"/>
-            <a:ext cx="3548103" cy="363261"/>
+              <a:t>Pixels — CSS без компромиссов</a:t>
+            </a:r>
+            <a:endParaRPr lang="en-US" sz="4450"/>
+          </a:p>
+        </p:txBody>
+      </p:sp>
+      <p:sp>
+        <p:nvSpPr>
+          <p:cNvPr id="1650311294" name="Text 1"/>
+          <p:cNvSpPr/>
+          <p:nvPr/>
+        </p:nvSpPr>
+        <p:spPr bwMode="auto">
+          <a:xfrm>
+            <a:off x="793790" y="2968585"/>
+            <a:ext cx="4198382" cy="425291"/>
           </a:xfrm>
           <a:prstGeom prst="rect">
             <a:avLst/>
@@ -2632,13 +2891,57 @@
           <a:p>
             <a:pPr marL="0" indent="0" algn="l">
               <a:lnSpc>
-                <a:spcPts val="2849"/>
+                <a:spcPts val="3300"/>
               </a:lnSpc>
               <a:buNone/>
               <a:defRPr/>
             </a:pPr>
             <a:r>
-              <a:rPr lang="en-US" sz="1750" b="1">
+              <a:rPr lang="en-US" sz="2650">
+                <a:solidFill>
+                  <a:srgbClr val="F3F3F2"/>
+                </a:solidFill>
+                <a:latin typeface="IBM Plex Sans Medium"/>
+                <a:ea typeface="IBM Plex Sans Medium"/>
+                <a:cs typeface="IBM Plex Sans Medium"/>
+              </a:rPr>
+              <a:t>Ключевые преимущества</a:t>
+            </a:r>
+            <a:endParaRPr lang="en-US" sz="2650"/>
+          </a:p>
+        </p:txBody>
+      </p:sp>
+      <p:sp>
+        <p:nvSpPr>
+          <p:cNvPr id="1654479021" name="Text 2"/>
+          <p:cNvSpPr/>
+          <p:nvPr/>
+        </p:nvSpPr>
+        <p:spPr bwMode="auto">
+          <a:xfrm>
+            <a:off x="793790" y="3620691"/>
+            <a:ext cx="6924437" cy="362903"/>
+          </a:xfrm>
+          <a:prstGeom prst="rect">
+            <a:avLst/>
+          </a:prstGeom>
+          <a:noFill/>
+          <a:ln/>
+        </p:spPr>
+        <p:txBody>
+          <a:bodyPr wrap="none" lIns="0" tIns="0" rIns="0" bIns="0" rtlCol="0" anchor="t"/>
+          <a:lstStyle/>
+          <a:p>
+            <a:pPr marL="342900" indent="-342900" algn="l">
+              <a:lnSpc>
+                <a:spcPts val="2850"/>
+              </a:lnSpc>
+              <a:buSzPct val="100000"/>
+              <a:buChar char="•"/>
+              <a:defRPr/>
+            </a:pPr>
+            <a:r>
+              <a:rPr lang="en-US" sz="1750">
                 <a:solidFill>
                   <a:srgbClr val="D4D4D1"/>
                 </a:solidFill>
@@ -2646,8 +2949,41 @@
                 <a:ea typeface="Roboto"/>
                 <a:cs typeface="Roboto"/>
               </a:rPr>
-              <a:t>GitHub:</a:t>
-            </a:r>
+              <a:t>Векторная четкость на любых экранах</a:t>
+            </a:r>
+            <a:endParaRPr lang="en-US" sz="1750"/>
+          </a:p>
+        </p:txBody>
+      </p:sp>
+      <p:sp>
+        <p:nvSpPr>
+          <p:cNvPr id="717026560" name="Text 3"/>
+          <p:cNvSpPr/>
+          <p:nvPr/>
+        </p:nvSpPr>
+        <p:spPr bwMode="auto">
+          <a:xfrm>
+            <a:off x="793790" y="4062889"/>
+            <a:ext cx="6924437" cy="362903"/>
+          </a:xfrm>
+          <a:prstGeom prst="rect">
+            <a:avLst/>
+          </a:prstGeom>
+          <a:noFill/>
+          <a:ln/>
+        </p:spPr>
+        <p:txBody>
+          <a:bodyPr wrap="none" lIns="0" tIns="0" rIns="0" bIns="0" rtlCol="0" anchor="t"/>
+          <a:lstStyle/>
+          <a:p>
+            <a:pPr marL="342900" indent="-342900" algn="l">
+              <a:lnSpc>
+                <a:spcPts val="2850"/>
+              </a:lnSpc>
+              <a:buSzPct val="100000"/>
+              <a:buChar char="•"/>
+              <a:defRPr/>
+            </a:pPr>
             <a:r>
               <a:rPr lang="en-US" sz="1750">
                 <a:solidFill>
@@ -2657,27 +2993,201 @@
                 <a:ea typeface="Roboto"/>
                 <a:cs typeface="Roboto"/>
               </a:rPr>
-              <a:t> </a:t>
-            </a:r>
-            <a:r>
-              <a:rPr lang="en-US" sz="1750" u="sng">
-                <a:solidFill>
-                  <a:schemeClr val="hlink"/>
+              <a:t>Нулевая задержка загрузки</a:t>
+            </a:r>
+            <a:endParaRPr lang="en-US" sz="1750"/>
+          </a:p>
+        </p:txBody>
+      </p:sp>
+      <p:sp>
+        <p:nvSpPr>
+          <p:cNvPr id="1848289755" name="Text 4"/>
+          <p:cNvSpPr/>
+          <p:nvPr/>
+        </p:nvSpPr>
+        <p:spPr bwMode="auto">
+          <a:xfrm>
+            <a:off x="793790" y="4505087"/>
+            <a:ext cx="6924437" cy="362903"/>
+          </a:xfrm>
+          <a:prstGeom prst="rect">
+            <a:avLst/>
+          </a:prstGeom>
+          <a:noFill/>
+          <a:ln/>
+        </p:spPr>
+        <p:txBody>
+          <a:bodyPr wrap="none" lIns="0" tIns="0" rIns="0" bIns="0" rtlCol="0" anchor="t"/>
+          <a:lstStyle/>
+          <a:p>
+            <a:pPr marL="342900" indent="-342900" algn="l">
+              <a:lnSpc>
+                <a:spcPts val="2850"/>
+              </a:lnSpc>
+              <a:buSzPct val="100000"/>
+              <a:buChar char="•"/>
+              <a:defRPr/>
+            </a:pPr>
+            <a:r>
+              <a:rPr lang="en-US" sz="1750">
+                <a:solidFill>
+                  <a:srgbClr val="D4D4D1"/>
                 </a:solidFill>
                 <a:latin typeface="Roboto"/>
                 <a:ea typeface="Roboto"/>
                 <a:cs typeface="Roboto"/>
-                <a:hlinkClick r:id="rId3" tooltip=""/>
-              </a:rPr>
-              <a:t>github.com/Korsany/Pixels</a:t>
+              </a:rPr>
+              <a:t>Чистый JavaScript без библиотек</a:t>
             </a:r>
             <a:endParaRPr lang="en-US" sz="1750"/>
           </a:p>
         </p:txBody>
+      </p:sp>
+      <p:sp>
+        <p:nvSpPr>
+          <p:cNvPr id="1298308717" name="Text 5"/>
+          <p:cNvSpPr/>
+          <p:nvPr/>
+        </p:nvSpPr>
+        <p:spPr bwMode="auto">
+          <a:xfrm>
+            <a:off x="793790" y="4947285"/>
+            <a:ext cx="6924437" cy="362903"/>
+          </a:xfrm>
+          <a:prstGeom prst="rect">
+            <a:avLst/>
+          </a:prstGeom>
+          <a:noFill/>
+          <a:ln/>
+        </p:spPr>
+        <p:txBody>
+          <a:bodyPr wrap="none" lIns="0" tIns="0" rIns="0" bIns="0" rtlCol="0" anchor="t"/>
+          <a:lstStyle/>
+          <a:p>
+            <a:pPr marL="342900" indent="-342900" algn="l">
+              <a:lnSpc>
+                <a:spcPts val="2850"/>
+              </a:lnSpc>
+              <a:buSzPct val="100000"/>
+              <a:buChar char="•"/>
+              <a:defRPr/>
+            </a:pPr>
+            <a:r>
+              <a:rPr lang="en-US" sz="1750">
+                <a:solidFill>
+                  <a:srgbClr val="D4D4D1"/>
+                </a:solidFill>
+                <a:latin typeface="Roboto"/>
+                <a:ea typeface="Roboto"/>
+                <a:cs typeface="Roboto"/>
+              </a:rPr>
+              <a:t>Полный контроль через код</a:t>
+            </a:r>
+            <a:endParaRPr lang="en-US" sz="1750"/>
+          </a:p>
+        </p:txBody>
+      </p:sp>
+      <p:sp>
+        <p:nvSpPr>
+          <p:cNvPr id="693835616" name="Shape 8"/>
+          <p:cNvSpPr/>
+          <p:nvPr/>
+        </p:nvSpPr>
+        <p:spPr bwMode="auto">
+          <a:xfrm>
+            <a:off x="8279249" y="2996922"/>
+            <a:ext cx="5564862" cy="2415421"/>
+          </a:xfrm>
+          <a:prstGeom prst="roundRect">
+            <a:avLst>
+              <a:gd name="adj" fmla="val 1409"/>
+            </a:avLst>
+          </a:prstGeom>
+          <a:solidFill>
+            <a:srgbClr val="4D1F00"/>
+          </a:solidFill>
+          <a:ln/>
+        </p:spPr>
       </p:sp>
       <p:pic>
         <p:nvPicPr>
-          <p:cNvPr id="1065103749" name=""/>
+          <p:cNvPr id="1655875260" name="Image 0" descr="preencoded.png"/>
+          <p:cNvPicPr>
+            <a:picLocks noChangeAspect="1"/>
+          </p:cNvPicPr>
+          <p:nvPr/>
+        </p:nvPicPr>
+        <p:blipFill rotWithShape="1">
+          <a:blip r:embed="rId3"/>
+          <a:stretch/>
+        </p:blipFill>
+        <p:spPr bwMode="auto">
+          <a:xfrm>
+            <a:off x="8506063" y="3341013"/>
+            <a:ext cx="283488" cy="226814"/>
+          </a:xfrm>
+          <a:prstGeom prst="rect">
+            <a:avLst/>
+          </a:prstGeom>
+        </p:spPr>
+      </p:pic>
+      <p:sp>
+        <p:nvSpPr>
+          <p:cNvPr id="1555851315" name="Text 9"/>
+          <p:cNvSpPr/>
+          <p:nvPr/>
+        </p:nvSpPr>
+        <p:spPr bwMode="auto">
+          <a:xfrm>
+            <a:off x="9016365" y="3280410"/>
+            <a:ext cx="4600932" cy="1814513"/>
+          </a:xfrm>
+          <a:prstGeom prst="rect">
+            <a:avLst/>
+          </a:prstGeom>
+          <a:noFill/>
+          <a:ln/>
+        </p:spPr>
+        <p:txBody>
+          <a:bodyPr wrap="square" lIns="0" tIns="0" rIns="0" bIns="0" rtlCol="0" anchor="t"/>
+          <a:lstStyle/>
+          <a:p>
+            <a:pPr marL="0" indent="0" algn="l">
+              <a:lnSpc>
+                <a:spcPts val="2850"/>
+              </a:lnSpc>
+              <a:buNone/>
+              <a:defRPr/>
+            </a:pPr>
+            <a:r>
+              <a:rPr lang="en-US" sz="1750" b="1">
+                <a:solidFill>
+                  <a:srgbClr val="FFFFFF"/>
+                </a:solidFill>
+                <a:latin typeface="Roboto"/>
+                <a:ea typeface="Roboto"/>
+                <a:cs typeface="Roboto"/>
+              </a:rPr>
+              <a:t>Вывод:</a:t>
+            </a:r>
+            <a:r>
+              <a:rPr lang="en-US" sz="1750">
+                <a:solidFill>
+                  <a:srgbClr val="FFFFFF"/>
+                </a:solidFill>
+                <a:latin typeface="Roboto"/>
+                <a:ea typeface="Roboto"/>
+                <a:cs typeface="Roboto"/>
+              </a:rPr>
+              <a:t> CSS box-shadow превращает браузер в графический редактор, доказывая, что веб-стандарты способны решать задачи, выходящие за рамки их изначального предназначения</a:t>
+            </a:r>
+            <a:endParaRPr lang="en-US" sz="1750"/>
+          </a:p>
+        </p:txBody>
+      </p:sp>
+      <p:pic>
+        <p:nvPicPr>
+          <p:cNvPr id="2051207809" name="Рисунок 2051207808"/>
           <p:cNvPicPr>
             <a:picLocks noChangeAspect="1"/>
           </p:cNvPicPr>
@@ -2689,7 +3199,7 @@
         </p:blipFill>
         <p:spPr bwMode="auto">
           <a:xfrm>
-            <a:off x="12337141" y="7540623"/>
+            <a:off x="12337142" y="7540624"/>
             <a:ext cx="2228850" cy="657225"/>
           </a:xfrm>
           <a:prstGeom prst="rect">
@@ -2702,19 +3212,167 @@
   <p:clrMapOvr>
     <a:masterClrMapping/>
   </p:clrMapOvr>
-  <mc:AlternateContent xmlns:mc="http://schemas.openxmlformats.org/markup-compatibility/2006">
-    <mc:Choice xmlns:p159="http://schemas.microsoft.com/office/powerpoint/2015/09/main" xmlns:p14="http://schemas.microsoft.com/office/powerpoint/2010/main" Requires="p159">
-      <p:transition p14:dur="2000" advClick="1"/>
-    </mc:Choice>
-    <mc:Fallback>
-      <p:transition advClick="1"/>
-    </mc:Fallback>
-  </mc:AlternateContent>
+</p:sld>
+</file>
+
+<file path=ppt/slides/slide11.xml><?xml version="1.0" encoding="utf-8"?>
+<p:sld xmlns:a="http://schemas.openxmlformats.org/drawingml/2006/main" xmlns:r="http://schemas.openxmlformats.org/officeDocument/2006/relationships" xmlns:p="http://schemas.openxmlformats.org/presentationml/2006/main" showMasterPhAnim="0">
+  <p:cSld name="Slide 9">
+    <p:spTree>
+      <p:nvGrpSpPr>
+        <p:cNvPr id="1" name=""/>
+        <p:cNvGrpSpPr/>
+        <p:nvPr/>
+      </p:nvGrpSpPr>
+      <p:grpSpPr bwMode="auto">
+        <a:xfrm>
+          <a:off x="0" y="0"/>
+          <a:ext cx="0" cy="0"/>
+          <a:chOff x="0" y="0"/>
+          <a:chExt cx="0" cy="0"/>
+        </a:xfrm>
+      </p:grpSpPr>
+      <p:sp>
+        <p:nvSpPr>
+          <p:cNvPr id="1053305527" name="Text 0"/>
+          <p:cNvSpPr/>
+          <p:nvPr/>
+        </p:nvSpPr>
+        <p:spPr bwMode="auto">
+          <a:xfrm>
+            <a:off x="2329812" y="3387660"/>
+            <a:ext cx="10180563" cy="727138"/>
+          </a:xfrm>
+          <a:prstGeom prst="rect">
+            <a:avLst/>
+          </a:prstGeom>
+          <a:noFill/>
+          <a:ln/>
+        </p:spPr>
+        <p:txBody>
+          <a:bodyPr wrap="none" lIns="0" tIns="0" rIns="0" bIns="0" rtlCol="0" anchor="t"/>
+          <a:lstStyle/>
+          <a:p>
+            <a:pPr marL="0" indent="0" algn="l">
+              <a:lnSpc>
+                <a:spcPts val="5549"/>
+              </a:lnSpc>
+              <a:buNone/>
+              <a:defRPr/>
+            </a:pPr>
+            <a:r>
+              <a:rPr lang="ru-RU" sz="7200">
+                <a:solidFill>
+                  <a:srgbClr val="F3F3F2"/>
+                </a:solidFill>
+                <a:latin typeface="IBM Plex Sans Medium"/>
+                <a:ea typeface="IBM Plex Sans Medium"/>
+                <a:cs typeface="IBM Plex Sans Medium"/>
+              </a:rPr>
+              <a:t>Спасибо за внимание</a:t>
+            </a:r>
+            <a:endParaRPr sz="7200"/>
+          </a:p>
+        </p:txBody>
+      </p:sp>
+      <p:sp>
+        <p:nvSpPr>
+          <p:cNvPr id="2052193394" name="Text 7"/>
+          <p:cNvSpPr/>
+          <p:nvPr/>
+        </p:nvSpPr>
+        <p:spPr bwMode="auto">
+          <a:xfrm>
+            <a:off x="5385663" y="4245429"/>
+            <a:ext cx="3856861" cy="351386"/>
+          </a:xfrm>
+          <a:prstGeom prst="rect">
+            <a:avLst/>
+          </a:prstGeom>
+          <a:noFill/>
+          <a:ln/>
+        </p:spPr>
+        <p:txBody>
+          <a:bodyPr wrap="none" lIns="0" tIns="0" rIns="0" bIns="0" rtlCol="0" anchor="t"/>
+          <a:lstStyle/>
+          <a:p>
+            <a:pPr marL="0" indent="0" algn="l">
+              <a:lnSpc>
+                <a:spcPts val="2849"/>
+              </a:lnSpc>
+              <a:buNone/>
+              <a:defRPr/>
+            </a:pPr>
+            <a:r>
+              <a:rPr lang="en-US" sz="1750" b="1">
+                <a:solidFill>
+                  <a:srgbClr val="D4D4D1"/>
+                </a:solidFill>
+                <a:latin typeface="Roboto"/>
+                <a:ea typeface="Roboto"/>
+                <a:cs typeface="Roboto"/>
+              </a:rPr>
+              <a:t>GitHub:</a:t>
+            </a:r>
+            <a:r>
+              <a:rPr lang="en-US" sz="1750">
+                <a:solidFill>
+                  <a:srgbClr val="D4D4D1"/>
+                </a:solidFill>
+                <a:latin typeface="Roboto"/>
+                <a:ea typeface="Roboto"/>
+                <a:cs typeface="Roboto"/>
+              </a:rPr>
+              <a:t> </a:t>
+            </a:r>
+            <a:r>
+              <a:rPr lang="en-US" sz="1750" u="sng">
+                <a:solidFill>
+                  <a:schemeClr val="hlink"/>
+                </a:solidFill>
+                <a:latin typeface="Roboto"/>
+                <a:ea typeface="Roboto"/>
+                <a:cs typeface="Roboto"/>
+                <a:hlinkClick r:id="rId3"/>
+              </a:rPr>
+              <a:t>github.com/Korsany/Pixels</a:t>
+            </a:r>
+            <a:endParaRPr lang="en-US" sz="1750"/>
+          </a:p>
+        </p:txBody>
+      </p:sp>
+      <p:pic>
+        <p:nvPicPr>
+          <p:cNvPr id="1065103749" name="Рисунок 1065103748"/>
+          <p:cNvPicPr>
+            <a:picLocks noChangeAspect="1"/>
+          </p:cNvPicPr>
+          <p:nvPr/>
+        </p:nvPicPr>
+        <p:blipFill rotWithShape="1">
+          <a:blip r:embed="rId4"/>
+          <a:stretch/>
+        </p:blipFill>
+        <p:spPr bwMode="auto">
+          <a:xfrm>
+            <a:off x="12337141" y="7540623"/>
+            <a:ext cx="2228850" cy="657225"/>
+          </a:xfrm>
+          <a:prstGeom prst="rect">
+            <a:avLst/>
+          </a:prstGeom>
+        </p:spPr>
+      </p:pic>
+    </p:spTree>
+  </p:cSld>
+  <p:clrMapOvr>
+    <a:masterClrMapping/>
+  </p:clrMapOvr>
 </p:sld>
 </file>
 
 <file path=ppt/slides/slide2.xml><?xml version="1.0" encoding="utf-8"?>
-<p:sld xmlns:a="http://schemas.openxmlformats.org/drawingml/2006/main" xmlns:r="http://schemas.openxmlformats.org/officeDocument/2006/relationships" xmlns:p="http://schemas.openxmlformats.org/presentationml/2006/main" xmlns:m="http://schemas.openxmlformats.org/officeDocument/2006/math" xmlns:w="http://schemas.openxmlformats.org/wordprocessingml/2006/main" xmlns:mc="http://schemas.openxmlformats.org/markup-compatibility/2006" showMasterPhAnim="0" showMasterSp="1" show="1">
+<p:sld xmlns:a="http://schemas.openxmlformats.org/drawingml/2006/main" xmlns:r="http://schemas.openxmlformats.org/officeDocument/2006/relationships" xmlns:p="http://schemas.openxmlformats.org/presentationml/2006/main" showMasterPhAnim="0">
   <p:cSld name="Slide 2">
     <p:spTree>
       <p:nvGrpSpPr>
@@ -3164,7 +3822,7 @@
       </p:sp>
       <p:pic>
         <p:nvPicPr>
-          <p:cNvPr id="207341358" name=""/>
+          <p:cNvPr id="207341358" name="Рисунок 207341357"/>
           <p:cNvPicPr>
             <a:picLocks noChangeAspect="1"/>
           </p:cNvPicPr>
@@ -3189,19 +3847,11 @@
   <p:clrMapOvr>
     <a:masterClrMapping/>
   </p:clrMapOvr>
-  <mc:AlternateContent xmlns:mc="http://schemas.openxmlformats.org/markup-compatibility/2006">
-    <mc:Choice xmlns:p159="http://schemas.microsoft.com/office/powerpoint/2015/09/main" xmlns:p14="http://schemas.microsoft.com/office/powerpoint/2010/main" Requires="p159">
-      <p:transition p14:dur="2000" advClick="1"/>
-    </mc:Choice>
-    <mc:Fallback>
-      <p:transition advClick="1"/>
-    </mc:Fallback>
-  </mc:AlternateContent>
 </p:sld>
 </file>
 
 <file path=ppt/slides/slide3.xml><?xml version="1.0" encoding="utf-8"?>
-<p:sld xmlns:a="http://schemas.openxmlformats.org/drawingml/2006/main" xmlns:r="http://schemas.openxmlformats.org/officeDocument/2006/relationships" xmlns:p="http://schemas.openxmlformats.org/presentationml/2006/main" xmlns:m="http://schemas.openxmlformats.org/officeDocument/2006/math" xmlns:w="http://schemas.openxmlformats.org/wordprocessingml/2006/main" xmlns:mc="http://schemas.openxmlformats.org/markup-compatibility/2006" showMasterPhAnim="0" showMasterSp="1" show="1">
+<p:sld xmlns:a="http://schemas.openxmlformats.org/drawingml/2006/main" xmlns:r="http://schemas.openxmlformats.org/officeDocument/2006/relationships" xmlns:p="http://schemas.openxmlformats.org/presentationml/2006/main" showMasterPhAnim="0">
   <p:cSld name="Slide 3">
     <p:spTree>
       <p:nvGrpSpPr>
@@ -3807,7 +4457,7 @@
       </p:sp>
       <p:pic>
         <p:nvPicPr>
-          <p:cNvPr id="1183227875" name=""/>
+          <p:cNvPr id="1183227875" name="Рисунок 1183227874"/>
           <p:cNvPicPr>
             <a:picLocks noChangeAspect="1"/>
           </p:cNvPicPr>
@@ -3832,19 +4482,1489 @@
   <p:clrMapOvr>
     <a:masterClrMapping/>
   </p:clrMapOvr>
-  <mc:AlternateContent xmlns:mc="http://schemas.openxmlformats.org/markup-compatibility/2006">
-    <mc:Choice xmlns:p159="http://schemas.microsoft.com/office/powerpoint/2015/09/main" xmlns:p14="http://schemas.microsoft.com/office/powerpoint/2010/main" Requires="p159">
-      <p:transition p14:dur="2000" advClick="1"/>
-    </mc:Choice>
-    <mc:Fallback>
-      <p:transition advClick="1"/>
-    </mc:Fallback>
-  </mc:AlternateContent>
 </p:sld>
 </file>
 
 <file path=ppt/slides/slide4.xml><?xml version="1.0" encoding="utf-8"?>
-<p:sld xmlns:a="http://schemas.openxmlformats.org/drawingml/2006/main" xmlns:r="http://schemas.openxmlformats.org/officeDocument/2006/relationships" xmlns:p="http://schemas.openxmlformats.org/presentationml/2006/main" xmlns:m="http://schemas.openxmlformats.org/officeDocument/2006/math" xmlns:w="http://schemas.openxmlformats.org/wordprocessingml/2006/main" xmlns:mc="http://schemas.openxmlformats.org/markup-compatibility/2006" showMasterPhAnim="0" showMasterSp="1" show="1">
+<p:sld xmlns:a="http://schemas.openxmlformats.org/drawingml/2006/main" xmlns:r="http://schemas.openxmlformats.org/officeDocument/2006/relationships" xmlns:p="http://schemas.openxmlformats.org/presentationml/2006/main" showMasterPhAnim="0">
+  <p:cSld>
+    <p:spTree>
+      <p:nvGrpSpPr>
+        <p:cNvPr id="1" name="">
+          <a:extLst>
+            <a:ext uri="{FF2B5EF4-FFF2-40B4-BE49-F238E27FC236}">
+              <a16:creationId xmlns:a16="http://schemas.microsoft.com/office/drawing/2014/main" id="{9ACF7C50-9D84-B641-A53D-D9D2594EA9FF}"/>
+            </a:ext>
+          </a:extLst>
+        </p:cNvPr>
+        <p:cNvGrpSpPr/>
+        <p:nvPr/>
+      </p:nvGrpSpPr>
+      <p:grpSpPr bwMode="auto">
+        <a:xfrm>
+          <a:off x="0" y="0"/>
+          <a:ext cx="0" cy="0"/>
+          <a:chOff x="0" y="0"/>
+          <a:chExt cx="0" cy="0"/>
+        </a:xfrm>
+      </p:grpSpPr>
+      <p:sp>
+        <p:nvSpPr>
+          <p:cNvPr id="1751934005" name="Shape 0">
+            <a:extLst>
+              <a:ext uri="{FF2B5EF4-FFF2-40B4-BE49-F238E27FC236}">
+                <a16:creationId xmlns:a16="http://schemas.microsoft.com/office/drawing/2014/main" id="{6A4F5BD5-9604-E9CB-6BD2-A8E8942AEB7D}"/>
+              </a:ext>
+            </a:extLst>
+          </p:cNvPr>
+          <p:cNvSpPr/>
+          <p:nvPr/>
+        </p:nvSpPr>
+        <p:spPr bwMode="auto">
+          <a:xfrm>
+            <a:off x="793790" y="1411818"/>
+            <a:ext cx="1306635" cy="417733"/>
+          </a:xfrm>
+          <a:prstGeom prst="roundRect">
+            <a:avLst>
+              <a:gd name="adj" fmla="val 6165"/>
+            </a:avLst>
+          </a:prstGeom>
+          <a:noFill/>
+          <a:ln w="7620">
+            <a:solidFill>
+              <a:srgbClr val="FFBC8F"/>
+            </a:solidFill>
+            <a:prstDash val="solid"/>
+          </a:ln>
+        </p:spPr>
+      </p:sp>
+      <p:sp>
+        <p:nvSpPr>
+          <p:cNvPr id="2010447823" name="Text 1">
+            <a:extLst>
+              <a:ext uri="{FF2B5EF4-FFF2-40B4-BE49-F238E27FC236}">
+                <a16:creationId xmlns:a16="http://schemas.microsoft.com/office/drawing/2014/main" id="{2D6D5F5A-999C-CC12-CF18-44913E921EDE}"/>
+              </a:ext>
+            </a:extLst>
+          </p:cNvPr>
+          <p:cNvSpPr/>
+          <p:nvPr/>
+        </p:nvSpPr>
+        <p:spPr bwMode="auto">
+          <a:xfrm>
+            <a:off x="937498" y="1523047"/>
+            <a:ext cx="852964" cy="290274"/>
+          </a:xfrm>
+          <a:prstGeom prst="rect">
+            <a:avLst/>
+          </a:prstGeom>
+          <a:noFill/>
+          <a:ln/>
+        </p:spPr>
+        <p:txBody>
+          <a:bodyPr wrap="none" lIns="0" tIns="0" rIns="0" bIns="0" rtlCol="0" anchor="t"/>
+          <a:lstStyle/>
+          <a:p>
+            <a:pPr marL="0" indent="0" algn="l">
+              <a:lnSpc>
+                <a:spcPts val="2250"/>
+              </a:lnSpc>
+              <a:buNone/>
+              <a:defRPr/>
+            </a:pPr>
+            <a:r>
+              <a:rPr lang="en-US" sz="1400" dirty="0">
+                <a:solidFill>
+                  <a:srgbClr val="FFBC8F"/>
+                </a:solidFill>
+                <a:latin typeface="Roboto"/>
+                <a:ea typeface="Roboto"/>
+                <a:cs typeface="Roboto"/>
+              </a:rPr>
+              <a:t>АУДИТОРИЯ</a:t>
+            </a:r>
+          </a:p>
+        </p:txBody>
+      </p:sp>
+      <p:sp>
+        <p:nvSpPr>
+          <p:cNvPr id="1305221954" name="Text 2">
+            <a:extLst>
+              <a:ext uri="{FF2B5EF4-FFF2-40B4-BE49-F238E27FC236}">
+                <a16:creationId xmlns:a16="http://schemas.microsoft.com/office/drawing/2014/main" id="{B26211C5-B27B-B378-2AC8-AB148EC478B8}"/>
+              </a:ext>
+            </a:extLst>
+          </p:cNvPr>
+          <p:cNvSpPr/>
+          <p:nvPr/>
+        </p:nvSpPr>
+        <p:spPr bwMode="auto">
+          <a:xfrm>
+            <a:off x="793790" y="1979652"/>
+            <a:ext cx="11392853" cy="708779"/>
+          </a:xfrm>
+          <a:prstGeom prst="rect">
+            <a:avLst/>
+          </a:prstGeom>
+          <a:noFill/>
+          <a:ln/>
+        </p:spPr>
+        <p:txBody>
+          <a:bodyPr wrap="none" lIns="0" tIns="0" rIns="0" bIns="0" rtlCol="0" anchor="t"/>
+          <a:lstStyle/>
+          <a:p>
+            <a:pPr>
+              <a:lnSpc>
+                <a:spcPts val="5550"/>
+              </a:lnSpc>
+              <a:defRPr/>
+            </a:pPr>
+            <a:r>
+              <a:rPr lang="en-US" sz="4450" dirty="0" err="1">
+                <a:solidFill>
+                  <a:srgbClr val="F3F3F2"/>
+                </a:solidFill>
+                <a:latin typeface="IBM Plex Sans Medium"/>
+              </a:rPr>
+              <a:t>Кому</a:t>
+            </a:r>
+            <a:r>
+              <a:rPr lang="en-US" sz="4450" dirty="0">
+                <a:solidFill>
+                  <a:srgbClr val="F3F3F2"/>
+                </a:solidFill>
+                <a:latin typeface="IBM Plex Sans Medium"/>
+              </a:rPr>
+              <a:t> </a:t>
+            </a:r>
+            <a:r>
+              <a:rPr lang="en-US" sz="4450" dirty="0" err="1">
+                <a:solidFill>
+                  <a:srgbClr val="F3F3F2"/>
+                </a:solidFill>
+                <a:latin typeface="IBM Plex Sans Medium"/>
+              </a:rPr>
+              <a:t>полезен</a:t>
+            </a:r>
+            <a:r>
+              <a:rPr lang="en-US" sz="4450" dirty="0">
+                <a:solidFill>
+                  <a:srgbClr val="F3F3F2"/>
+                </a:solidFill>
+                <a:latin typeface="IBM Plex Sans Medium"/>
+              </a:rPr>
+              <a:t> Pixels?</a:t>
+            </a:r>
+            <a:endParaRPr lang="ru-RU" dirty="0"/>
+          </a:p>
+        </p:txBody>
+      </p:sp>
+      <p:sp>
+        <p:nvSpPr>
+          <p:cNvPr id="1402851431" name="Text 3">
+            <a:extLst>
+              <a:ext uri="{FF2B5EF4-FFF2-40B4-BE49-F238E27FC236}">
+                <a16:creationId xmlns:a16="http://schemas.microsoft.com/office/drawing/2014/main" id="{66028260-E939-096A-5108-C495268A2093}"/>
+              </a:ext>
+            </a:extLst>
+          </p:cNvPr>
+          <p:cNvSpPr/>
+          <p:nvPr/>
+        </p:nvSpPr>
+        <p:spPr bwMode="auto">
+          <a:xfrm>
+            <a:off x="793790" y="3029776"/>
+            <a:ext cx="4385072" cy="425291"/>
+          </a:xfrm>
+          <a:prstGeom prst="rect">
+            <a:avLst/>
+          </a:prstGeom>
+          <a:noFill/>
+          <a:ln/>
+        </p:spPr>
+        <p:txBody>
+          <a:bodyPr wrap="none" lIns="0" tIns="0" rIns="0" bIns="0" rtlCol="0" anchor="t"/>
+          <a:lstStyle/>
+          <a:p>
+            <a:pPr>
+              <a:lnSpc>
+                <a:spcPts val="3300"/>
+              </a:lnSpc>
+              <a:defRPr/>
+            </a:pPr>
+            <a:r>
+              <a:rPr lang="en-US" sz="2650" dirty="0" err="1">
+                <a:solidFill>
+                  <a:srgbClr val="F3F3F2"/>
+                </a:solidFill>
+                <a:latin typeface="IBM Plex Sans Medium"/>
+              </a:rPr>
+              <a:t>Основные</a:t>
+            </a:r>
+            <a:r>
+              <a:rPr lang="en-US" sz="2650" dirty="0">
+                <a:solidFill>
+                  <a:srgbClr val="F3F3F2"/>
+                </a:solidFill>
+                <a:latin typeface="IBM Plex Sans Medium"/>
+              </a:rPr>
+              <a:t> </a:t>
+            </a:r>
+            <a:r>
+              <a:rPr lang="en-US" sz="2650" dirty="0" err="1">
+                <a:solidFill>
+                  <a:srgbClr val="F3F3F2"/>
+                </a:solidFill>
+                <a:latin typeface="IBM Plex Sans Medium"/>
+              </a:rPr>
+              <a:t>пользователи</a:t>
+            </a:r>
+          </a:p>
+        </p:txBody>
+      </p:sp>
+      <p:sp>
+        <p:nvSpPr>
+          <p:cNvPr id="2008858583" name="Text 4">
+            <a:extLst>
+              <a:ext uri="{FF2B5EF4-FFF2-40B4-BE49-F238E27FC236}">
+                <a16:creationId xmlns:a16="http://schemas.microsoft.com/office/drawing/2014/main" id="{9A9AE32F-2999-643B-7A80-FAA14E36BCB4}"/>
+              </a:ext>
+            </a:extLst>
+          </p:cNvPr>
+          <p:cNvSpPr/>
+          <p:nvPr/>
+        </p:nvSpPr>
+        <p:spPr bwMode="auto">
+          <a:xfrm>
+            <a:off x="788773" y="3524492"/>
+            <a:ext cx="8055044" cy="1174270"/>
+          </a:xfrm>
+          <a:prstGeom prst="rect">
+            <a:avLst/>
+          </a:prstGeom>
+          <a:noFill/>
+          <a:ln/>
+        </p:spPr>
+        <p:txBody>
+          <a:bodyPr wrap="none" lIns="0" tIns="0" rIns="0" bIns="0" rtlCol="0" anchor="t"/>
+          <a:lstStyle/>
+          <a:p>
+            <a:pPr marL="285750" indent="-285750">
+              <a:buSzPct val="100000"/>
+              <a:buFont typeface="Arial"/>
+              <a:buChar char="•"/>
+              <a:defRPr/>
+            </a:pPr>
+            <a:r>
+              <a:rPr lang="en-US" sz="1750" b="1" dirty="0">
+                <a:solidFill>
+                  <a:srgbClr val="E7E1E4"/>
+                </a:solidFill>
+                <a:latin typeface="Roboto"/>
+              </a:rPr>
+              <a:t>Frontend-</a:t>
+            </a:r>
+            <a:r>
+              <a:rPr lang="en-US" sz="1750" b="1" err="1">
+                <a:solidFill>
+                  <a:srgbClr val="E7E1E4"/>
+                </a:solidFill>
+                <a:latin typeface="Roboto"/>
+              </a:rPr>
+              <a:t>разработчики</a:t>
+            </a:r>
+            <a:r>
+              <a:rPr lang="en-US" sz="1750" b="1" dirty="0">
+                <a:solidFill>
+                  <a:srgbClr val="E7E1E4"/>
+                </a:solidFill>
+                <a:latin typeface="Roboto"/>
+              </a:rPr>
+              <a:t>: </a:t>
+            </a:r>
+            <a:r>
+              <a:rPr lang="en-US" sz="1750" b="1" err="1">
+                <a:solidFill>
+                  <a:srgbClr val="E7E1E4"/>
+                </a:solidFill>
+                <a:latin typeface="Roboto"/>
+              </a:rPr>
+              <a:t>создание</a:t>
+            </a:r>
+            <a:r>
+              <a:rPr lang="en-US" sz="1750" b="1" dirty="0">
+                <a:solidFill>
+                  <a:srgbClr val="E7E1E4"/>
+                </a:solidFill>
+                <a:latin typeface="Roboto"/>
+              </a:rPr>
+              <a:t> </a:t>
+            </a:r>
+            <a:r>
+              <a:rPr lang="en-US" sz="1750" b="1" err="1">
+                <a:solidFill>
+                  <a:srgbClr val="E7E1E4"/>
+                </a:solidFill>
+                <a:latin typeface="Roboto"/>
+              </a:rPr>
+              <a:t>иконок</a:t>
+            </a:r>
+            <a:r>
+              <a:rPr lang="en-US" sz="1750" b="1" dirty="0">
+                <a:solidFill>
+                  <a:srgbClr val="E7E1E4"/>
+                </a:solidFill>
+                <a:latin typeface="Roboto"/>
+              </a:rPr>
+              <a:t> </a:t>
+            </a:r>
+            <a:r>
+              <a:rPr lang="en-US" sz="1750" b="1" err="1">
+                <a:solidFill>
+                  <a:srgbClr val="E7E1E4"/>
+                </a:solidFill>
+                <a:latin typeface="Roboto"/>
+              </a:rPr>
+              <a:t>без</a:t>
+            </a:r>
+            <a:r>
+              <a:rPr lang="en-US" sz="1750" b="1" dirty="0">
+                <a:solidFill>
+                  <a:srgbClr val="E7E1E4"/>
+                </a:solidFill>
+                <a:latin typeface="Roboto"/>
+              </a:rPr>
+              <a:t> </a:t>
+            </a:r>
+            <a:r>
+              <a:rPr lang="en-US" sz="1750" b="1" err="1">
+                <a:solidFill>
+                  <a:srgbClr val="E7E1E4"/>
+                </a:solidFill>
+                <a:latin typeface="Roboto"/>
+              </a:rPr>
+              <a:t>лишних</a:t>
+            </a:r>
+            <a:r>
+              <a:rPr lang="en-US" sz="1750" b="1" dirty="0">
+                <a:solidFill>
+                  <a:srgbClr val="E7E1E4"/>
+                </a:solidFill>
+                <a:latin typeface="Roboto"/>
+              </a:rPr>
+              <a:t> HTTP-</a:t>
+            </a:r>
+            <a:r>
+              <a:rPr lang="en-US" sz="1750" b="1" err="1">
+                <a:solidFill>
+                  <a:srgbClr val="E7E1E4"/>
+                </a:solidFill>
+                <a:latin typeface="Roboto"/>
+              </a:rPr>
+              <a:t>запросов</a:t>
+            </a:r>
+            <a:r>
+              <a:rPr lang="en-US" sz="1750" b="1" dirty="0">
+                <a:solidFill>
+                  <a:srgbClr val="E7E1E4"/>
+                </a:solidFill>
+                <a:latin typeface="Roboto"/>
+              </a:rPr>
+              <a:t>.</a:t>
+            </a:r>
+            <a:endParaRPr lang="ru-RU">
+              <a:solidFill>
+                <a:srgbClr val="E7E1E4"/>
+              </a:solidFill>
+            </a:endParaRPr>
+          </a:p>
+          <a:p>
+            <a:pPr marL="285750" indent="-285750">
+              <a:buFont typeface="Arial"/>
+              <a:buChar char="•"/>
+              <a:defRPr/>
+            </a:pPr>
+            <a:r>
+              <a:rPr lang="en-US" sz="1750" b="1" dirty="0">
+                <a:solidFill>
+                  <a:srgbClr val="E7E1E4"/>
+                </a:solidFill>
+                <a:latin typeface="Roboto"/>
+              </a:rPr>
+              <a:t>Web-</a:t>
+            </a:r>
+            <a:r>
+              <a:rPr lang="en-US" sz="1750" b="1" dirty="0" err="1">
+                <a:solidFill>
+                  <a:srgbClr val="E7E1E4"/>
+                </a:solidFill>
+                <a:latin typeface="Roboto"/>
+              </a:rPr>
+              <a:t>дизайнеры</a:t>
+            </a:r>
+            <a:r>
+              <a:rPr lang="en-US" sz="1750" b="1" dirty="0">
+                <a:solidFill>
+                  <a:srgbClr val="E7E1E4"/>
+                </a:solidFill>
+                <a:latin typeface="Roboto"/>
+              </a:rPr>
+              <a:t>: </a:t>
+            </a:r>
+            <a:r>
+              <a:rPr lang="en-US" sz="1750" b="1" dirty="0" err="1">
+                <a:solidFill>
+                  <a:srgbClr val="E7E1E4"/>
+                </a:solidFill>
+                <a:latin typeface="Roboto"/>
+              </a:rPr>
+              <a:t>проектирование</a:t>
+            </a:r>
+            <a:r>
+              <a:rPr lang="en-US" sz="1750" b="1" dirty="0">
+                <a:solidFill>
+                  <a:srgbClr val="E7E1E4"/>
+                </a:solidFill>
+                <a:latin typeface="Roboto"/>
+              </a:rPr>
+              <a:t> </a:t>
+            </a:r>
+            <a:r>
+              <a:rPr lang="en-US" sz="1750" b="1" dirty="0" err="1">
+                <a:solidFill>
+                  <a:srgbClr val="E7E1E4"/>
+                </a:solidFill>
+                <a:latin typeface="Roboto"/>
+              </a:rPr>
+              <a:t>четкой</a:t>
+            </a:r>
+            <a:r>
+              <a:rPr lang="en-US" sz="1750" b="1" dirty="0">
+                <a:solidFill>
+                  <a:srgbClr val="E7E1E4"/>
+                </a:solidFill>
+                <a:latin typeface="Roboto"/>
+              </a:rPr>
+              <a:t> и </a:t>
+            </a:r>
+            <a:r>
+              <a:rPr lang="en-US" sz="1750" b="1" dirty="0" err="1">
+                <a:solidFill>
+                  <a:srgbClr val="E7E1E4"/>
+                </a:solidFill>
+                <a:latin typeface="Roboto"/>
+              </a:rPr>
+              <a:t>масштабируемой</a:t>
+            </a:r>
+            <a:r>
+              <a:rPr lang="en-US" sz="1750" b="1" dirty="0">
+                <a:solidFill>
+                  <a:srgbClr val="E7E1E4"/>
+                </a:solidFill>
+                <a:latin typeface="Roboto"/>
+              </a:rPr>
+              <a:t> </a:t>
+            </a:r>
+            <a:r>
+              <a:rPr lang="en-US" sz="1750" b="1" dirty="0" err="1">
+                <a:solidFill>
+                  <a:srgbClr val="E7E1E4"/>
+                </a:solidFill>
+                <a:latin typeface="Roboto"/>
+              </a:rPr>
+              <a:t>графики</a:t>
+            </a:r>
+            <a:r>
+              <a:rPr lang="en-US" sz="1750" b="1" dirty="0">
+                <a:solidFill>
+                  <a:srgbClr val="E7E1E4"/>
+                </a:solidFill>
+                <a:latin typeface="Roboto"/>
+              </a:rPr>
+              <a:t>.</a:t>
+            </a:r>
+          </a:p>
+          <a:p>
+            <a:pPr marL="285750" indent="-285750">
+              <a:buFont typeface="Arial"/>
+              <a:buChar char="•"/>
+              <a:defRPr/>
+            </a:pPr>
+            <a:r>
+              <a:rPr lang="en-US" sz="1750" b="1" err="1">
+                <a:solidFill>
+                  <a:srgbClr val="E7E1E4"/>
+                </a:solidFill>
+                <a:latin typeface="Roboto"/>
+              </a:rPr>
+              <a:t>Студенты</a:t>
+            </a:r>
+            <a:r>
+              <a:rPr lang="en-US" sz="1750" b="1" dirty="0">
+                <a:solidFill>
+                  <a:srgbClr val="E7E1E4"/>
+                </a:solidFill>
+                <a:latin typeface="Roboto"/>
+              </a:rPr>
+              <a:t>: </a:t>
+            </a:r>
+            <a:r>
+              <a:rPr lang="en-US" sz="1750" b="1" err="1">
+                <a:solidFill>
+                  <a:srgbClr val="E7E1E4"/>
+                </a:solidFill>
+                <a:latin typeface="Roboto"/>
+              </a:rPr>
+              <a:t>наглядное</a:t>
+            </a:r>
+            <a:r>
+              <a:rPr lang="en-US" sz="1750" b="1" dirty="0">
+                <a:solidFill>
+                  <a:srgbClr val="E7E1E4"/>
+                </a:solidFill>
+                <a:latin typeface="Roboto"/>
+              </a:rPr>
+              <a:t> </a:t>
+            </a:r>
+            <a:r>
+              <a:rPr lang="en-US" sz="1750" b="1" err="1">
+                <a:solidFill>
+                  <a:srgbClr val="E7E1E4"/>
+                </a:solidFill>
+                <a:latin typeface="Roboto"/>
+              </a:rPr>
+              <a:t>изучение</a:t>
+            </a:r>
+            <a:r>
+              <a:rPr lang="en-US" sz="1750" b="1" dirty="0">
+                <a:solidFill>
+                  <a:srgbClr val="E7E1E4"/>
+                </a:solidFill>
+                <a:latin typeface="Roboto"/>
+              </a:rPr>
+              <a:t> </a:t>
+            </a:r>
+            <a:r>
+              <a:rPr lang="en-US" sz="1750" b="1" err="1">
+                <a:solidFill>
+                  <a:srgbClr val="E7E1E4"/>
+                </a:solidFill>
+                <a:latin typeface="Roboto"/>
+              </a:rPr>
+              <a:t>работы</a:t>
+            </a:r>
+            <a:r>
+              <a:rPr lang="en-US" sz="1750" b="1" dirty="0">
+                <a:solidFill>
+                  <a:srgbClr val="E7E1E4"/>
+                </a:solidFill>
+                <a:latin typeface="Roboto"/>
+              </a:rPr>
+              <a:t> </a:t>
+            </a:r>
+            <a:r>
+              <a:rPr lang="en-US" sz="1750" b="1" err="1">
+                <a:solidFill>
+                  <a:srgbClr val="E7E1E4"/>
+                </a:solidFill>
+                <a:latin typeface="Roboto"/>
+              </a:rPr>
+              <a:t>координат</a:t>
+            </a:r>
+            <a:r>
+              <a:rPr lang="en-US" sz="1750" b="1" dirty="0">
+                <a:solidFill>
+                  <a:srgbClr val="E7E1E4"/>
+                </a:solidFill>
+                <a:latin typeface="Roboto"/>
+              </a:rPr>
+              <a:t> и CSS-</a:t>
+            </a:r>
+            <a:r>
+              <a:rPr lang="en-US" sz="1750" b="1" err="1">
+                <a:solidFill>
+                  <a:srgbClr val="E7E1E4"/>
+                </a:solidFill>
+                <a:latin typeface="Roboto"/>
+              </a:rPr>
+              <a:t>свойств</a:t>
+            </a:r>
+            <a:r>
+              <a:rPr lang="en-US" sz="1750" b="1" dirty="0">
+                <a:solidFill>
+                  <a:srgbClr val="E7E1E4"/>
+                </a:solidFill>
+                <a:latin typeface="Roboto"/>
+              </a:rPr>
+              <a:t>.</a:t>
+            </a:r>
+          </a:p>
+          <a:p>
+            <a:pPr marL="285750" indent="-285750">
+              <a:buFont typeface="Arial"/>
+              <a:buChar char="•"/>
+              <a:defRPr/>
+            </a:pPr>
+            <a:r>
+              <a:rPr lang="en-US" sz="1750" b="1" err="1">
+                <a:solidFill>
+                  <a:srgbClr val="E7E1E4"/>
+                </a:solidFill>
+                <a:latin typeface="Roboto"/>
+              </a:rPr>
+              <a:t>Инди-разработчики</a:t>
+            </a:r>
+            <a:r>
+              <a:rPr lang="en-US" sz="1750" b="1" dirty="0">
+                <a:solidFill>
+                  <a:srgbClr val="E7E1E4"/>
+                </a:solidFill>
+                <a:latin typeface="Roboto"/>
+              </a:rPr>
+              <a:t>: </a:t>
+            </a:r>
+            <a:r>
+              <a:rPr lang="en-US" sz="1750" b="1" err="1">
+                <a:solidFill>
+                  <a:srgbClr val="E7E1E4"/>
+                </a:solidFill>
+                <a:latin typeface="Roboto"/>
+              </a:rPr>
+              <a:t>быстрая</a:t>
+            </a:r>
+            <a:r>
+              <a:rPr lang="en-US" sz="1750" b="1" dirty="0">
+                <a:solidFill>
+                  <a:srgbClr val="E7E1E4"/>
+                </a:solidFill>
+                <a:latin typeface="Roboto"/>
+              </a:rPr>
+              <a:t> </a:t>
+            </a:r>
+            <a:r>
+              <a:rPr lang="en-US" sz="1750" b="1" err="1">
+                <a:solidFill>
+                  <a:srgbClr val="E7E1E4"/>
+                </a:solidFill>
+                <a:latin typeface="Roboto"/>
+              </a:rPr>
+              <a:t>генерация</a:t>
+            </a:r>
+            <a:r>
+              <a:rPr lang="en-US" sz="1750" b="1" dirty="0">
+                <a:solidFill>
+                  <a:srgbClr val="E7E1E4"/>
+                </a:solidFill>
+                <a:latin typeface="Roboto"/>
+              </a:rPr>
+              <a:t> </a:t>
+            </a:r>
+            <a:r>
+              <a:rPr lang="en-US" sz="1750" b="1" err="1">
+                <a:solidFill>
+                  <a:srgbClr val="E7E1E4"/>
+                </a:solidFill>
+                <a:latin typeface="Roboto"/>
+              </a:rPr>
+              <a:t>легких</a:t>
+            </a:r>
+            <a:r>
+              <a:rPr lang="en-US" sz="1750" b="1" dirty="0">
+                <a:solidFill>
+                  <a:srgbClr val="E7E1E4"/>
+                </a:solidFill>
+                <a:latin typeface="Roboto"/>
+              </a:rPr>
+              <a:t> </a:t>
+            </a:r>
+            <a:r>
+              <a:rPr lang="en-US" sz="1750" b="1" err="1">
+                <a:solidFill>
+                  <a:srgbClr val="E7E1E4"/>
+                </a:solidFill>
+                <a:latin typeface="Roboto"/>
+              </a:rPr>
+              <a:t>ассетов</a:t>
+            </a:r>
+            <a:r>
+              <a:rPr lang="en-US" sz="1750" b="1" dirty="0">
+                <a:solidFill>
+                  <a:srgbClr val="E7E1E4"/>
+                </a:solidFill>
+                <a:latin typeface="Roboto"/>
+              </a:rPr>
+              <a:t> </a:t>
+            </a:r>
+            <a:r>
+              <a:rPr lang="en-US" sz="1750" b="1" err="1">
+                <a:solidFill>
+                  <a:srgbClr val="E7E1E4"/>
+                </a:solidFill>
+                <a:latin typeface="Roboto"/>
+              </a:rPr>
+              <a:t>для</a:t>
+            </a:r>
+            <a:r>
+              <a:rPr lang="en-US" sz="1750" b="1" dirty="0">
+                <a:solidFill>
+                  <a:srgbClr val="E7E1E4"/>
+                </a:solidFill>
+                <a:latin typeface="Roboto"/>
+              </a:rPr>
+              <a:t> </a:t>
+            </a:r>
+            <a:r>
+              <a:rPr lang="en-US" sz="1750" b="1" err="1">
+                <a:solidFill>
+                  <a:srgbClr val="E7E1E4"/>
+                </a:solidFill>
+                <a:latin typeface="Roboto"/>
+              </a:rPr>
+              <a:t>веб-игр</a:t>
+            </a:r>
+            <a:r>
+              <a:rPr lang="en-US" sz="1750" b="1" dirty="0">
+                <a:solidFill>
+                  <a:srgbClr val="E7E1E4"/>
+                </a:solidFill>
+                <a:latin typeface="Roboto"/>
+              </a:rPr>
+              <a:t>.</a:t>
+            </a:r>
+          </a:p>
+        </p:txBody>
+      </p:sp>
+      <p:pic>
+        <p:nvPicPr>
+          <p:cNvPr id="1183227875" name="Рисунок 1183227874">
+            <a:extLst>
+              <a:ext uri="{FF2B5EF4-FFF2-40B4-BE49-F238E27FC236}">
+                <a16:creationId xmlns:a16="http://schemas.microsoft.com/office/drawing/2014/main" id="{1C9D4CF7-ED55-E4C0-3BC5-BAEF11B59DCC}"/>
+              </a:ext>
+            </a:extLst>
+          </p:cNvPr>
+          <p:cNvPicPr>
+            <a:picLocks noChangeAspect="1"/>
+          </p:cNvPicPr>
+          <p:nvPr/>
+        </p:nvPicPr>
+        <p:blipFill rotWithShape="1">
+          <a:blip r:embed="rId3"/>
+          <a:stretch/>
+        </p:blipFill>
+        <p:spPr bwMode="auto">
+          <a:xfrm>
+            <a:off x="12337142" y="7540624"/>
+            <a:ext cx="2228850" cy="657225"/>
+          </a:xfrm>
+          <a:prstGeom prst="rect">
+            <a:avLst/>
+          </a:prstGeom>
+        </p:spPr>
+      </p:pic>
+      <p:sp>
+        <p:nvSpPr>
+          <p:cNvPr id="2" name="Text 3">
+            <a:extLst>
+              <a:ext uri="{FF2B5EF4-FFF2-40B4-BE49-F238E27FC236}">
+                <a16:creationId xmlns:a16="http://schemas.microsoft.com/office/drawing/2014/main" id="{BAA19259-F3D1-80E2-3825-3DFBE91579EA}"/>
+              </a:ext>
+            </a:extLst>
+          </p:cNvPr>
+          <p:cNvSpPr/>
+          <p:nvPr/>
+        </p:nvSpPr>
+        <p:spPr bwMode="auto">
+          <a:xfrm>
+            <a:off x="793789" y="4858575"/>
+            <a:ext cx="4385072" cy="425291"/>
+          </a:xfrm>
+          <a:prstGeom prst="rect">
+            <a:avLst/>
+          </a:prstGeom>
+          <a:noFill/>
+          <a:ln/>
+        </p:spPr>
+        <p:txBody>
+          <a:bodyPr wrap="none" lIns="0" tIns="0" rIns="0" bIns="0" rtlCol="0" anchor="t"/>
+          <a:lstStyle/>
+          <a:p>
+            <a:pPr>
+              <a:lnSpc>
+                <a:spcPts val="3300"/>
+              </a:lnSpc>
+              <a:defRPr/>
+            </a:pPr>
+            <a:r>
+              <a:rPr lang="en-US" sz="2650" dirty="0" err="1">
+                <a:solidFill>
+                  <a:srgbClr val="F3F3F2"/>
+                </a:solidFill>
+                <a:latin typeface="IBM Plex Sans Medium"/>
+              </a:rPr>
+              <a:t>Основные</a:t>
+            </a:r>
+            <a:r>
+              <a:rPr lang="en-US" sz="2650" dirty="0">
+                <a:solidFill>
+                  <a:srgbClr val="F3F3F2"/>
+                </a:solidFill>
+                <a:latin typeface="IBM Plex Sans Medium"/>
+              </a:rPr>
+              <a:t> </a:t>
+            </a:r>
+            <a:r>
+              <a:rPr lang="en-US" sz="2650" dirty="0" err="1">
+                <a:solidFill>
+                  <a:srgbClr val="F3F3F2"/>
+                </a:solidFill>
+                <a:latin typeface="IBM Plex Sans Medium"/>
+              </a:rPr>
+              <a:t>пользователи</a:t>
+            </a:r>
+          </a:p>
+        </p:txBody>
+      </p:sp>
+      <p:sp>
+        <p:nvSpPr>
+          <p:cNvPr id="3" name="Text 4">
+            <a:extLst>
+              <a:ext uri="{FF2B5EF4-FFF2-40B4-BE49-F238E27FC236}">
+                <a16:creationId xmlns:a16="http://schemas.microsoft.com/office/drawing/2014/main" id="{4BE62519-2CA8-F3B5-A41C-E00AD5A7FB73}"/>
+              </a:ext>
+            </a:extLst>
+          </p:cNvPr>
+          <p:cNvSpPr/>
+          <p:nvPr/>
+        </p:nvSpPr>
+        <p:spPr bwMode="auto">
+          <a:xfrm>
+            <a:off x="788772" y="5282039"/>
+            <a:ext cx="10097598" cy="1423651"/>
+          </a:xfrm>
+          <a:prstGeom prst="rect">
+            <a:avLst/>
+          </a:prstGeom>
+          <a:noFill/>
+          <a:ln/>
+        </p:spPr>
+        <p:txBody>
+          <a:bodyPr wrap="none" lIns="0" tIns="0" rIns="0" bIns="0" rtlCol="0" anchor="t"/>
+          <a:lstStyle/>
+          <a:p>
+            <a:pPr marL="342900" indent="-342900">
+              <a:buSzPct val="100000"/>
+              <a:buAutoNum type="arabicPeriod"/>
+              <a:defRPr/>
+            </a:pPr>
+            <a:r>
+              <a:rPr lang="en-US" sz="1750" err="1">
+                <a:solidFill>
+                  <a:srgbClr val="E7E1E4"/>
+                </a:solidFill>
+                <a:latin typeface="Roboto"/>
+              </a:rPr>
+              <a:t>Соблюдена</a:t>
+            </a:r>
+            <a:r>
+              <a:rPr lang="en-US" sz="1750" dirty="0">
+                <a:solidFill>
+                  <a:srgbClr val="E7E1E4"/>
+                </a:solidFill>
+                <a:latin typeface="Roboto"/>
+              </a:rPr>
+              <a:t> </a:t>
+            </a:r>
+            <a:r>
+              <a:rPr lang="en-US" sz="1750" err="1">
+                <a:solidFill>
+                  <a:srgbClr val="E7E1E4"/>
+                </a:solidFill>
+                <a:latin typeface="Roboto"/>
+              </a:rPr>
+              <a:t>иерархия</a:t>
+            </a:r>
+            <a:r>
+              <a:rPr lang="en-US" sz="1750">
+                <a:solidFill>
+                  <a:srgbClr val="E7E1E4"/>
+                </a:solidFill>
+                <a:latin typeface="Roboto"/>
+              </a:rPr>
+              <a:t>: Заголовок и </a:t>
+            </a:r>
+            <a:r>
+              <a:rPr lang="en-US" sz="1750" err="1">
+                <a:solidFill>
+                  <a:srgbClr val="E7E1E4"/>
+                </a:solidFill>
+                <a:latin typeface="Roboto"/>
+              </a:rPr>
+              <a:t>подзаголовок</a:t>
+            </a:r>
+            <a:r>
+              <a:rPr lang="en-US" sz="1750">
+                <a:solidFill>
+                  <a:srgbClr val="E7E1E4"/>
+                </a:solidFill>
+                <a:latin typeface="Roboto"/>
+              </a:rPr>
+              <a:t> в </a:t>
+            </a:r>
+            <a:r>
+              <a:rPr lang="en-US" sz="1750" err="1">
+                <a:solidFill>
+                  <a:srgbClr val="E7E1E4"/>
+                </a:solidFill>
+                <a:latin typeface="Roboto"/>
+              </a:rPr>
+              <a:t>вашем</a:t>
+            </a:r>
+            <a:r>
+              <a:rPr lang="en-US" sz="1750" dirty="0">
+                <a:solidFill>
+                  <a:srgbClr val="E7E1E4"/>
+                </a:solidFill>
+                <a:latin typeface="Roboto"/>
+              </a:rPr>
+              <a:t> </a:t>
+            </a:r>
+            <a:r>
+              <a:rPr lang="en-US" sz="1750" err="1">
+                <a:solidFill>
+                  <a:srgbClr val="E7E1E4"/>
+                </a:solidFill>
+                <a:latin typeface="Roboto"/>
+              </a:rPr>
+              <a:t>стиле</a:t>
+            </a:r>
+            <a:r>
+              <a:rPr lang="en-US" sz="1750">
+                <a:solidFill>
+                  <a:srgbClr val="E7E1E4"/>
+                </a:solidFill>
+                <a:latin typeface="Roboto"/>
+              </a:rPr>
+              <a:t>.</a:t>
+            </a:r>
+            <a:endParaRPr lang="ru-RU" sz="1750">
+              <a:solidFill>
+                <a:srgbClr val="E7E1E4"/>
+              </a:solidFill>
+              <a:latin typeface="Roboto"/>
+            </a:endParaRPr>
+          </a:p>
+          <a:p>
+            <a:pPr marL="342900" indent="-342900">
+              <a:buAutoNum type="arabicPeriod"/>
+              <a:defRPr/>
+            </a:pPr>
+            <a:r>
+              <a:rPr lang="en-US" sz="1750" err="1">
+                <a:solidFill>
+                  <a:srgbClr val="E7E1E4"/>
+                </a:solidFill>
+                <a:latin typeface="Roboto"/>
+              </a:rPr>
+              <a:t>Акцент</a:t>
+            </a:r>
+            <a:r>
+              <a:rPr lang="en-US" sz="1750" dirty="0">
+                <a:solidFill>
+                  <a:srgbClr val="E7E1E4"/>
+                </a:solidFill>
+                <a:latin typeface="Roboto"/>
+              </a:rPr>
+              <a:t> </a:t>
+            </a:r>
+            <a:r>
+              <a:rPr lang="en-US" sz="1750" err="1">
+                <a:solidFill>
+                  <a:srgbClr val="E7E1E4"/>
+                </a:solidFill>
+                <a:latin typeface="Roboto"/>
+              </a:rPr>
+              <a:t>на</a:t>
+            </a:r>
+            <a:r>
+              <a:rPr lang="en-US" sz="1750" dirty="0">
+                <a:solidFill>
+                  <a:srgbClr val="E7E1E4"/>
+                </a:solidFill>
+                <a:latin typeface="Roboto"/>
+              </a:rPr>
+              <a:t> </a:t>
+            </a:r>
+            <a:r>
+              <a:rPr lang="en-US" sz="1750" err="1">
+                <a:solidFill>
+                  <a:srgbClr val="E7E1E4"/>
+                </a:solidFill>
+                <a:latin typeface="Roboto"/>
+              </a:rPr>
+              <a:t>пользу</a:t>
+            </a:r>
+            <a:r>
+              <a:rPr lang="en-US" sz="1750" dirty="0">
+                <a:solidFill>
+                  <a:srgbClr val="E7E1E4"/>
+                </a:solidFill>
+                <a:latin typeface="Roboto"/>
+              </a:rPr>
+              <a:t>: </a:t>
+            </a:r>
+            <a:r>
+              <a:rPr lang="en-US" sz="1750" err="1">
+                <a:solidFill>
+                  <a:srgbClr val="E7E1E4"/>
+                </a:solidFill>
+                <a:latin typeface="Roboto"/>
+              </a:rPr>
+              <a:t>Сразу</a:t>
+            </a:r>
+            <a:r>
+              <a:rPr lang="en-US" sz="1750" dirty="0">
+                <a:solidFill>
+                  <a:srgbClr val="E7E1E4"/>
+                </a:solidFill>
+                <a:latin typeface="Roboto"/>
+              </a:rPr>
+              <a:t> </a:t>
+            </a:r>
+            <a:r>
+              <a:rPr lang="en-US" sz="1750" err="1">
+                <a:solidFill>
+                  <a:srgbClr val="E7E1E4"/>
+                </a:solidFill>
+                <a:latin typeface="Roboto"/>
+              </a:rPr>
+              <a:t>понятно</a:t>
+            </a:r>
+            <a:r>
+              <a:rPr lang="en-US" sz="1750" dirty="0">
+                <a:solidFill>
+                  <a:srgbClr val="E7E1E4"/>
+                </a:solidFill>
+                <a:latin typeface="Roboto"/>
+              </a:rPr>
+              <a:t>, </a:t>
+            </a:r>
+            <a:r>
+              <a:rPr lang="en-US" sz="1750" err="1">
+                <a:solidFill>
+                  <a:srgbClr val="E7E1E4"/>
+                </a:solidFill>
+                <a:latin typeface="Roboto"/>
+              </a:rPr>
+              <a:t>какую</a:t>
+            </a:r>
+            <a:r>
+              <a:rPr lang="en-US" sz="1750" dirty="0">
+                <a:solidFill>
+                  <a:srgbClr val="E7E1E4"/>
+                </a:solidFill>
+                <a:latin typeface="Roboto"/>
+              </a:rPr>
+              <a:t> </a:t>
+            </a:r>
+            <a:r>
+              <a:rPr lang="en-US" sz="1750" err="1">
+                <a:solidFill>
+                  <a:srgbClr val="E7E1E4"/>
+                </a:solidFill>
+                <a:latin typeface="Roboto"/>
+              </a:rPr>
+              <a:t>задачу</a:t>
+            </a:r>
+            <a:r>
+              <a:rPr lang="en-US" sz="1750" dirty="0">
+                <a:solidFill>
+                  <a:srgbClr val="E7E1E4"/>
+                </a:solidFill>
+                <a:latin typeface="Roboto"/>
+              </a:rPr>
+              <a:t> </a:t>
+            </a:r>
+            <a:r>
+              <a:rPr lang="en-US" sz="1750" err="1">
+                <a:solidFill>
+                  <a:srgbClr val="E7E1E4"/>
+                </a:solidFill>
+                <a:latin typeface="Roboto"/>
+              </a:rPr>
+              <a:t>решает</a:t>
+            </a:r>
+            <a:r>
+              <a:rPr lang="en-US" sz="1750" dirty="0">
+                <a:solidFill>
+                  <a:srgbClr val="E7E1E4"/>
+                </a:solidFill>
+                <a:latin typeface="Roboto"/>
+              </a:rPr>
+              <a:t> </a:t>
+            </a:r>
+            <a:r>
+              <a:rPr lang="en-US" sz="1750" err="1">
+                <a:solidFill>
+                  <a:srgbClr val="E7E1E4"/>
+                </a:solidFill>
+                <a:latin typeface="Roboto"/>
+              </a:rPr>
+              <a:t>инструмент</a:t>
+            </a:r>
+            <a:r>
+              <a:rPr lang="en-US" sz="1750" dirty="0">
+                <a:solidFill>
+                  <a:srgbClr val="E7E1E4"/>
+                </a:solidFill>
+                <a:latin typeface="Roboto"/>
+              </a:rPr>
+              <a:t> </a:t>
+            </a:r>
+            <a:r>
+              <a:rPr lang="en-US" sz="1750" err="1">
+                <a:solidFill>
+                  <a:srgbClr val="E7E1E4"/>
+                </a:solidFill>
+                <a:latin typeface="Roboto"/>
+              </a:rPr>
+              <a:t>для</a:t>
+            </a:r>
+            <a:r>
+              <a:rPr lang="en-US" sz="1750" dirty="0">
+                <a:solidFill>
+                  <a:srgbClr val="E7E1E4"/>
+                </a:solidFill>
+                <a:latin typeface="Roboto"/>
+              </a:rPr>
+              <a:t> </a:t>
+            </a:r>
+            <a:r>
+              <a:rPr lang="en-US" sz="1750" err="1">
+                <a:solidFill>
+                  <a:srgbClr val="E7E1E4"/>
+                </a:solidFill>
+                <a:latin typeface="Roboto"/>
+              </a:rPr>
+              <a:t>каждой</a:t>
+            </a:r>
+            <a:r>
+              <a:rPr lang="en-US" sz="1750" dirty="0">
+                <a:solidFill>
+                  <a:srgbClr val="E7E1E4"/>
+                </a:solidFill>
+                <a:latin typeface="Roboto"/>
+              </a:rPr>
+              <a:t> </a:t>
+            </a:r>
+            <a:r>
+              <a:rPr lang="en-US" sz="1750" err="1">
+                <a:solidFill>
+                  <a:srgbClr val="E7E1E4"/>
+                </a:solidFill>
+                <a:latin typeface="Roboto"/>
+              </a:rPr>
+              <a:t>группы</a:t>
+            </a:r>
+            <a:r>
+              <a:rPr lang="en-US" sz="1750" dirty="0">
+                <a:solidFill>
+                  <a:srgbClr val="E7E1E4"/>
+                </a:solidFill>
+                <a:latin typeface="Roboto"/>
+              </a:rPr>
+              <a:t>.</a:t>
+            </a:r>
+          </a:p>
+          <a:p>
+            <a:pPr marL="342900" indent="-342900">
+              <a:buAutoNum type="arabicPeriod"/>
+              <a:defRPr/>
+            </a:pPr>
+            <a:r>
+              <a:rPr lang="en-US" sz="1750" err="1">
+                <a:solidFill>
+                  <a:srgbClr val="E7E1E4"/>
+                </a:solidFill>
+                <a:latin typeface="Roboto"/>
+              </a:rPr>
+              <a:t>Визуальная</a:t>
+            </a:r>
+            <a:r>
+              <a:rPr lang="en-US" sz="1750" dirty="0">
+                <a:solidFill>
+                  <a:srgbClr val="E7E1E4"/>
+                </a:solidFill>
+                <a:latin typeface="Roboto"/>
+              </a:rPr>
+              <a:t> </a:t>
+            </a:r>
+            <a:r>
+              <a:rPr lang="en-US" sz="1750" err="1">
+                <a:solidFill>
+                  <a:srgbClr val="E7E1E4"/>
+                </a:solidFill>
+                <a:latin typeface="Roboto"/>
+              </a:rPr>
+              <a:t>чистота</a:t>
+            </a:r>
+            <a:r>
+              <a:rPr lang="en-US" sz="1750" dirty="0">
+                <a:solidFill>
+                  <a:srgbClr val="E7E1E4"/>
+                </a:solidFill>
+                <a:latin typeface="Roboto"/>
+              </a:rPr>
+              <a:t>: </a:t>
+            </a:r>
+            <a:r>
+              <a:rPr lang="en-US" sz="1750" err="1">
+                <a:solidFill>
+                  <a:srgbClr val="E7E1E4"/>
+                </a:solidFill>
+                <a:latin typeface="Roboto"/>
+              </a:rPr>
+              <a:t>Минимум</a:t>
+            </a:r>
+            <a:r>
+              <a:rPr lang="en-US" sz="1750" dirty="0">
+                <a:solidFill>
+                  <a:srgbClr val="E7E1E4"/>
+                </a:solidFill>
+                <a:latin typeface="Roboto"/>
+              </a:rPr>
+              <a:t> </a:t>
+            </a:r>
+            <a:r>
+              <a:rPr lang="en-US" sz="1750" err="1">
+                <a:solidFill>
+                  <a:srgbClr val="E7E1E4"/>
+                </a:solidFill>
+                <a:latin typeface="Roboto"/>
+              </a:rPr>
+              <a:t>текста</a:t>
+            </a:r>
+            <a:r>
+              <a:rPr lang="en-US" sz="1750" dirty="0">
+                <a:solidFill>
+                  <a:srgbClr val="E7E1E4"/>
+                </a:solidFill>
+                <a:latin typeface="Roboto"/>
+              </a:rPr>
+              <a:t>, </a:t>
+            </a:r>
+            <a:r>
+              <a:rPr lang="en-US" sz="1750" err="1">
+                <a:solidFill>
+                  <a:srgbClr val="E7E1E4"/>
+                </a:solidFill>
+                <a:latin typeface="Roboto"/>
+              </a:rPr>
+              <a:t>максимум</a:t>
+            </a:r>
+            <a:r>
+              <a:rPr lang="en-US" sz="1750" dirty="0">
+                <a:solidFill>
+                  <a:srgbClr val="E7E1E4"/>
+                </a:solidFill>
+                <a:latin typeface="Roboto"/>
+              </a:rPr>
+              <a:t> </a:t>
+            </a:r>
+            <a:r>
+              <a:rPr lang="en-US" sz="1750" err="1">
+                <a:solidFill>
+                  <a:srgbClr val="E7E1E4"/>
+                </a:solidFill>
+                <a:latin typeface="Roboto"/>
+              </a:rPr>
+              <a:t>смысла</a:t>
+            </a:r>
+            <a:r>
+              <a:rPr lang="en-US" sz="1750" dirty="0">
+                <a:solidFill>
+                  <a:srgbClr val="E7E1E4"/>
+                </a:solidFill>
+                <a:latin typeface="Roboto"/>
+              </a:rPr>
+              <a:t> — </a:t>
+            </a:r>
+            <a:r>
+              <a:rPr lang="en-US" sz="1750" err="1">
+                <a:solidFill>
+                  <a:srgbClr val="E7E1E4"/>
+                </a:solidFill>
+                <a:latin typeface="Roboto"/>
+              </a:rPr>
+              <a:t>как</a:t>
+            </a:r>
+            <a:r>
+              <a:rPr lang="en-US" sz="1750" dirty="0">
+                <a:solidFill>
+                  <a:srgbClr val="E7E1E4"/>
+                </a:solidFill>
+                <a:latin typeface="Roboto"/>
+              </a:rPr>
+              <a:t> </a:t>
+            </a:r>
+            <a:r>
+              <a:rPr lang="en-US" sz="1750" err="1">
+                <a:solidFill>
+                  <a:srgbClr val="E7E1E4"/>
+                </a:solidFill>
+                <a:latin typeface="Roboto"/>
+              </a:rPr>
+              <a:t>раз</a:t>
+            </a:r>
+            <a:r>
+              <a:rPr lang="en-US" sz="1750" dirty="0">
+                <a:solidFill>
+                  <a:srgbClr val="E7E1E4"/>
+                </a:solidFill>
+                <a:latin typeface="Roboto"/>
+              </a:rPr>
+              <a:t> </a:t>
+            </a:r>
+            <a:r>
+              <a:rPr lang="en-US" sz="1750" err="1">
+                <a:solidFill>
+                  <a:srgbClr val="E7E1E4"/>
+                </a:solidFill>
+                <a:latin typeface="Roboto"/>
+              </a:rPr>
+              <a:t>для</a:t>
+            </a:r>
+            <a:r>
+              <a:rPr lang="en-US" sz="1750" dirty="0">
+                <a:solidFill>
+                  <a:srgbClr val="E7E1E4"/>
+                </a:solidFill>
+                <a:latin typeface="Roboto"/>
+              </a:rPr>
+              <a:t> </a:t>
+            </a:r>
+            <a:r>
+              <a:rPr lang="en-US" sz="1750" err="1">
+                <a:solidFill>
+                  <a:srgbClr val="E7E1E4"/>
+                </a:solidFill>
+                <a:latin typeface="Roboto"/>
+              </a:rPr>
+              <a:t>копирования</a:t>
+            </a:r>
+            <a:r>
+              <a:rPr lang="en-US" sz="1750" dirty="0">
+                <a:solidFill>
+                  <a:srgbClr val="E7E1E4"/>
+                </a:solidFill>
+                <a:latin typeface="Roboto"/>
+              </a:rPr>
+              <a:t> </a:t>
+            </a:r>
+            <a:r>
+              <a:rPr lang="en-US" sz="1750" err="1">
+                <a:solidFill>
+                  <a:srgbClr val="E7E1E4"/>
+                </a:solidFill>
+                <a:latin typeface="Roboto"/>
+              </a:rPr>
+              <a:t>структуры</a:t>
+            </a:r>
+            <a:r>
+              <a:rPr lang="en-US" sz="1750" dirty="0">
+                <a:solidFill>
+                  <a:srgbClr val="E7E1E4"/>
+                </a:solidFill>
+                <a:latin typeface="Roboto"/>
+              </a:rPr>
+              <a:t> </a:t>
+            </a:r>
+            <a:r>
+              <a:rPr lang="en-US" sz="1750" err="1">
+                <a:solidFill>
+                  <a:srgbClr val="E7E1E4"/>
+                </a:solidFill>
+                <a:latin typeface="Roboto"/>
+              </a:rPr>
+              <a:t>вашего</a:t>
+            </a:r>
+            <a:r>
+              <a:rPr lang="en-US" sz="1750" dirty="0">
+                <a:solidFill>
+                  <a:srgbClr val="E7E1E4"/>
+                </a:solidFill>
+                <a:latin typeface="Roboto"/>
+              </a:rPr>
+              <a:t> </a:t>
+            </a:r>
+            <a:r>
+              <a:rPr lang="en-US" sz="1750" err="1">
+                <a:solidFill>
+                  <a:srgbClr val="E7E1E4"/>
+                </a:solidFill>
+                <a:latin typeface="Roboto"/>
+              </a:rPr>
+              <a:t>первого</a:t>
+            </a:r>
+            <a:r>
+              <a:rPr lang="en-US" sz="1750" dirty="0">
+                <a:solidFill>
+                  <a:srgbClr val="E7E1E4"/>
+                </a:solidFill>
+                <a:latin typeface="Roboto"/>
+              </a:rPr>
+              <a:t> </a:t>
+            </a:r>
+            <a:r>
+              <a:rPr lang="en-US" sz="1750" err="1">
+                <a:solidFill>
+                  <a:srgbClr val="E7E1E4"/>
+                </a:solidFill>
+                <a:latin typeface="Roboto"/>
+              </a:rPr>
+              <a:t>слайда</a:t>
+            </a:r>
+            <a:r>
+              <a:rPr lang="en-US" sz="1750" dirty="0">
+                <a:solidFill>
+                  <a:srgbClr val="E7E1E4"/>
+                </a:solidFill>
+                <a:latin typeface="Roboto"/>
+              </a:rPr>
+              <a:t>.</a:t>
+            </a:r>
+          </a:p>
+          <a:p>
+            <a:pPr marL="342900" indent="-342900">
+              <a:buSzPct val="100000"/>
+              <a:buAutoNum type="arabicPeriod"/>
+              <a:defRPr/>
+            </a:pPr>
+            <a:endParaRPr lang="en-US" sz="1750" dirty="0">
+              <a:solidFill>
+                <a:srgbClr val="E7E1E4"/>
+              </a:solidFill>
+              <a:latin typeface="Roboto"/>
+            </a:endParaRPr>
+          </a:p>
+        </p:txBody>
+      </p:sp>
+    </p:spTree>
+    <p:extLst>
+      <p:ext uri="{BB962C8B-B14F-4D97-AF65-F5344CB8AC3E}">
+        <p14:creationId xmlns:p14="http://schemas.microsoft.com/office/powerpoint/2010/main" val="3161560372"/>
+      </p:ext>
+    </p:extLst>
+  </p:cSld>
+  <p:clrMapOvr>
+    <a:masterClrMapping/>
+  </p:clrMapOvr>
+</p:sld>
+</file>
+
+<file path=ppt/slides/slide5.xml><?xml version="1.0" encoding="utf-8"?>
+<p:sld xmlns:a="http://schemas.openxmlformats.org/drawingml/2006/main" xmlns:r="http://schemas.openxmlformats.org/officeDocument/2006/relationships" xmlns:p="http://schemas.openxmlformats.org/presentationml/2006/main" showMasterPhAnim="0">
   <p:cSld name="Slide 4">
     <p:spTree>
       <p:nvGrpSpPr>
@@ -3977,7 +6097,7 @@
         </p:nvSpPr>
         <p:spPr bwMode="auto">
           <a:xfrm>
-            <a:off x="2755761" y="2521982"/>
+            <a:off x="2755761" y="2486356"/>
             <a:ext cx="272177" cy="340162"/>
           </a:xfrm>
           <a:prstGeom prst="rect">
@@ -3987,10 +6107,10 @@
           <a:ln/>
         </p:spPr>
         <p:txBody>
-          <a:bodyPr wrap="none" lIns="0" tIns="0" rIns="0" bIns="0" rtlCol="0" anchor="t"/>
-          <a:lstStyle/>
-          <a:p>
-            <a:pPr marL="0" indent="0" algn="l">
+          <a:bodyPr wrap="none" lIns="0" tIns="0" rIns="0" bIns="0" rtlCol="0" anchor="ctr"/>
+          <a:lstStyle/>
+          <a:p>
+            <a:pPr indent="0" algn="ctr">
               <a:lnSpc>
                 <a:spcPts val="3400"/>
               </a:lnSpc>
@@ -3998,7 +6118,7 @@
               <a:defRPr/>
             </a:pPr>
             <a:r>
-              <a:rPr lang="en-US" sz="2100">
+              <a:rPr lang="en-US" sz="2100" dirty="0">
                 <a:solidFill>
                   <a:srgbClr val="000000"/>
                 </a:solidFill>
@@ -4008,7 +6128,7 @@
               </a:rPr>
               <a:t>1</a:t>
             </a:r>
-            <a:endParaRPr lang="en-US" sz="2100"/>
+            <a:endParaRPr lang="en-US" sz="2100" dirty="0"/>
           </a:p>
         </p:txBody>
       </p:sp>
@@ -4172,7 +6292,7 @@
         </p:nvSpPr>
         <p:spPr bwMode="auto">
           <a:xfrm>
-            <a:off x="7178933" y="2521982"/>
+            <a:off x="7190808" y="2486356"/>
             <a:ext cx="272177" cy="340162"/>
           </a:xfrm>
           <a:prstGeom prst="rect">
@@ -4182,10 +6302,10 @@
           <a:ln/>
         </p:spPr>
         <p:txBody>
-          <a:bodyPr wrap="none" lIns="0" tIns="0" rIns="0" bIns="0" rtlCol="0" anchor="t"/>
-          <a:lstStyle/>
-          <a:p>
-            <a:pPr marL="0" indent="0" algn="l">
+          <a:bodyPr wrap="none" lIns="0" tIns="0" rIns="0" bIns="0" rtlCol="0" anchor="ctr"/>
+          <a:lstStyle/>
+          <a:p>
+            <a:pPr marL="0" indent="0" algn="ctr">
               <a:lnSpc>
                 <a:spcPts val="3400"/>
               </a:lnSpc>
@@ -4367,7 +6487,7 @@
         </p:nvSpPr>
         <p:spPr bwMode="auto">
           <a:xfrm>
-            <a:off x="11602105" y="2521982"/>
+            <a:off x="11602105" y="2486356"/>
             <a:ext cx="272177" cy="340162"/>
           </a:xfrm>
           <a:prstGeom prst="rect">
@@ -4377,10 +6497,10 @@
           <a:ln/>
         </p:spPr>
         <p:txBody>
-          <a:bodyPr wrap="none" lIns="0" tIns="0" rIns="0" bIns="0" rtlCol="0" anchor="t"/>
-          <a:lstStyle/>
-          <a:p>
-            <a:pPr marL="0" indent="0" algn="l">
+          <a:bodyPr wrap="none" lIns="0" tIns="0" rIns="0" bIns="0" rtlCol="0" anchor="ctr"/>
+          <a:lstStyle/>
+          <a:p>
+            <a:pPr marL="0" indent="0" algn="ctr">
               <a:lnSpc>
                 <a:spcPts val="3400"/>
               </a:lnSpc>
@@ -4588,7 +6708,7 @@
       </p:sp>
       <p:pic>
         <p:nvPicPr>
-          <p:cNvPr id="1956995084" name=""/>
+          <p:cNvPr id="1956995084" name="Рисунок 1956995083"/>
           <p:cNvPicPr>
             <a:picLocks noChangeAspect="1"/>
           </p:cNvPicPr>
@@ -4613,19 +6733,11 @@
   <p:clrMapOvr>
     <a:masterClrMapping/>
   </p:clrMapOvr>
-  <mc:AlternateContent xmlns:mc="http://schemas.openxmlformats.org/markup-compatibility/2006">
-    <mc:Choice xmlns:p159="http://schemas.microsoft.com/office/powerpoint/2015/09/main" xmlns:p14="http://schemas.microsoft.com/office/powerpoint/2010/main" Requires="p159">
-      <p:transition p14:dur="2000" advClick="1"/>
-    </mc:Choice>
-    <mc:Fallback>
-      <p:transition advClick="1"/>
-    </mc:Fallback>
-  </mc:AlternateContent>
 </p:sld>
 </file>
 
-<file path=ppt/slides/slide5.xml><?xml version="1.0" encoding="utf-8"?>
-<p:sld xmlns:a="http://schemas.openxmlformats.org/drawingml/2006/main" xmlns:r="http://schemas.openxmlformats.org/officeDocument/2006/relationships" xmlns:p="http://schemas.openxmlformats.org/presentationml/2006/main" xmlns:m="http://schemas.openxmlformats.org/officeDocument/2006/math" xmlns:w="http://schemas.openxmlformats.org/wordprocessingml/2006/main" xmlns:mc="http://schemas.openxmlformats.org/markup-compatibility/2006" showMasterPhAnim="0" showMasterSp="1" show="1">
+<file path=ppt/slides/slide6.xml><?xml version="1.0" encoding="utf-8"?>
+<p:sld xmlns:a="http://schemas.openxmlformats.org/drawingml/2006/main" xmlns:r="http://schemas.openxmlformats.org/officeDocument/2006/relationships" xmlns:p="http://schemas.openxmlformats.org/presentationml/2006/main" showMasterPhAnim="0">
   <p:cSld name="Slide 5">
     <p:spTree>
       <p:nvGrpSpPr>
@@ -5514,7 +7626,7 @@
       </p:sp>
       <p:pic>
         <p:nvPicPr>
-          <p:cNvPr id="478222775" name=""/>
+          <p:cNvPr id="478222775" name="Рисунок 478222774"/>
           <p:cNvPicPr>
             <a:picLocks noChangeAspect="1"/>
           </p:cNvPicPr>
@@ -5539,19 +7651,11 @@
   <p:clrMapOvr>
     <a:masterClrMapping/>
   </p:clrMapOvr>
-  <mc:AlternateContent xmlns:mc="http://schemas.openxmlformats.org/markup-compatibility/2006">
-    <mc:Choice xmlns:p159="http://schemas.microsoft.com/office/powerpoint/2015/09/main" xmlns:p14="http://schemas.microsoft.com/office/powerpoint/2010/main" Requires="p159">
-      <p:transition p14:dur="2000" advClick="1"/>
-    </mc:Choice>
-    <mc:Fallback>
-      <p:transition advClick="1"/>
-    </mc:Fallback>
-  </mc:AlternateContent>
 </p:sld>
 </file>
 
-<file path=ppt/slides/slide6.xml><?xml version="1.0" encoding="utf-8"?>
-<p:sld xmlns:a="http://schemas.openxmlformats.org/drawingml/2006/main" xmlns:r="http://schemas.openxmlformats.org/officeDocument/2006/relationships" xmlns:p="http://schemas.openxmlformats.org/presentationml/2006/main" xmlns:m="http://schemas.openxmlformats.org/officeDocument/2006/math" xmlns:w="http://schemas.openxmlformats.org/wordprocessingml/2006/main" xmlns:mc="http://schemas.openxmlformats.org/markup-compatibility/2006" showMasterPhAnim="0" showMasterSp="1" show="1">
+<file path=ppt/slides/slide7.xml><?xml version="1.0" encoding="utf-8"?>
+<p:sld xmlns:a="http://schemas.openxmlformats.org/drawingml/2006/main" xmlns:r="http://schemas.openxmlformats.org/officeDocument/2006/relationships" xmlns:p="http://schemas.openxmlformats.org/presentationml/2006/main" showMasterPhAnim="0">
   <p:cSld name="Slide 6">
     <p:spTree>
       <p:nvGrpSpPr>
@@ -6068,7 +8172,7 @@
       </p:sp>
       <p:pic>
         <p:nvPicPr>
-          <p:cNvPr id="1932312234" name=""/>
+          <p:cNvPr id="1932312234" name="Рисунок 1932312233"/>
           <p:cNvPicPr>
             <a:picLocks noChangeAspect="1"/>
           </p:cNvPicPr>
@@ -6093,19 +8197,11 @@
   <p:clrMapOvr>
     <a:masterClrMapping/>
   </p:clrMapOvr>
-  <mc:AlternateContent xmlns:mc="http://schemas.openxmlformats.org/markup-compatibility/2006">
-    <mc:Choice xmlns:p159="http://schemas.microsoft.com/office/powerpoint/2015/09/main" xmlns:p14="http://schemas.microsoft.com/office/powerpoint/2010/main" Requires="p159">
-      <p:transition p14:dur="2000" advClick="1"/>
-    </mc:Choice>
-    <mc:Fallback>
-      <p:transition advClick="1"/>
-    </mc:Fallback>
-  </mc:AlternateContent>
 </p:sld>
 </file>
 
-<file path=ppt/slides/slide7.xml><?xml version="1.0" encoding="utf-8"?>
-<p:sld xmlns:a="http://schemas.openxmlformats.org/drawingml/2006/main" xmlns:r="http://schemas.openxmlformats.org/officeDocument/2006/relationships" xmlns:p="http://schemas.openxmlformats.org/presentationml/2006/main" xmlns:m="http://schemas.openxmlformats.org/officeDocument/2006/math" xmlns:w="http://schemas.openxmlformats.org/wordprocessingml/2006/main" xmlns:mc="http://schemas.openxmlformats.org/markup-compatibility/2006" showMasterPhAnim="0" showMasterSp="1" show="1">
+<file path=ppt/slides/slide8.xml><?xml version="1.0" encoding="utf-8"?>
+<p:sld xmlns:a="http://schemas.openxmlformats.org/drawingml/2006/main" xmlns:r="http://schemas.openxmlformats.org/officeDocument/2006/relationships" xmlns:p="http://schemas.openxmlformats.org/presentationml/2006/main" showMasterPhAnim="0">
   <p:cSld name="Slide 7">
     <p:spTree>
       <p:nvGrpSpPr>
@@ -6763,7 +8859,7 @@
       </p:sp>
       <p:pic>
         <p:nvPicPr>
-          <p:cNvPr id="84125381" name=""/>
+          <p:cNvPr id="84125381" name="Рисунок 84125380"/>
           <p:cNvPicPr>
             <a:picLocks noChangeAspect="1"/>
           </p:cNvPicPr>
@@ -6788,19 +8884,11 @@
   <p:clrMapOvr>
     <a:masterClrMapping/>
   </p:clrMapOvr>
-  <mc:AlternateContent xmlns:mc="http://schemas.openxmlformats.org/markup-compatibility/2006">
-    <mc:Choice xmlns:p159="http://schemas.microsoft.com/office/powerpoint/2015/09/main" xmlns:p14="http://schemas.microsoft.com/office/powerpoint/2010/main" Requires="p159">
-      <p:transition p14:dur="2000" advClick="1"/>
-    </mc:Choice>
-    <mc:Fallback>
-      <p:transition advClick="1"/>
-    </mc:Fallback>
-  </mc:AlternateContent>
 </p:sld>
 </file>
 
-<file path=ppt/slides/slide8.xml><?xml version="1.0" encoding="utf-8"?>
-<p:sld xmlns:a="http://schemas.openxmlformats.org/drawingml/2006/main" xmlns:r="http://schemas.openxmlformats.org/officeDocument/2006/relationships" xmlns:p="http://schemas.openxmlformats.org/presentationml/2006/main" xmlns:m="http://schemas.openxmlformats.org/officeDocument/2006/math" xmlns:w="http://schemas.openxmlformats.org/wordprocessingml/2006/main" xmlns:mc="http://schemas.openxmlformats.org/markup-compatibility/2006" showMasterPhAnim="0" showMasterSp="1" show="1">
+<file path=ppt/slides/slide9.xml><?xml version="1.0" encoding="utf-8"?>
+<p:sld xmlns:a="http://schemas.openxmlformats.org/drawingml/2006/main" xmlns:r="http://schemas.openxmlformats.org/officeDocument/2006/relationships" xmlns:p="http://schemas.openxmlformats.org/presentationml/2006/main" showMasterPhAnim="0">
   <p:cSld name="Slide 8">
     <p:spTree>
       <p:nvGrpSpPr>
@@ -7403,7 +9491,7 @@
       </p:sp>
       <p:pic>
         <p:nvPicPr>
-          <p:cNvPr id="729006083" name=""/>
+          <p:cNvPr id="729006083" name="Рисунок 729006082"/>
           <p:cNvPicPr>
             <a:picLocks noChangeAspect="1"/>
           </p:cNvPicPr>
@@ -7428,434 +9516,11 @@
   <p:clrMapOvr>
     <a:masterClrMapping/>
   </p:clrMapOvr>
-  <mc:AlternateContent xmlns:mc="http://schemas.openxmlformats.org/markup-compatibility/2006">
-    <mc:Choice xmlns:p159="http://schemas.microsoft.com/office/powerpoint/2015/09/main" xmlns:p14="http://schemas.microsoft.com/office/powerpoint/2010/main" Requires="p159">
-      <p:transition p14:dur="2000" advClick="1"/>
-    </mc:Choice>
-    <mc:Fallback>
-      <p:transition advClick="1"/>
-    </mc:Fallback>
-  </mc:AlternateContent>
-</p:sld>
-</file>
-
-<file path=ppt/slides/slide9.xml><?xml version="1.0" encoding="utf-8"?>
-<p:sld xmlns:a="http://schemas.openxmlformats.org/drawingml/2006/main" xmlns:r="http://schemas.openxmlformats.org/officeDocument/2006/relationships" xmlns:p="http://schemas.openxmlformats.org/presentationml/2006/main" xmlns:m="http://schemas.openxmlformats.org/officeDocument/2006/math" xmlns:w="http://schemas.openxmlformats.org/wordprocessingml/2006/main" xmlns:mc="http://schemas.openxmlformats.org/markup-compatibility/2006" showMasterPhAnim="0" showMasterSp="1" show="1">
-  <p:cSld name="Slide 9">
-    <p:spTree>
-      <p:nvGrpSpPr>
-        <p:cNvPr id="1" name=""/>
-        <p:cNvGrpSpPr/>
-        <p:nvPr/>
-      </p:nvGrpSpPr>
-      <p:grpSpPr bwMode="auto">
-        <a:xfrm>
-          <a:off x="0" y="0"/>
-          <a:ext cx="0" cy="0"/>
-          <a:chOff x="0" y="0"/>
-          <a:chExt cx="0" cy="0"/>
-        </a:xfrm>
-      </p:grpSpPr>
-      <p:sp>
-        <p:nvSpPr>
-          <p:cNvPr id="2130163748" name="Text 0"/>
-          <p:cNvSpPr/>
-          <p:nvPr/>
-        </p:nvSpPr>
-        <p:spPr bwMode="auto">
-          <a:xfrm>
-            <a:off x="793790" y="1692831"/>
-            <a:ext cx="8461058" cy="708779"/>
-          </a:xfrm>
-          <a:prstGeom prst="rect">
-            <a:avLst/>
-          </a:prstGeom>
-          <a:noFill/>
-          <a:ln/>
-        </p:spPr>
-        <p:txBody>
-          <a:bodyPr wrap="none" lIns="0" tIns="0" rIns="0" bIns="0" rtlCol="0" anchor="t"/>
-          <a:lstStyle/>
-          <a:p>
-            <a:pPr marL="0" indent="0" algn="l">
-              <a:lnSpc>
-                <a:spcPts val="5550"/>
-              </a:lnSpc>
-              <a:buNone/>
-              <a:defRPr/>
-            </a:pPr>
-            <a:r>
-              <a:rPr lang="en-US" sz="4450">
-                <a:solidFill>
-                  <a:srgbClr val="F3F3F2"/>
-                </a:solidFill>
-                <a:latin typeface="IBM Plex Sans Medium"/>
-                <a:ea typeface="IBM Plex Sans Medium"/>
-                <a:cs typeface="IBM Plex Sans Medium"/>
-              </a:rPr>
-              <a:t>Pixels — CSS без компромиссов</a:t>
-            </a:r>
-            <a:endParaRPr lang="en-US" sz="4450"/>
-          </a:p>
-        </p:txBody>
-      </p:sp>
-      <p:sp>
-        <p:nvSpPr>
-          <p:cNvPr id="1650311294" name="Text 1"/>
-          <p:cNvSpPr/>
-          <p:nvPr/>
-        </p:nvSpPr>
-        <p:spPr bwMode="auto">
-          <a:xfrm>
-            <a:off x="793790" y="2968585"/>
-            <a:ext cx="4198382" cy="425291"/>
-          </a:xfrm>
-          <a:prstGeom prst="rect">
-            <a:avLst/>
-          </a:prstGeom>
-          <a:noFill/>
-          <a:ln/>
-        </p:spPr>
-        <p:txBody>
-          <a:bodyPr wrap="none" lIns="0" tIns="0" rIns="0" bIns="0" rtlCol="0" anchor="t"/>
-          <a:lstStyle/>
-          <a:p>
-            <a:pPr marL="0" indent="0" algn="l">
-              <a:lnSpc>
-                <a:spcPts val="3300"/>
-              </a:lnSpc>
-              <a:buNone/>
-              <a:defRPr/>
-            </a:pPr>
-            <a:r>
-              <a:rPr lang="en-US" sz="2650">
-                <a:solidFill>
-                  <a:srgbClr val="F3F3F2"/>
-                </a:solidFill>
-                <a:latin typeface="IBM Plex Sans Medium"/>
-                <a:ea typeface="IBM Plex Sans Medium"/>
-                <a:cs typeface="IBM Plex Sans Medium"/>
-              </a:rPr>
-              <a:t>Ключевые преимущества</a:t>
-            </a:r>
-            <a:endParaRPr lang="en-US" sz="2650"/>
-          </a:p>
-        </p:txBody>
-      </p:sp>
-      <p:sp>
-        <p:nvSpPr>
-          <p:cNvPr id="1654479021" name="Text 2"/>
-          <p:cNvSpPr/>
-          <p:nvPr/>
-        </p:nvSpPr>
-        <p:spPr bwMode="auto">
-          <a:xfrm>
-            <a:off x="793790" y="3620691"/>
-            <a:ext cx="6924437" cy="362903"/>
-          </a:xfrm>
-          <a:prstGeom prst="rect">
-            <a:avLst/>
-          </a:prstGeom>
-          <a:noFill/>
-          <a:ln/>
-        </p:spPr>
-        <p:txBody>
-          <a:bodyPr wrap="none" lIns="0" tIns="0" rIns="0" bIns="0" rtlCol="0" anchor="t"/>
-          <a:lstStyle/>
-          <a:p>
-            <a:pPr marL="342900" indent="-342900" algn="l">
-              <a:lnSpc>
-                <a:spcPts val="2850"/>
-              </a:lnSpc>
-              <a:buSzPct val="100000"/>
-              <a:buChar char="•"/>
-              <a:defRPr/>
-            </a:pPr>
-            <a:r>
-              <a:rPr lang="en-US" sz="1750">
-                <a:solidFill>
-                  <a:srgbClr val="D4D4D1"/>
-                </a:solidFill>
-                <a:latin typeface="Roboto"/>
-                <a:ea typeface="Roboto"/>
-                <a:cs typeface="Roboto"/>
-              </a:rPr>
-              <a:t>Векторная четкость на любых экранах</a:t>
-            </a:r>
-            <a:endParaRPr lang="en-US" sz="1750"/>
-          </a:p>
-        </p:txBody>
-      </p:sp>
-      <p:sp>
-        <p:nvSpPr>
-          <p:cNvPr id="717026560" name="Text 3"/>
-          <p:cNvSpPr/>
-          <p:nvPr/>
-        </p:nvSpPr>
-        <p:spPr bwMode="auto">
-          <a:xfrm>
-            <a:off x="793790" y="4062889"/>
-            <a:ext cx="6924437" cy="362903"/>
-          </a:xfrm>
-          <a:prstGeom prst="rect">
-            <a:avLst/>
-          </a:prstGeom>
-          <a:noFill/>
-          <a:ln/>
-        </p:spPr>
-        <p:txBody>
-          <a:bodyPr wrap="none" lIns="0" tIns="0" rIns="0" bIns="0" rtlCol="0" anchor="t"/>
-          <a:lstStyle/>
-          <a:p>
-            <a:pPr marL="342900" indent="-342900" algn="l">
-              <a:lnSpc>
-                <a:spcPts val="2850"/>
-              </a:lnSpc>
-              <a:buSzPct val="100000"/>
-              <a:buChar char="•"/>
-              <a:defRPr/>
-            </a:pPr>
-            <a:r>
-              <a:rPr lang="en-US" sz="1750">
-                <a:solidFill>
-                  <a:srgbClr val="D4D4D1"/>
-                </a:solidFill>
-                <a:latin typeface="Roboto"/>
-                <a:ea typeface="Roboto"/>
-                <a:cs typeface="Roboto"/>
-              </a:rPr>
-              <a:t>Нулевая задержка загрузки</a:t>
-            </a:r>
-            <a:endParaRPr lang="en-US" sz="1750"/>
-          </a:p>
-        </p:txBody>
-      </p:sp>
-      <p:sp>
-        <p:nvSpPr>
-          <p:cNvPr id="1848289755" name="Text 4"/>
-          <p:cNvSpPr/>
-          <p:nvPr/>
-        </p:nvSpPr>
-        <p:spPr bwMode="auto">
-          <a:xfrm>
-            <a:off x="793790" y="4505087"/>
-            <a:ext cx="6924437" cy="362903"/>
-          </a:xfrm>
-          <a:prstGeom prst="rect">
-            <a:avLst/>
-          </a:prstGeom>
-          <a:noFill/>
-          <a:ln/>
-        </p:spPr>
-        <p:txBody>
-          <a:bodyPr wrap="none" lIns="0" tIns="0" rIns="0" bIns="0" rtlCol="0" anchor="t"/>
-          <a:lstStyle/>
-          <a:p>
-            <a:pPr marL="342900" indent="-342900" algn="l">
-              <a:lnSpc>
-                <a:spcPts val="2850"/>
-              </a:lnSpc>
-              <a:buSzPct val="100000"/>
-              <a:buChar char="•"/>
-              <a:defRPr/>
-            </a:pPr>
-            <a:r>
-              <a:rPr lang="en-US" sz="1750">
-                <a:solidFill>
-                  <a:srgbClr val="D4D4D1"/>
-                </a:solidFill>
-                <a:latin typeface="Roboto"/>
-                <a:ea typeface="Roboto"/>
-                <a:cs typeface="Roboto"/>
-              </a:rPr>
-              <a:t>Чистый JavaScript без библиотек</a:t>
-            </a:r>
-            <a:endParaRPr lang="en-US" sz="1750"/>
-          </a:p>
-        </p:txBody>
-      </p:sp>
-      <p:sp>
-        <p:nvSpPr>
-          <p:cNvPr id="1298308717" name="Text 5"/>
-          <p:cNvSpPr/>
-          <p:nvPr/>
-        </p:nvSpPr>
-        <p:spPr bwMode="auto">
-          <a:xfrm>
-            <a:off x="793790" y="4947285"/>
-            <a:ext cx="6924437" cy="362903"/>
-          </a:xfrm>
-          <a:prstGeom prst="rect">
-            <a:avLst/>
-          </a:prstGeom>
-          <a:noFill/>
-          <a:ln/>
-        </p:spPr>
-        <p:txBody>
-          <a:bodyPr wrap="none" lIns="0" tIns="0" rIns="0" bIns="0" rtlCol="0" anchor="t"/>
-          <a:lstStyle/>
-          <a:p>
-            <a:pPr marL="342900" indent="-342900" algn="l">
-              <a:lnSpc>
-                <a:spcPts val="2850"/>
-              </a:lnSpc>
-              <a:buSzPct val="100000"/>
-              <a:buChar char="•"/>
-              <a:defRPr/>
-            </a:pPr>
-            <a:r>
-              <a:rPr lang="en-US" sz="1750">
-                <a:solidFill>
-                  <a:srgbClr val="D4D4D1"/>
-                </a:solidFill>
-                <a:latin typeface="Roboto"/>
-                <a:ea typeface="Roboto"/>
-                <a:cs typeface="Roboto"/>
-              </a:rPr>
-              <a:t>Полный контроль через код</a:t>
-            </a:r>
-            <a:endParaRPr lang="en-US" sz="1750"/>
-          </a:p>
-        </p:txBody>
-      </p:sp>
-      <p:sp>
-        <p:nvSpPr>
-          <p:cNvPr id="693835616" name="Shape 8"/>
-          <p:cNvSpPr/>
-          <p:nvPr/>
-        </p:nvSpPr>
-        <p:spPr bwMode="auto">
-          <a:xfrm>
-            <a:off x="8279249" y="2996922"/>
-            <a:ext cx="5564862" cy="2415421"/>
-          </a:xfrm>
-          <a:prstGeom prst="roundRect">
-            <a:avLst>
-              <a:gd name="adj" fmla="val 1409"/>
-            </a:avLst>
-          </a:prstGeom>
-          <a:solidFill>
-            <a:srgbClr val="4D1F00"/>
-          </a:solidFill>
-          <a:ln/>
-        </p:spPr>
-      </p:sp>
-      <p:pic>
-        <p:nvPicPr>
-          <p:cNvPr id="1655875260" name="Image 0" descr="preencoded.png"/>
-          <p:cNvPicPr>
-            <a:picLocks noChangeAspect="1"/>
-          </p:cNvPicPr>
-          <p:nvPr/>
-        </p:nvPicPr>
-        <p:blipFill rotWithShape="1">
-          <a:blip r:embed="rId3"/>
-          <a:stretch/>
-        </p:blipFill>
-        <p:spPr bwMode="auto">
-          <a:xfrm>
-            <a:off x="8506063" y="3341013"/>
-            <a:ext cx="283488" cy="226814"/>
-          </a:xfrm>
-          <a:prstGeom prst="rect">
-            <a:avLst/>
-          </a:prstGeom>
-        </p:spPr>
-      </p:pic>
-      <p:sp>
-        <p:nvSpPr>
-          <p:cNvPr id="1555851315" name="Text 9"/>
-          <p:cNvSpPr/>
-          <p:nvPr/>
-        </p:nvSpPr>
-        <p:spPr bwMode="auto">
-          <a:xfrm>
-            <a:off x="9016365" y="3280410"/>
-            <a:ext cx="4600932" cy="1814513"/>
-          </a:xfrm>
-          <a:prstGeom prst="rect">
-            <a:avLst/>
-          </a:prstGeom>
-          <a:noFill/>
-          <a:ln/>
-        </p:spPr>
-        <p:txBody>
-          <a:bodyPr wrap="square" lIns="0" tIns="0" rIns="0" bIns="0" rtlCol="0" anchor="t"/>
-          <a:lstStyle/>
-          <a:p>
-            <a:pPr marL="0" indent="0" algn="l">
-              <a:lnSpc>
-                <a:spcPts val="2850"/>
-              </a:lnSpc>
-              <a:buNone/>
-              <a:defRPr/>
-            </a:pPr>
-            <a:r>
-              <a:rPr lang="en-US" sz="1750" b="1">
-                <a:solidFill>
-                  <a:srgbClr val="FFFFFF"/>
-                </a:solidFill>
-                <a:latin typeface="Roboto"/>
-                <a:ea typeface="Roboto"/>
-                <a:cs typeface="Roboto"/>
-              </a:rPr>
-              <a:t>Вывод:</a:t>
-            </a:r>
-            <a:r>
-              <a:rPr lang="en-US" sz="1750">
-                <a:solidFill>
-                  <a:srgbClr val="FFFFFF"/>
-                </a:solidFill>
-                <a:latin typeface="Roboto"/>
-                <a:ea typeface="Roboto"/>
-                <a:cs typeface="Roboto"/>
-              </a:rPr>
-              <a:t> CSS box-shadow превращает браузер в графический редактор, доказывая, что веб-стандарты способны решать задачи, выходящие за рамки их изначального предназначения</a:t>
-            </a:r>
-            <a:endParaRPr lang="en-US" sz="1750"/>
-          </a:p>
-        </p:txBody>
-      </p:sp>
-      <p:pic>
-        <p:nvPicPr>
-          <p:cNvPr id="2051207809" name=""/>
-          <p:cNvPicPr>
-            <a:picLocks noChangeAspect="1"/>
-          </p:cNvPicPr>
-          <p:nvPr/>
-        </p:nvPicPr>
-        <p:blipFill rotWithShape="1">
-          <a:blip r:embed="rId4"/>
-          <a:stretch/>
-        </p:blipFill>
-        <p:spPr bwMode="auto">
-          <a:xfrm>
-            <a:off x="12337142" y="7540624"/>
-            <a:ext cx="2228850" cy="657225"/>
-          </a:xfrm>
-          <a:prstGeom prst="rect">
-            <a:avLst/>
-          </a:prstGeom>
-        </p:spPr>
-      </p:pic>
-    </p:spTree>
-  </p:cSld>
-  <p:clrMapOvr>
-    <a:masterClrMapping/>
-  </p:clrMapOvr>
-  <mc:AlternateContent xmlns:mc="http://schemas.openxmlformats.org/markup-compatibility/2006">
-    <mc:Choice xmlns:p159="http://schemas.microsoft.com/office/powerpoint/2015/09/main" xmlns:p14="http://schemas.microsoft.com/office/powerpoint/2010/main" Requires="p159">
-      <p:transition p14:dur="2000" advClick="1"/>
-    </mc:Choice>
-    <mc:Fallback>
-      <p:transition advClick="1"/>
-    </mc:Fallback>
-  </mc:AlternateContent>
 </p:sld>
 </file>
 
 <file path=ppt/theme/theme1.xml><?xml version="1.0" encoding="utf-8"?>
-<a:theme xmlns:a="http://schemas.openxmlformats.org/drawingml/2006/main" xmlns:r="http://schemas.openxmlformats.org/officeDocument/2006/relationships" xmlns:p="http://schemas.openxmlformats.org/presentationml/2006/main" name="Office Theme">
+<a:theme xmlns:a="http://schemas.openxmlformats.org/drawingml/2006/main" name="Office Theme">
   <a:themeElements>
     <a:clrScheme name="Office">
       <a:dk1>
@@ -8046,5 +9711,301 @@
     </a:fmtScheme>
   </a:themeElements>
   <a:objectDefaults/>
+  <a:extraClrSchemeLst/>
+</a:theme>
+</file>
+
+<file path=ppt/theme/theme2.xml><?xml version="1.0" encoding="utf-8"?>
+<a:theme xmlns:a="http://schemas.openxmlformats.org/drawingml/2006/main" name="Тема Office">
+  <a:themeElements>
+    <a:clrScheme name="Стандартная">
+      <a:dk1>
+        <a:sysClr val="windowText" lastClr="000000"/>
+      </a:dk1>
+      <a:lt1>
+        <a:sysClr val="window" lastClr="FFFFFF"/>
+      </a:lt1>
+      <a:dk2>
+        <a:srgbClr val="44546A"/>
+      </a:dk2>
+      <a:lt2>
+        <a:srgbClr val="E7E6E6"/>
+      </a:lt2>
+      <a:accent1>
+        <a:srgbClr val="4472C4"/>
+      </a:accent1>
+      <a:accent2>
+        <a:srgbClr val="ED7D31"/>
+      </a:accent2>
+      <a:accent3>
+        <a:srgbClr val="A5A5A5"/>
+      </a:accent3>
+      <a:accent4>
+        <a:srgbClr val="FFC000"/>
+      </a:accent4>
+      <a:accent5>
+        <a:srgbClr val="5B9BD5"/>
+      </a:accent5>
+      <a:accent6>
+        <a:srgbClr val="70AD47"/>
+      </a:accent6>
+      <a:hlink>
+        <a:srgbClr val="0563C1"/>
+      </a:hlink>
+      <a:folHlink>
+        <a:srgbClr val="954F72"/>
+      </a:folHlink>
+    </a:clrScheme>
+    <a:fontScheme name="Стандартная">
+      <a:majorFont>
+        <a:latin typeface="Calibri Light" panose="020F0302020204030204"/>
+        <a:ea typeface=""/>
+        <a:cs typeface=""/>
+        <a:font script="Jpan" typeface="游ゴシック Light"/>
+        <a:font script="Hang" typeface="맑은 고딕"/>
+        <a:font script="Hans" typeface="等线 Light"/>
+        <a:font script="Hant" typeface="新細明體"/>
+        <a:font script="Arab" typeface="Times New Roman"/>
+        <a:font script="Hebr" typeface="Times New Roman"/>
+        <a:font script="Thai" typeface="Angsana New"/>
+        <a:font script="Ethi" typeface="Nyala"/>
+        <a:font script="Beng" typeface="Vrinda"/>
+        <a:font script="Gujr" typeface="Shruti"/>
+        <a:font script="Khmr" typeface="MoolBoran"/>
+        <a:font script="Knda" typeface="Tunga"/>
+        <a:font script="Guru" typeface="Raavi"/>
+        <a:font script="Cans" typeface="Euphemia"/>
+        <a:font script="Cher" typeface="Plantagenet Cherokee"/>
+        <a:font script="Yiii" typeface="Microsoft Yi Baiti"/>
+        <a:font script="Tibt" typeface="Microsoft Himalaya"/>
+        <a:font script="Thaa" typeface="MV Boli"/>
+        <a:font script="Deva" typeface="Mangal"/>
+        <a:font script="Telu" typeface="Gautami"/>
+        <a:font script="Taml" typeface="Latha"/>
+        <a:font script="Syrc" typeface="Estrangelo Edessa"/>
+        <a:font script="Orya" typeface="Kalinga"/>
+        <a:font script="Mlym" typeface="Kartika"/>
+        <a:font script="Laoo" typeface="DokChampa"/>
+        <a:font script="Sinh" typeface="Iskoola Pota"/>
+        <a:font script="Mong" typeface="Mongolian Baiti"/>
+        <a:font script="Viet" typeface="Times New Roman"/>
+        <a:font script="Uigh" typeface="Microsoft Uighur"/>
+        <a:font script="Geor" typeface="Sylfaen"/>
+        <a:font script="Armn" typeface="Arial"/>
+        <a:font script="Bugi" typeface="Leelawadee UI"/>
+        <a:font script="Bopo" typeface="Microsoft JhengHei"/>
+        <a:font script="Java" typeface="Javanese Text"/>
+        <a:font script="Lisu" typeface="Segoe UI"/>
+        <a:font script="Mymr" typeface="Myanmar Text"/>
+        <a:font script="Nkoo" typeface="Ebrima"/>
+        <a:font script="Olck" typeface="Nirmala UI"/>
+        <a:font script="Osma" typeface="Ebrima"/>
+        <a:font script="Phag" typeface="Phagspa"/>
+        <a:font script="Syrn" typeface="Estrangelo Edessa"/>
+        <a:font script="Syrj" typeface="Estrangelo Edessa"/>
+        <a:font script="Syre" typeface="Estrangelo Edessa"/>
+        <a:font script="Sora" typeface="Nirmala UI"/>
+        <a:font script="Tale" typeface="Microsoft Tai Le"/>
+        <a:font script="Talu" typeface="Microsoft New Tai Lue"/>
+        <a:font script="Tfng" typeface="Ebrima"/>
+      </a:majorFont>
+      <a:minorFont>
+        <a:latin typeface="Calibri" panose="020F0502020204030204"/>
+        <a:ea typeface=""/>
+        <a:cs typeface=""/>
+        <a:font script="Jpan" typeface="游ゴシック"/>
+        <a:font script="Hang" typeface="맑은 고딕"/>
+        <a:font script="Hans" typeface="等线"/>
+        <a:font script="Hant" typeface="新細明體"/>
+        <a:font script="Arab" typeface="Arial"/>
+        <a:font script="Hebr" typeface="Arial"/>
+        <a:font script="Thai" typeface="Cordia New"/>
+        <a:font script="Ethi" typeface="Nyala"/>
+        <a:font script="Beng" typeface="Vrinda"/>
+        <a:font script="Gujr" typeface="Shruti"/>
+        <a:font script="Khmr" typeface="DaunPenh"/>
+        <a:font script="Knda" typeface="Tunga"/>
+        <a:font script="Guru" typeface="Raavi"/>
+        <a:font script="Cans" typeface="Euphemia"/>
+        <a:font script="Cher" typeface="Plantagenet Cherokee"/>
+        <a:font script="Yiii" typeface="Microsoft Yi Baiti"/>
+        <a:font script="Tibt" typeface="Microsoft Himalaya"/>
+        <a:font script="Thaa" typeface="MV Boli"/>
+        <a:font script="Deva" typeface="Mangal"/>
+        <a:font script="Telu" typeface="Gautami"/>
+        <a:font script="Taml" typeface="Latha"/>
+        <a:font script="Syrc" typeface="Estrangelo Edessa"/>
+        <a:font script="Orya" typeface="Kalinga"/>
+        <a:font script="Mlym" typeface="Kartika"/>
+        <a:font script="Laoo" typeface="DokChampa"/>
+        <a:font script="Sinh" typeface="Iskoola Pota"/>
+        <a:font script="Mong" typeface="Mongolian Baiti"/>
+        <a:font script="Viet" typeface="Arial"/>
+        <a:font script="Uigh" typeface="Microsoft Uighur"/>
+        <a:font script="Geor" typeface="Sylfaen"/>
+        <a:font script="Armn" typeface="Arial"/>
+        <a:font script="Bugi" typeface="Leelawadee UI"/>
+        <a:font script="Bopo" typeface="Microsoft JhengHei"/>
+        <a:font script="Java" typeface="Javanese Text"/>
+        <a:font script="Lisu" typeface="Segoe UI"/>
+        <a:font script="Mymr" typeface="Myanmar Text"/>
+        <a:font script="Nkoo" typeface="Ebrima"/>
+        <a:font script="Olck" typeface="Nirmala UI"/>
+        <a:font script="Osma" typeface="Ebrima"/>
+        <a:font script="Phag" typeface="Phagspa"/>
+        <a:font script="Syrn" typeface="Estrangelo Edessa"/>
+        <a:font script="Syrj" typeface="Estrangelo Edessa"/>
+        <a:font script="Syre" typeface="Estrangelo Edessa"/>
+        <a:font script="Sora" typeface="Nirmala UI"/>
+        <a:font script="Tale" typeface="Microsoft Tai Le"/>
+        <a:font script="Talu" typeface="Microsoft New Tai Lue"/>
+        <a:font script="Tfng" typeface="Ebrima"/>
+      </a:minorFont>
+    </a:fontScheme>
+    <a:fmtScheme name="Стандартная">
+      <a:fillStyleLst>
+        <a:solidFill>
+          <a:schemeClr val="phClr"/>
+        </a:solidFill>
+        <a:gradFill rotWithShape="1">
+          <a:gsLst>
+            <a:gs pos="0">
+              <a:schemeClr val="phClr">
+                <a:lumMod val="110000"/>
+                <a:satMod val="105000"/>
+                <a:tint val="67000"/>
+              </a:schemeClr>
+            </a:gs>
+            <a:gs pos="50000">
+              <a:schemeClr val="phClr">
+                <a:lumMod val="105000"/>
+                <a:satMod val="103000"/>
+                <a:tint val="73000"/>
+              </a:schemeClr>
+            </a:gs>
+            <a:gs pos="100000">
+              <a:schemeClr val="phClr">
+                <a:lumMod val="105000"/>
+                <a:satMod val="109000"/>
+                <a:tint val="81000"/>
+              </a:schemeClr>
+            </a:gs>
+          </a:gsLst>
+          <a:lin ang="5400000" scaled="0"/>
+        </a:gradFill>
+        <a:gradFill rotWithShape="1">
+          <a:gsLst>
+            <a:gs pos="0">
+              <a:schemeClr val="phClr">
+                <a:satMod val="103000"/>
+                <a:lumMod val="102000"/>
+                <a:tint val="94000"/>
+              </a:schemeClr>
+            </a:gs>
+            <a:gs pos="50000">
+              <a:schemeClr val="phClr">
+                <a:satMod val="110000"/>
+                <a:lumMod val="100000"/>
+                <a:shade val="100000"/>
+              </a:schemeClr>
+            </a:gs>
+            <a:gs pos="100000">
+              <a:schemeClr val="phClr">
+                <a:lumMod val="99000"/>
+                <a:satMod val="120000"/>
+                <a:shade val="78000"/>
+              </a:schemeClr>
+            </a:gs>
+          </a:gsLst>
+          <a:lin ang="5400000" scaled="0"/>
+        </a:gradFill>
+      </a:fillStyleLst>
+      <a:lnStyleLst>
+        <a:ln w="6350" cap="flat" cmpd="sng" algn="ctr">
+          <a:solidFill>
+            <a:schemeClr val="phClr"/>
+          </a:solidFill>
+          <a:prstDash val="solid"/>
+          <a:miter lim="800000"/>
+        </a:ln>
+        <a:ln w="12700" cap="flat" cmpd="sng" algn="ctr">
+          <a:solidFill>
+            <a:schemeClr val="phClr"/>
+          </a:solidFill>
+          <a:prstDash val="solid"/>
+          <a:miter lim="800000"/>
+        </a:ln>
+        <a:ln w="19050" cap="flat" cmpd="sng" algn="ctr">
+          <a:solidFill>
+            <a:schemeClr val="phClr"/>
+          </a:solidFill>
+          <a:prstDash val="solid"/>
+          <a:miter lim="800000"/>
+        </a:ln>
+      </a:lnStyleLst>
+      <a:effectStyleLst>
+        <a:effectStyle>
+          <a:effectLst/>
+        </a:effectStyle>
+        <a:effectStyle>
+          <a:effectLst/>
+        </a:effectStyle>
+        <a:effectStyle>
+          <a:effectLst>
+            <a:outerShdw blurRad="57150" dist="19050" dir="5400000" algn="ctr" rotWithShape="0">
+              <a:srgbClr val="000000">
+                <a:alpha val="63000"/>
+              </a:srgbClr>
+            </a:outerShdw>
+          </a:effectLst>
+        </a:effectStyle>
+      </a:effectStyleLst>
+      <a:bgFillStyleLst>
+        <a:solidFill>
+          <a:schemeClr val="phClr"/>
+        </a:solidFill>
+        <a:solidFill>
+          <a:schemeClr val="phClr">
+            <a:tint val="95000"/>
+            <a:satMod val="170000"/>
+          </a:schemeClr>
+        </a:solidFill>
+        <a:gradFill rotWithShape="1">
+          <a:gsLst>
+            <a:gs pos="0">
+              <a:schemeClr val="phClr">
+                <a:tint val="93000"/>
+                <a:satMod val="150000"/>
+                <a:shade val="98000"/>
+                <a:lumMod val="102000"/>
+              </a:schemeClr>
+            </a:gs>
+            <a:gs pos="50000">
+              <a:schemeClr val="phClr">
+                <a:tint val="98000"/>
+                <a:satMod val="130000"/>
+                <a:shade val="90000"/>
+                <a:lumMod val="103000"/>
+              </a:schemeClr>
+            </a:gs>
+            <a:gs pos="100000">
+              <a:schemeClr val="phClr">
+                <a:shade val="63000"/>
+                <a:satMod val="120000"/>
+              </a:schemeClr>
+            </a:gs>
+          </a:gsLst>
+          <a:lin ang="5400000" scaled="0"/>
+        </a:gradFill>
+      </a:bgFillStyleLst>
+    </a:fmtScheme>
+  </a:themeElements>
+  <a:objectDefaults/>
+  <a:extraClrSchemeLst/>
+  <a:extLst>
+    <a:ext uri="{05A4C25C-085E-4340-85A3-A5531E510DB2}">
+      <thm15:themeFamily xmlns:thm15="http://schemas.microsoft.com/office/thememl/2012/main" name="Office Theme" id="{62F939B6-93AF-4DB8-9C6B-D6C7DFDC589F}" vid="{4A3C46E8-61CC-4603-A589-7422A47A8E4A}"/>
+    </a:ext>
+  </a:extLst>
 </a:theme>
 </file>
--- a/Pixels.pptx
+++ b/Pixels.pptx
@@ -5,47 +5,64 @@
     <p:sldMasterId id="2147483648" r:id="rId1"/>
   </p:sldMasterIdLst>
   <p:notesMasterIdLst>
-    <p:notesMasterId r:id="rId13"/>
+    <p:notesMasterId r:id="rId14"/>
   </p:notesMasterIdLst>
   <p:sldIdLst>
     <p:sldId id="256" r:id="rId2"/>
     <p:sldId id="257" r:id="rId3"/>
     <p:sldId id="258" r:id="rId4"/>
     <p:sldId id="266" r:id="rId5"/>
-    <p:sldId id="259" r:id="rId6"/>
-    <p:sldId id="260" r:id="rId7"/>
-    <p:sldId id="261" r:id="rId8"/>
-    <p:sldId id="262" r:id="rId9"/>
-    <p:sldId id="263" r:id="rId10"/>
-    <p:sldId id="264" r:id="rId11"/>
-    <p:sldId id="265" r:id="rId12"/>
+    <p:sldId id="267" r:id="rId6"/>
+    <p:sldId id="259" r:id="rId7"/>
+    <p:sldId id="260" r:id="rId8"/>
+    <p:sldId id="261" r:id="rId9"/>
+    <p:sldId id="262" r:id="rId10"/>
+    <p:sldId id="263" r:id="rId11"/>
+    <p:sldId id="264" r:id="rId12"/>
+    <p:sldId id="265" r:id="rId13"/>
   </p:sldIdLst>
   <p:sldSz cx="14630400" cy="8229600"/>
   <p:notesSz cx="8229600" cy="14630400"/>
   <p:embeddedFontLst>
     <p:embeddedFont>
-      <p:font typeface="Consolas" panose="020B0609020204030204" pitchFamily="49" charset="0"/>
-      <p:regular r:id="rId14"/>
-      <p:bold r:id="rId15"/>
-      <p:italic r:id="rId16"/>
-      <p:boldItalic r:id="rId17"/>
+      <p:font typeface="Wingdings 3" panose="05040102010807070707" pitchFamily="18" charset="2"/>
+      <p:regular r:id="rId15"/>
     </p:embeddedFont>
     <p:embeddedFont>
-      <p:font typeface="IBM Plex Sans Light" panose="020B0403050203000203" pitchFamily="34" charset="0"/>
-      <p:regular r:id="rId18"/>
-      <p:italic r:id="rId19"/>
+      <p:font typeface="Bahnschrift" panose="020B0502040204020203" pitchFamily="34" charset="0"/>
+      <p:regular r:id="rId16"/>
+      <p:bold r:id="rId17"/>
     </p:embeddedFont>
     <p:embeddedFont>
-      <p:font typeface="IBM Plex Sans Medium" panose="020B0603050203000203" pitchFamily="34" charset="0"/>
-      <p:regular r:id="rId20"/>
-      <p:italic r:id="rId21"/>
+      <p:font typeface="Consolas" panose="020B0609020204030204" pitchFamily="49" charset="0"/>
+      <p:regular r:id="rId18"/>
+      <p:bold r:id="rId19"/>
+      <p:italic r:id="rId20"/>
+      <p:boldItalic r:id="rId21"/>
     </p:embeddedFont>
     <p:embeddedFont>
-      <p:font typeface="Roboto" panose="02000000000000000000" pitchFamily="2" charset="0"/>
+      <p:font typeface="Calibri" panose="020F0502020204030204" pitchFamily="34" charset="0"/>
       <p:regular r:id="rId22"/>
       <p:bold r:id="rId23"/>
       <p:italic r:id="rId24"/>
       <p:boldItalic r:id="rId25"/>
+    </p:embeddedFont>
+    <p:embeddedFont>
+      <p:font typeface="IBM Plex Sans Light" panose="020B0604020202020204" charset="0"/>
+      <p:regular r:id="rId26"/>
+      <p:italic r:id="rId27"/>
+    </p:embeddedFont>
+    <p:embeddedFont>
+      <p:font typeface="IBM Plex Sans Medium" panose="020B0604020202020204" charset="0"/>
+      <p:regular r:id="rId28"/>
+      <p:italic r:id="rId29"/>
+    </p:embeddedFont>
+    <p:embeddedFont>
+      <p:font typeface="Roboto" panose="020B0604020202020204" charset="0"/>
+      <p:regular r:id="rId30"/>
+      <p:bold r:id="rId31"/>
+      <p:italic r:id="rId32"/>
+      <p:boldItalic r:id="rId33"/>
     </p:embeddedFont>
   </p:embeddedFontLst>
   <p:defaultTextStyle>
@@ -260,7 +277,7 @@
             </a:pPr>
             <a:fld id="{5282F153-3F37-0F45-9E97-73ACFA13230C}" type="datetimeFigureOut">
               <a:rPr lang="en-US"/>
-              <a:t>1/31/2026</a:t>
+              <a:t>2/25/2026</a:t>
             </a:fld>
             <a:endParaRPr lang="en-US"/>
           </a:p>
@@ -449,6 +466,11 @@
         </p:txBody>
       </p:sp>
     </p:spTree>
+    <p:extLst>
+      <p:ext uri="{BB962C8B-B14F-4D97-AF65-F5344CB8AC3E}">
+        <p14:creationId xmlns:p14="http://schemas.microsoft.com/office/powerpoint/2010/main" val="3195802621"/>
+      </p:ext>
+    </p:extLst>
   </p:cSld>
   <p:clrMap bg1="lt1" tx1="dk1" bg2="lt2" tx2="dk2" accent1="accent1" accent2="accent2" accent3="accent3" accent4="accent4" accent5="accent5" accent6="accent6" hlink="hlink" folHlink="folHlink"/>
   <p:notesStyle>
@@ -624,6 +646,11 @@
         </p:txBody>
       </p:sp>
     </p:spTree>
+    <p:extLst>
+      <p:ext uri="{BB962C8B-B14F-4D97-AF65-F5344CB8AC3E}">
+        <p14:creationId xmlns:p14="http://schemas.microsoft.com/office/powerpoint/2010/main" val="782591537"/>
+      </p:ext>
+    </p:extLst>
   </p:cSld>
   <p:clrMapOvr>
     <a:masterClrMapping/>
@@ -650,7 +677,7 @@
       </p:grpSpPr>
       <p:sp>
         <p:nvSpPr>
-          <p:cNvPr id="137049927" name="Slide Image Placeholder 1"/>
+          <p:cNvPr id="1807158865" name="Slide Image Placeholder 1"/>
           <p:cNvSpPr>
             <a:spLocks noGrp="1" noRot="1" noChangeAspect="1"/>
           </p:cNvSpPr>
@@ -662,7 +689,7 @@
       </p:sp>
       <p:sp>
         <p:nvSpPr>
-          <p:cNvPr id="1411302840" name="Notes Placeholder 2"/>
+          <p:cNvPr id="1983644926" name="Notes Placeholder 2"/>
           <p:cNvSpPr>
             <a:spLocks noGrp="1"/>
           </p:cNvSpPr>
@@ -684,7 +711,7 @@
       </p:sp>
       <p:sp>
         <p:nvSpPr>
-          <p:cNvPr id="327399372" name="Slide Number Placeholder 3"/>
+          <p:cNvPr id="977044513" name="Slide Number Placeholder 3"/>
           <p:cNvSpPr>
             <a:spLocks noGrp="1"/>
           </p:cNvSpPr>
@@ -709,6 +736,11 @@
         </p:txBody>
       </p:sp>
     </p:spTree>
+    <p:extLst>
+      <p:ext uri="{BB962C8B-B14F-4D97-AF65-F5344CB8AC3E}">
+        <p14:creationId xmlns:p14="http://schemas.microsoft.com/office/powerpoint/2010/main" val="2554220141"/>
+      </p:ext>
+    </p:extLst>
   </p:cSld>
   <p:clrMapOvr>
     <a:masterClrMapping/>
@@ -735,6 +767,96 @@
       </p:grpSpPr>
       <p:sp>
         <p:nvSpPr>
+          <p:cNvPr id="137049927" name="Slide Image Placeholder 1"/>
+          <p:cNvSpPr>
+            <a:spLocks noGrp="1" noRot="1" noChangeAspect="1"/>
+          </p:cNvSpPr>
+          <p:nvPr>
+            <p:ph type="sldImg"/>
+          </p:nvPr>
+        </p:nvSpPr>
+        <p:spPr bwMode="auto"/>
+      </p:sp>
+      <p:sp>
+        <p:nvSpPr>
+          <p:cNvPr id="1411302840" name="Notes Placeholder 2"/>
+          <p:cNvSpPr>
+            <a:spLocks noGrp="1"/>
+          </p:cNvSpPr>
+          <p:nvPr>
+            <p:ph type="body" idx="1"/>
+          </p:nvPr>
+        </p:nvSpPr>
+        <p:spPr bwMode="auto"/>
+        <p:txBody>
+          <a:bodyPr/>
+          <a:lstStyle/>
+          <a:p>
+            <a:pPr>
+              <a:defRPr/>
+            </a:pPr>
+            <a:endParaRPr lang="en-US"/>
+          </a:p>
+        </p:txBody>
+      </p:sp>
+      <p:sp>
+        <p:nvSpPr>
+          <p:cNvPr id="327399372" name="Slide Number Placeholder 3"/>
+          <p:cNvSpPr>
+            <a:spLocks noGrp="1"/>
+          </p:cNvSpPr>
+          <p:nvPr>
+            <p:ph type="sldNum" sz="quarter" idx="10"/>
+          </p:nvPr>
+        </p:nvSpPr>
+        <p:spPr bwMode="auto"/>
+        <p:txBody>
+          <a:bodyPr/>
+          <a:lstStyle/>
+          <a:p>
+            <a:pPr>
+              <a:defRPr/>
+            </a:pPr>
+            <a:fld id="{F7021451-1387-4CA6-816F-3879F97B5CBC}" type="slidenum">
+              <a:rPr lang="en-US"/>
+              <a:t>11</a:t>
+            </a:fld>
+            <a:endParaRPr lang="en-US"/>
+          </a:p>
+        </p:txBody>
+      </p:sp>
+    </p:spTree>
+    <p:extLst>
+      <p:ext uri="{BB962C8B-B14F-4D97-AF65-F5344CB8AC3E}">
+        <p14:creationId xmlns:p14="http://schemas.microsoft.com/office/powerpoint/2010/main" val="3107117016"/>
+      </p:ext>
+    </p:extLst>
+  </p:cSld>
+  <p:clrMapOvr>
+    <a:masterClrMapping/>
+  </p:clrMapOvr>
+</p:notes>
+</file>
+
+<file path=ppt/notesSlides/notesSlide12.xml><?xml version="1.0" encoding="utf-8"?>
+<p:notes xmlns:a="http://schemas.openxmlformats.org/drawingml/2006/main" xmlns:r="http://schemas.openxmlformats.org/officeDocument/2006/relationships" xmlns:p="http://schemas.openxmlformats.org/presentationml/2006/main">
+  <p:cSld>
+    <p:spTree>
+      <p:nvGrpSpPr>
+        <p:cNvPr id="1" name=""/>
+        <p:cNvGrpSpPr/>
+        <p:nvPr/>
+      </p:nvGrpSpPr>
+      <p:grpSpPr bwMode="auto">
+        <a:xfrm>
+          <a:off x="0" y="0"/>
+          <a:ext cx="0" cy="0"/>
+          <a:chOff x="0" y="0"/>
+          <a:chExt cx="0" cy="0"/>
+        </a:xfrm>
+      </p:grpSpPr>
+      <p:sp>
+        <p:nvSpPr>
           <p:cNvPr id="761025171" name="Slide Image Placeholder 1"/>
           <p:cNvSpPr>
             <a:spLocks noGrp="1" noRot="1" noChangeAspect="1"/>
@@ -787,13 +909,18 @@
             </a:pPr>
             <a:fld id="{3E51F95B-00B0-9378-C025-ECCDB0EB8C91}" type="slidenum">
               <a:rPr lang="en-US"/>
-              <a:t>11</a:t>
+              <a:t>12</a:t>
             </a:fld>
             <a:endParaRPr lang="en-US"/>
           </a:p>
         </p:txBody>
       </p:sp>
     </p:spTree>
+    <p:extLst>
+      <p:ext uri="{BB962C8B-B14F-4D97-AF65-F5344CB8AC3E}">
+        <p14:creationId xmlns:p14="http://schemas.microsoft.com/office/powerpoint/2010/main" val="3745885085"/>
+      </p:ext>
+    </p:extLst>
   </p:cSld>
   <p:clrMapOvr>
     <a:masterClrMapping/>
@@ -879,6 +1006,11 @@
         </p:txBody>
       </p:sp>
     </p:spTree>
+    <p:extLst>
+      <p:ext uri="{BB962C8B-B14F-4D97-AF65-F5344CB8AC3E}">
+        <p14:creationId xmlns:p14="http://schemas.microsoft.com/office/powerpoint/2010/main" val="4208349467"/>
+      </p:ext>
+    </p:extLst>
   </p:cSld>
   <p:clrMapOvr>
     <a:masterClrMapping/>
@@ -964,6 +1096,11 @@
         </p:txBody>
       </p:sp>
     </p:spTree>
+    <p:extLst>
+      <p:ext uri="{BB962C8B-B14F-4D97-AF65-F5344CB8AC3E}">
+        <p14:creationId xmlns:p14="http://schemas.microsoft.com/office/powerpoint/2010/main" val="4026298390"/>
+      </p:ext>
+    </p:extLst>
   </p:cSld>
   <p:clrMapOvr>
     <a:masterClrMapping/>
@@ -979,7 +1116,7 @@
         <p:cNvPr id="1" name="">
           <a:extLst>
             <a:ext uri="{FF2B5EF4-FFF2-40B4-BE49-F238E27FC236}">
-              <a16:creationId xmlns:a16="http://schemas.microsoft.com/office/drawing/2014/main" id="{731C2CA7-5EF6-B722-B52C-CF507248DA71}"/>
+              <a16:creationId xmlns:a16="http://schemas.microsoft.com/office/drawing/2014/main" xmlns="" id="{731C2CA7-5EF6-B722-B52C-CF507248DA71}"/>
             </a:ext>
           </a:extLst>
         </p:cNvPr>
@@ -999,7 +1136,7 @@
           <p:cNvPr id="1528521434" name="Slide Image Placeholder 1">
             <a:extLst>
               <a:ext uri="{FF2B5EF4-FFF2-40B4-BE49-F238E27FC236}">
-                <a16:creationId xmlns:a16="http://schemas.microsoft.com/office/drawing/2014/main" id="{B5191E80-6DD9-41BA-AB28-706A44F1E64B}"/>
+                <a16:creationId xmlns:a16="http://schemas.microsoft.com/office/drawing/2014/main" xmlns="" id="{B5191E80-6DD9-41BA-AB28-706A44F1E64B}"/>
               </a:ext>
             </a:extLst>
           </p:cNvPr>
@@ -1017,7 +1154,7 @@
           <p:cNvPr id="190101599" name="Notes Placeholder 2">
             <a:extLst>
               <a:ext uri="{FF2B5EF4-FFF2-40B4-BE49-F238E27FC236}">
-                <a16:creationId xmlns:a16="http://schemas.microsoft.com/office/drawing/2014/main" id="{9564F542-3F7B-600C-F051-BD145768864E}"/>
+                <a16:creationId xmlns:a16="http://schemas.microsoft.com/office/drawing/2014/main" xmlns="" id="{9564F542-3F7B-600C-F051-BD145768864E}"/>
               </a:ext>
             </a:extLst>
           </p:cNvPr>
@@ -1045,7 +1182,7 @@
           <p:cNvPr id="557234395" name="Slide Number Placeholder 3">
             <a:extLst>
               <a:ext uri="{FF2B5EF4-FFF2-40B4-BE49-F238E27FC236}">
-                <a16:creationId xmlns:a16="http://schemas.microsoft.com/office/drawing/2014/main" id="{4C220B32-0D4C-BC8E-F38F-466BAB4C8F06}"/>
+                <a16:creationId xmlns:a16="http://schemas.microsoft.com/office/drawing/2014/main" xmlns="" id="{4C220B32-0D4C-BC8E-F38F-466BAB4C8F06}"/>
               </a:ext>
             </a:extLst>
           </p:cNvPr>
@@ -1090,7 +1227,13 @@
   <p:cSld>
     <p:spTree>
       <p:nvGrpSpPr>
-        <p:cNvPr id="1" name=""/>
+        <p:cNvPr id="1" name="">
+          <a:extLst>
+            <a:ext uri="{FF2B5EF4-FFF2-40B4-BE49-F238E27FC236}">
+              <a16:creationId xmlns:a16="http://schemas.microsoft.com/office/drawing/2014/main" xmlns="" id="{731C2CA7-5EF6-B722-B52C-CF507248DA71}"/>
+            </a:ext>
+          </a:extLst>
+        </p:cNvPr>
         <p:cNvGrpSpPr/>
         <p:nvPr/>
       </p:nvGrpSpPr>
@@ -1104,7 +1247,13 @@
       </p:grpSpPr>
       <p:sp>
         <p:nvSpPr>
-          <p:cNvPr id="1156869439" name="Slide Image Placeholder 1"/>
+          <p:cNvPr id="1528521434" name="Slide Image Placeholder 1">
+            <a:extLst>
+              <a:ext uri="{FF2B5EF4-FFF2-40B4-BE49-F238E27FC236}">
+                <a16:creationId xmlns:a16="http://schemas.microsoft.com/office/drawing/2014/main" xmlns="" id="{B5191E80-6DD9-41BA-AB28-706A44F1E64B}"/>
+              </a:ext>
+            </a:extLst>
+          </p:cNvPr>
           <p:cNvSpPr>
             <a:spLocks noGrp="1" noRot="1" noChangeAspect="1"/>
           </p:cNvSpPr>
@@ -1116,7 +1265,13 @@
       </p:sp>
       <p:sp>
         <p:nvSpPr>
-          <p:cNvPr id="869660160" name="Notes Placeholder 2"/>
+          <p:cNvPr id="190101599" name="Notes Placeholder 2">
+            <a:extLst>
+              <a:ext uri="{FF2B5EF4-FFF2-40B4-BE49-F238E27FC236}">
+                <a16:creationId xmlns:a16="http://schemas.microsoft.com/office/drawing/2014/main" xmlns="" id="{9564F542-3F7B-600C-F051-BD145768864E}"/>
+              </a:ext>
+            </a:extLst>
+          </p:cNvPr>
           <p:cNvSpPr>
             <a:spLocks noGrp="1"/>
           </p:cNvSpPr>
@@ -1138,7 +1293,13 @@
       </p:sp>
       <p:sp>
         <p:nvSpPr>
-          <p:cNvPr id="493002724" name="Slide Number Placeholder 3"/>
+          <p:cNvPr id="557234395" name="Slide Number Placeholder 3">
+            <a:extLst>
+              <a:ext uri="{FF2B5EF4-FFF2-40B4-BE49-F238E27FC236}">
+                <a16:creationId xmlns:a16="http://schemas.microsoft.com/office/drawing/2014/main" xmlns="" id="{4C220B32-0D4C-BC8E-F38F-466BAB4C8F06}"/>
+              </a:ext>
+            </a:extLst>
+          </p:cNvPr>
           <p:cNvSpPr>
             <a:spLocks noGrp="1"/>
           </p:cNvSpPr>
@@ -1163,6 +1324,11 @@
         </p:txBody>
       </p:sp>
     </p:spTree>
+    <p:extLst>
+      <p:ext uri="{BB962C8B-B14F-4D97-AF65-F5344CB8AC3E}">
+        <p14:creationId xmlns:p14="http://schemas.microsoft.com/office/powerpoint/2010/main" val="3426281794"/>
+      </p:ext>
+    </p:extLst>
   </p:cSld>
   <p:clrMapOvr>
     <a:masterClrMapping/>
@@ -1189,7 +1355,7 @@
       </p:grpSpPr>
       <p:sp>
         <p:nvSpPr>
-          <p:cNvPr id="1929073818" name="Slide Image Placeholder 1"/>
+          <p:cNvPr id="1156869439" name="Slide Image Placeholder 1"/>
           <p:cNvSpPr>
             <a:spLocks noGrp="1" noRot="1" noChangeAspect="1"/>
           </p:cNvSpPr>
@@ -1201,7 +1367,7 @@
       </p:sp>
       <p:sp>
         <p:nvSpPr>
-          <p:cNvPr id="990785344" name="Notes Placeholder 2"/>
+          <p:cNvPr id="869660160" name="Notes Placeholder 2"/>
           <p:cNvSpPr>
             <a:spLocks noGrp="1"/>
           </p:cNvSpPr>
@@ -1223,7 +1389,7 @@
       </p:sp>
       <p:sp>
         <p:nvSpPr>
-          <p:cNvPr id="1358138362" name="Slide Number Placeholder 3"/>
+          <p:cNvPr id="493002724" name="Slide Number Placeholder 3"/>
           <p:cNvSpPr>
             <a:spLocks noGrp="1"/>
           </p:cNvSpPr>
@@ -1248,6 +1414,11 @@
         </p:txBody>
       </p:sp>
     </p:spTree>
+    <p:extLst>
+      <p:ext uri="{BB962C8B-B14F-4D97-AF65-F5344CB8AC3E}">
+        <p14:creationId xmlns:p14="http://schemas.microsoft.com/office/powerpoint/2010/main" val="1040138734"/>
+      </p:ext>
+    </p:extLst>
   </p:cSld>
   <p:clrMapOvr>
     <a:masterClrMapping/>
@@ -1274,7 +1445,7 @@
       </p:grpSpPr>
       <p:sp>
         <p:nvSpPr>
-          <p:cNvPr id="439771538" name="Slide Image Placeholder 1"/>
+          <p:cNvPr id="1929073818" name="Slide Image Placeholder 1"/>
           <p:cNvSpPr>
             <a:spLocks noGrp="1" noRot="1" noChangeAspect="1"/>
           </p:cNvSpPr>
@@ -1286,7 +1457,7 @@
       </p:sp>
       <p:sp>
         <p:nvSpPr>
-          <p:cNvPr id="1489482034" name="Notes Placeholder 2"/>
+          <p:cNvPr id="990785344" name="Notes Placeholder 2"/>
           <p:cNvSpPr>
             <a:spLocks noGrp="1"/>
           </p:cNvSpPr>
@@ -1308,7 +1479,7 @@
       </p:sp>
       <p:sp>
         <p:nvSpPr>
-          <p:cNvPr id="1339991857" name="Slide Number Placeholder 3"/>
+          <p:cNvPr id="1358138362" name="Slide Number Placeholder 3"/>
           <p:cNvSpPr>
             <a:spLocks noGrp="1"/>
           </p:cNvSpPr>
@@ -1333,6 +1504,11 @@
         </p:txBody>
       </p:sp>
     </p:spTree>
+    <p:extLst>
+      <p:ext uri="{BB962C8B-B14F-4D97-AF65-F5344CB8AC3E}">
+        <p14:creationId xmlns:p14="http://schemas.microsoft.com/office/powerpoint/2010/main" val="3937007248"/>
+      </p:ext>
+    </p:extLst>
   </p:cSld>
   <p:clrMapOvr>
     <a:masterClrMapping/>
@@ -1359,7 +1535,7 @@
       </p:grpSpPr>
       <p:sp>
         <p:nvSpPr>
-          <p:cNvPr id="1867022375" name="Slide Image Placeholder 1"/>
+          <p:cNvPr id="439771538" name="Slide Image Placeholder 1"/>
           <p:cNvSpPr>
             <a:spLocks noGrp="1" noRot="1" noChangeAspect="1"/>
           </p:cNvSpPr>
@@ -1371,7 +1547,7 @@
       </p:sp>
       <p:sp>
         <p:nvSpPr>
-          <p:cNvPr id="1392575262" name="Notes Placeholder 2"/>
+          <p:cNvPr id="1489482034" name="Notes Placeholder 2"/>
           <p:cNvSpPr>
             <a:spLocks noGrp="1"/>
           </p:cNvSpPr>
@@ -1393,7 +1569,7 @@
       </p:sp>
       <p:sp>
         <p:nvSpPr>
-          <p:cNvPr id="1360790406" name="Slide Number Placeholder 3"/>
+          <p:cNvPr id="1339991857" name="Slide Number Placeholder 3"/>
           <p:cNvSpPr>
             <a:spLocks noGrp="1"/>
           </p:cNvSpPr>
@@ -1418,6 +1594,11 @@
         </p:txBody>
       </p:sp>
     </p:spTree>
+    <p:extLst>
+      <p:ext uri="{BB962C8B-B14F-4D97-AF65-F5344CB8AC3E}">
+        <p14:creationId xmlns:p14="http://schemas.microsoft.com/office/powerpoint/2010/main" val="3319513385"/>
+      </p:ext>
+    </p:extLst>
   </p:cSld>
   <p:clrMapOvr>
     <a:masterClrMapping/>
@@ -1444,7 +1625,7 @@
       </p:grpSpPr>
       <p:sp>
         <p:nvSpPr>
-          <p:cNvPr id="1807158865" name="Slide Image Placeholder 1"/>
+          <p:cNvPr id="1867022375" name="Slide Image Placeholder 1"/>
           <p:cNvSpPr>
             <a:spLocks noGrp="1" noRot="1" noChangeAspect="1"/>
           </p:cNvSpPr>
@@ -1456,7 +1637,7 @@
       </p:sp>
       <p:sp>
         <p:nvSpPr>
-          <p:cNvPr id="1983644926" name="Notes Placeholder 2"/>
+          <p:cNvPr id="1392575262" name="Notes Placeholder 2"/>
           <p:cNvSpPr>
             <a:spLocks noGrp="1"/>
           </p:cNvSpPr>
@@ -1478,7 +1659,7 @@
       </p:sp>
       <p:sp>
         <p:nvSpPr>
-          <p:cNvPr id="977044513" name="Slide Number Placeholder 3"/>
+          <p:cNvPr id="1360790406" name="Slide Number Placeholder 3"/>
           <p:cNvSpPr>
             <a:spLocks noGrp="1"/>
           </p:cNvSpPr>
@@ -1503,6 +1684,11 @@
         </p:txBody>
       </p:sp>
     </p:spTree>
+    <p:extLst>
+      <p:ext uri="{BB962C8B-B14F-4D97-AF65-F5344CB8AC3E}">
+        <p14:creationId xmlns:p14="http://schemas.microsoft.com/office/powerpoint/2010/main" val="3109063580"/>
+      </p:ext>
+    </p:extLst>
   </p:cSld>
   <p:clrMapOvr>
     <a:masterClrMapping/>
@@ -2721,7 +2907,7 @@
               <a:defRPr/>
             </a:pPr>
             <a:r>
-              <a:rPr lang="en-US" sz="2200">
+              <a:rPr lang="en-US" sz="2200" dirty="0" err="1">
                 <a:solidFill>
                   <a:srgbClr val="F3F3F2"/>
                 </a:solidFill>
@@ -2729,9 +2915,75 @@
                 <a:ea typeface="IBM Plex Sans Medium"/>
                 <a:cs typeface="IBM Plex Sans Medium"/>
               </a:rPr>
-              <a:t>Генератор CSS-арта для веб-разработчиков</a:t>
-            </a:r>
-            <a:endParaRPr lang="en-US" sz="2200"/>
+              <a:t>Генератор</a:t>
+            </a:r>
+            <a:r>
+              <a:rPr lang="en-US" sz="2200" dirty="0">
+                <a:solidFill>
+                  <a:srgbClr val="F3F3F2"/>
+                </a:solidFill>
+                <a:latin typeface="IBM Plex Sans Medium"/>
+                <a:ea typeface="IBM Plex Sans Medium"/>
+                <a:cs typeface="IBM Plex Sans Medium"/>
+              </a:rPr>
+              <a:t> CSS-</a:t>
+            </a:r>
+            <a:r>
+              <a:rPr lang="en-US" sz="2200" dirty="0" err="1">
+                <a:solidFill>
+                  <a:srgbClr val="F3F3F2"/>
+                </a:solidFill>
+                <a:latin typeface="IBM Plex Sans Medium"/>
+                <a:ea typeface="IBM Plex Sans Medium"/>
+                <a:cs typeface="IBM Plex Sans Medium"/>
+              </a:rPr>
+              <a:t>арта</a:t>
+            </a:r>
+            <a:r>
+              <a:rPr lang="en-US" sz="2200" dirty="0">
+                <a:solidFill>
+                  <a:srgbClr val="F3F3F2"/>
+                </a:solidFill>
+                <a:latin typeface="IBM Plex Sans Medium"/>
+                <a:ea typeface="IBM Plex Sans Medium"/>
+                <a:cs typeface="IBM Plex Sans Medium"/>
+              </a:rPr>
+              <a:t> </a:t>
+            </a:r>
+            <a:r>
+              <a:rPr lang="en-US" sz="2200" dirty="0" err="1">
+                <a:solidFill>
+                  <a:srgbClr val="F3F3F2"/>
+                </a:solidFill>
+                <a:latin typeface="IBM Plex Sans Medium"/>
+                <a:ea typeface="IBM Plex Sans Medium"/>
+                <a:cs typeface="IBM Plex Sans Medium"/>
+              </a:rPr>
+              <a:t>для</a:t>
+            </a:r>
+            <a:r>
+              <a:rPr lang="en-US" sz="2200" dirty="0">
+                <a:solidFill>
+                  <a:srgbClr val="F3F3F2"/>
+                </a:solidFill>
+                <a:latin typeface="IBM Plex Sans Medium"/>
+                <a:ea typeface="IBM Plex Sans Medium"/>
+                <a:cs typeface="IBM Plex Sans Medium"/>
+              </a:rPr>
+              <a:t> </a:t>
+            </a:r>
+            <a:r>
+              <a:rPr lang="en-US" sz="2200" dirty="0" err="1">
+                <a:solidFill>
+                  <a:srgbClr val="F3F3F2"/>
+                </a:solidFill>
+                <a:latin typeface="IBM Plex Sans Medium"/>
+                <a:ea typeface="IBM Plex Sans Medium"/>
+                <a:cs typeface="IBM Plex Sans Medium"/>
+              </a:rPr>
+              <a:t>веб-разработчиков</a:t>
+            </a:r>
+            <a:endParaRPr lang="en-US" sz="2200" dirty="0"/>
           </a:p>
         </p:txBody>
       </p:sp>
@@ -2764,7 +3016,7 @@
               <a:defRPr/>
             </a:pPr>
             <a:r>
-              <a:rPr lang="en-US" sz="1750">
+              <a:rPr lang="en-US" sz="1750" dirty="0" err="1">
                 <a:solidFill>
                   <a:srgbClr val="D4D4D1"/>
                 </a:solidFill>
@@ -2772,9 +3024,207 @@
                 <a:ea typeface="Roboto"/>
                 <a:cs typeface="Roboto"/>
               </a:rPr>
-              <a:t>Легкий инструмент для создания пиксельной графики на чистом JavaScript с векторной точностью</a:t>
-            </a:r>
-            <a:endParaRPr lang="en-US" sz="1750"/>
+              <a:t>Легкий</a:t>
+            </a:r>
+            <a:r>
+              <a:rPr lang="en-US" sz="1750" dirty="0">
+                <a:solidFill>
+                  <a:srgbClr val="D4D4D1"/>
+                </a:solidFill>
+                <a:latin typeface="Roboto"/>
+                <a:ea typeface="Roboto"/>
+                <a:cs typeface="Roboto"/>
+              </a:rPr>
+              <a:t> </a:t>
+            </a:r>
+            <a:r>
+              <a:rPr lang="en-US" sz="1750" dirty="0" err="1">
+                <a:solidFill>
+                  <a:srgbClr val="D4D4D1"/>
+                </a:solidFill>
+                <a:latin typeface="Roboto"/>
+                <a:ea typeface="Roboto"/>
+                <a:cs typeface="Roboto"/>
+              </a:rPr>
+              <a:t>инструмент</a:t>
+            </a:r>
+            <a:r>
+              <a:rPr lang="en-US" sz="1750" dirty="0">
+                <a:solidFill>
+                  <a:srgbClr val="D4D4D1"/>
+                </a:solidFill>
+                <a:latin typeface="Roboto"/>
+                <a:ea typeface="Roboto"/>
+                <a:cs typeface="Roboto"/>
+              </a:rPr>
+              <a:t> </a:t>
+            </a:r>
+            <a:r>
+              <a:rPr lang="en-US" sz="1750" dirty="0" err="1">
+                <a:solidFill>
+                  <a:srgbClr val="D4D4D1"/>
+                </a:solidFill>
+                <a:latin typeface="Roboto"/>
+                <a:ea typeface="Roboto"/>
+                <a:cs typeface="Roboto"/>
+              </a:rPr>
+              <a:t>для</a:t>
+            </a:r>
+            <a:r>
+              <a:rPr lang="en-US" sz="1750" dirty="0">
+                <a:solidFill>
+                  <a:srgbClr val="D4D4D1"/>
+                </a:solidFill>
+                <a:latin typeface="Roboto"/>
+                <a:ea typeface="Roboto"/>
+                <a:cs typeface="Roboto"/>
+              </a:rPr>
+              <a:t> </a:t>
+            </a:r>
+            <a:r>
+              <a:rPr lang="en-US" sz="1750" dirty="0" err="1">
+                <a:solidFill>
+                  <a:srgbClr val="D4D4D1"/>
+                </a:solidFill>
+                <a:latin typeface="Roboto"/>
+                <a:ea typeface="Roboto"/>
+                <a:cs typeface="Roboto"/>
+              </a:rPr>
+              <a:t>создания</a:t>
+            </a:r>
+            <a:r>
+              <a:rPr lang="en-US" sz="1750" dirty="0">
+                <a:solidFill>
+                  <a:srgbClr val="D4D4D1"/>
+                </a:solidFill>
+                <a:latin typeface="Roboto"/>
+                <a:ea typeface="Roboto"/>
+                <a:cs typeface="Roboto"/>
+              </a:rPr>
+              <a:t> </a:t>
+            </a:r>
+            <a:r>
+              <a:rPr lang="en-US" sz="1750" dirty="0" err="1">
+                <a:solidFill>
+                  <a:srgbClr val="D4D4D1"/>
+                </a:solidFill>
+                <a:latin typeface="Roboto"/>
+                <a:ea typeface="Roboto"/>
+                <a:cs typeface="Roboto"/>
+              </a:rPr>
+              <a:t>пиксельной</a:t>
+            </a:r>
+            <a:r>
+              <a:rPr lang="en-US" sz="1750" dirty="0">
+                <a:solidFill>
+                  <a:srgbClr val="D4D4D1"/>
+                </a:solidFill>
+                <a:latin typeface="Roboto"/>
+                <a:ea typeface="Roboto"/>
+                <a:cs typeface="Roboto"/>
+              </a:rPr>
+              <a:t> </a:t>
+            </a:r>
+            <a:r>
+              <a:rPr lang="en-US" sz="1750" dirty="0" err="1">
+                <a:solidFill>
+                  <a:srgbClr val="D4D4D1"/>
+                </a:solidFill>
+                <a:latin typeface="Roboto"/>
+                <a:ea typeface="Roboto"/>
+                <a:cs typeface="Roboto"/>
+              </a:rPr>
+              <a:t>графики</a:t>
+            </a:r>
+            <a:r>
+              <a:rPr lang="en-US" sz="1750" dirty="0">
+                <a:solidFill>
+                  <a:srgbClr val="D4D4D1"/>
+                </a:solidFill>
+                <a:latin typeface="Roboto"/>
+                <a:ea typeface="Roboto"/>
+                <a:cs typeface="Roboto"/>
+              </a:rPr>
+              <a:t> </a:t>
+            </a:r>
+            <a:r>
+              <a:rPr lang="en-US" sz="1750" dirty="0" err="1">
+                <a:solidFill>
+                  <a:srgbClr val="D4D4D1"/>
+                </a:solidFill>
+                <a:latin typeface="Roboto"/>
+                <a:ea typeface="Roboto"/>
+                <a:cs typeface="Roboto"/>
+              </a:rPr>
+              <a:t>на</a:t>
+            </a:r>
+            <a:r>
+              <a:rPr lang="en-US" sz="1750" dirty="0">
+                <a:solidFill>
+                  <a:srgbClr val="D4D4D1"/>
+                </a:solidFill>
+                <a:latin typeface="Roboto"/>
+                <a:ea typeface="Roboto"/>
+                <a:cs typeface="Roboto"/>
+              </a:rPr>
+              <a:t> </a:t>
+            </a:r>
+            <a:r>
+              <a:rPr lang="en-US" sz="1750" dirty="0" err="1">
+                <a:solidFill>
+                  <a:srgbClr val="D4D4D1"/>
+                </a:solidFill>
+                <a:latin typeface="Roboto"/>
+                <a:ea typeface="Roboto"/>
+                <a:cs typeface="Roboto"/>
+              </a:rPr>
+              <a:t>чистом</a:t>
+            </a:r>
+            <a:r>
+              <a:rPr lang="en-US" sz="1750" dirty="0">
+                <a:solidFill>
+                  <a:srgbClr val="D4D4D1"/>
+                </a:solidFill>
+                <a:latin typeface="Roboto"/>
+                <a:ea typeface="Roboto"/>
+                <a:cs typeface="Roboto"/>
+              </a:rPr>
+              <a:t> JavaScript с </a:t>
+            </a:r>
+            <a:r>
+              <a:rPr lang="en-US" sz="1750" dirty="0" err="1">
+                <a:solidFill>
+                  <a:srgbClr val="D4D4D1"/>
+                </a:solidFill>
+                <a:latin typeface="Roboto"/>
+                <a:ea typeface="Roboto"/>
+                <a:cs typeface="Roboto"/>
+              </a:rPr>
+              <a:t>векторной</a:t>
+            </a:r>
+            <a:r>
+              <a:rPr lang="en-US" sz="1750" dirty="0">
+                <a:solidFill>
+                  <a:srgbClr val="D4D4D1"/>
+                </a:solidFill>
+                <a:latin typeface="Roboto"/>
+                <a:ea typeface="Roboto"/>
+                <a:cs typeface="Roboto"/>
+              </a:rPr>
+              <a:t> </a:t>
+            </a:r>
+            <a:r>
+              <a:rPr lang="en-US" sz="1750" dirty="0" err="1">
+                <a:solidFill>
+                  <a:srgbClr val="D4D4D1"/>
+                </a:solidFill>
+                <a:latin typeface="Roboto"/>
+                <a:ea typeface="Roboto"/>
+                <a:cs typeface="Roboto"/>
+              </a:rPr>
+              <a:t>точностью</a:t>
+            </a:r>
+            <a:endParaRPr lang="en-US" sz="1750" dirty="0"/>
           </a:p>
         </p:txBody>
       </p:sp>
@@ -2800,6 +3250,278 @@
           </a:prstGeom>
         </p:spPr>
       </p:pic>
+      <p:sp>
+        <p:nvSpPr>
+          <p:cNvPr id="6" name="Подзаголовок 2"/>
+          <p:cNvSpPr txBox="1">
+            <a:spLocks/>
+          </p:cNvSpPr>
+          <p:nvPr/>
+        </p:nvSpPr>
+        <p:spPr>
+          <a:xfrm>
+            <a:off x="793790" y="6455065"/>
+            <a:ext cx="7766936" cy="1096899"/>
+          </a:xfrm>
+          <a:prstGeom prst="rect">
+            <a:avLst/>
+          </a:prstGeom>
+        </p:spPr>
+        <p:txBody>
+          <a:bodyPr vert="horz" lIns="91440" tIns="45720" rIns="91440" bIns="45720" rtlCol="0" anchor="t">
+            <a:normAutofit/>
+          </a:bodyPr>
+          <a:lstStyle>
+            <a:lvl1pPr marL="0" indent="0" algn="r" defTabSz="457200" rtl="0" eaLnBrk="1" latinLnBrk="0" hangingPunct="1">
+              <a:spcBef>
+                <a:spcPts val="1000"/>
+              </a:spcBef>
+              <a:spcAft>
+                <a:spcPts val="0"/>
+              </a:spcAft>
+              <a:buClr>
+                <a:schemeClr val="accent1"/>
+              </a:buClr>
+              <a:buSzPct val="80000"/>
+              <a:buFont typeface="Wingdings 3" charset="2"/>
+              <a:buNone/>
+              <a:defRPr sz="1800" kern="1200">
+                <a:solidFill>
+                  <a:schemeClr val="tx1">
+                    <a:lumMod val="50000"/>
+                    <a:lumOff val="50000"/>
+                  </a:schemeClr>
+                </a:solidFill>
+                <a:latin typeface="+mn-lt"/>
+                <a:ea typeface="+mn-ea"/>
+                <a:cs typeface="+mn-cs"/>
+              </a:defRPr>
+            </a:lvl1pPr>
+            <a:lvl2pPr marL="457200" indent="0" algn="ctr" defTabSz="457200" rtl="0" eaLnBrk="1" latinLnBrk="0" hangingPunct="1">
+              <a:spcBef>
+                <a:spcPts val="1000"/>
+              </a:spcBef>
+              <a:spcAft>
+                <a:spcPts val="0"/>
+              </a:spcAft>
+              <a:buClr>
+                <a:schemeClr val="accent1"/>
+              </a:buClr>
+              <a:buSzPct val="80000"/>
+              <a:buFont typeface="Wingdings 3" charset="2"/>
+              <a:buNone/>
+              <a:defRPr sz="1600" kern="1200">
+                <a:solidFill>
+                  <a:schemeClr val="tx1">
+                    <a:tint val="75000"/>
+                  </a:schemeClr>
+                </a:solidFill>
+                <a:latin typeface="+mn-lt"/>
+                <a:ea typeface="+mn-ea"/>
+                <a:cs typeface="+mn-cs"/>
+              </a:defRPr>
+            </a:lvl2pPr>
+            <a:lvl3pPr marL="914400" indent="0" algn="ctr" defTabSz="457200" rtl="0" eaLnBrk="1" latinLnBrk="0" hangingPunct="1">
+              <a:spcBef>
+                <a:spcPts val="1000"/>
+              </a:spcBef>
+              <a:spcAft>
+                <a:spcPts val="0"/>
+              </a:spcAft>
+              <a:buClr>
+                <a:schemeClr val="accent1"/>
+              </a:buClr>
+              <a:buSzPct val="80000"/>
+              <a:buFont typeface="Wingdings 3" charset="2"/>
+              <a:buNone/>
+              <a:defRPr sz="1400" kern="1200">
+                <a:solidFill>
+                  <a:schemeClr val="tx1">
+                    <a:tint val="75000"/>
+                  </a:schemeClr>
+                </a:solidFill>
+                <a:latin typeface="+mn-lt"/>
+                <a:ea typeface="+mn-ea"/>
+                <a:cs typeface="+mn-cs"/>
+              </a:defRPr>
+            </a:lvl3pPr>
+            <a:lvl4pPr marL="1371600" indent="0" algn="ctr" defTabSz="457200" rtl="0" eaLnBrk="1" latinLnBrk="0" hangingPunct="1">
+              <a:spcBef>
+                <a:spcPts val="1000"/>
+              </a:spcBef>
+              <a:spcAft>
+                <a:spcPts val="0"/>
+              </a:spcAft>
+              <a:buClr>
+                <a:schemeClr val="accent1"/>
+              </a:buClr>
+              <a:buSzPct val="80000"/>
+              <a:buFont typeface="Wingdings 3" charset="2"/>
+              <a:buNone/>
+              <a:defRPr sz="1200" kern="1200">
+                <a:solidFill>
+                  <a:schemeClr val="tx1">
+                    <a:tint val="75000"/>
+                  </a:schemeClr>
+                </a:solidFill>
+                <a:latin typeface="+mn-lt"/>
+                <a:ea typeface="+mn-ea"/>
+                <a:cs typeface="+mn-cs"/>
+              </a:defRPr>
+            </a:lvl4pPr>
+            <a:lvl5pPr marL="1828800" indent="0" algn="ctr" defTabSz="457200" rtl="0" eaLnBrk="1" latinLnBrk="0" hangingPunct="1">
+              <a:spcBef>
+                <a:spcPts val="1000"/>
+              </a:spcBef>
+              <a:spcAft>
+                <a:spcPts val="0"/>
+              </a:spcAft>
+              <a:buClr>
+                <a:schemeClr val="accent1"/>
+              </a:buClr>
+              <a:buSzPct val="80000"/>
+              <a:buFont typeface="Wingdings 3" charset="2"/>
+              <a:buNone/>
+              <a:defRPr sz="1200" kern="1200">
+                <a:solidFill>
+                  <a:schemeClr val="tx1">
+                    <a:tint val="75000"/>
+                  </a:schemeClr>
+                </a:solidFill>
+                <a:latin typeface="+mn-lt"/>
+                <a:ea typeface="+mn-ea"/>
+                <a:cs typeface="+mn-cs"/>
+              </a:defRPr>
+            </a:lvl5pPr>
+            <a:lvl6pPr marL="2286000" indent="0" algn="ctr" defTabSz="457200" rtl="0" eaLnBrk="1" latinLnBrk="0" hangingPunct="1">
+              <a:spcBef>
+                <a:spcPts val="1000"/>
+              </a:spcBef>
+              <a:spcAft>
+                <a:spcPts val="0"/>
+              </a:spcAft>
+              <a:buClr>
+                <a:schemeClr val="accent1"/>
+              </a:buClr>
+              <a:buSzPct val="80000"/>
+              <a:buFont typeface="Wingdings 3" charset="2"/>
+              <a:buNone/>
+              <a:defRPr sz="1200" kern="1200">
+                <a:solidFill>
+                  <a:schemeClr val="tx1">
+                    <a:tint val="75000"/>
+                  </a:schemeClr>
+                </a:solidFill>
+                <a:latin typeface="+mn-lt"/>
+                <a:ea typeface="+mn-ea"/>
+                <a:cs typeface="+mn-cs"/>
+              </a:defRPr>
+            </a:lvl6pPr>
+            <a:lvl7pPr marL="2743200" indent="0" algn="ctr" defTabSz="457200" rtl="0" eaLnBrk="1" latinLnBrk="0" hangingPunct="1">
+              <a:spcBef>
+                <a:spcPts val="1000"/>
+              </a:spcBef>
+              <a:spcAft>
+                <a:spcPts val="0"/>
+              </a:spcAft>
+              <a:buClr>
+                <a:schemeClr val="accent1"/>
+              </a:buClr>
+              <a:buSzPct val="80000"/>
+              <a:buFont typeface="Wingdings 3" charset="2"/>
+              <a:buNone/>
+              <a:defRPr sz="1200" kern="1200">
+                <a:solidFill>
+                  <a:schemeClr val="tx1">
+                    <a:tint val="75000"/>
+                  </a:schemeClr>
+                </a:solidFill>
+                <a:latin typeface="+mn-lt"/>
+                <a:ea typeface="+mn-ea"/>
+                <a:cs typeface="+mn-cs"/>
+              </a:defRPr>
+            </a:lvl7pPr>
+            <a:lvl8pPr marL="3200400" indent="0" algn="ctr" defTabSz="457200" rtl="0" eaLnBrk="1" latinLnBrk="0" hangingPunct="1">
+              <a:spcBef>
+                <a:spcPts val="1000"/>
+              </a:spcBef>
+              <a:spcAft>
+                <a:spcPts val="0"/>
+              </a:spcAft>
+              <a:buClr>
+                <a:schemeClr val="accent1"/>
+              </a:buClr>
+              <a:buSzPct val="80000"/>
+              <a:buFont typeface="Wingdings 3" charset="2"/>
+              <a:buNone/>
+              <a:defRPr sz="1200" kern="1200">
+                <a:solidFill>
+                  <a:schemeClr val="tx1">
+                    <a:tint val="75000"/>
+                  </a:schemeClr>
+                </a:solidFill>
+                <a:latin typeface="+mn-lt"/>
+                <a:ea typeface="+mn-ea"/>
+                <a:cs typeface="+mn-cs"/>
+              </a:defRPr>
+            </a:lvl8pPr>
+            <a:lvl9pPr marL="3657600" indent="0" algn="ctr" defTabSz="457200" rtl="0" eaLnBrk="1" latinLnBrk="0" hangingPunct="1">
+              <a:spcBef>
+                <a:spcPts val="1000"/>
+              </a:spcBef>
+              <a:spcAft>
+                <a:spcPts val="0"/>
+              </a:spcAft>
+              <a:buClr>
+                <a:schemeClr val="accent1"/>
+              </a:buClr>
+              <a:buSzPct val="80000"/>
+              <a:buFont typeface="Wingdings 3" charset="2"/>
+              <a:buNone/>
+              <a:defRPr sz="1200" kern="1200">
+                <a:solidFill>
+                  <a:schemeClr val="tx1">
+                    <a:tint val="75000"/>
+                  </a:schemeClr>
+                </a:solidFill>
+                <a:latin typeface="+mn-lt"/>
+                <a:ea typeface="+mn-ea"/>
+                <a:cs typeface="+mn-cs"/>
+              </a:defRPr>
+            </a:lvl9pPr>
+          </a:lstStyle>
+          <a:p>
+            <a:pPr algn="l"/>
+            <a:r>
+              <a:rPr lang="ru-RU" dirty="0" smtClean="0">
+                <a:solidFill>
+                  <a:schemeClr val="bg1"/>
+                </a:solidFill>
+                <a:latin typeface="Bahnschrift" panose="020B0502040204020203" pitchFamily="34" charset="0"/>
+              </a:rPr>
+              <a:t>Автор: Сарычев Семён</a:t>
+            </a:r>
+          </a:p>
+          <a:p>
+            <a:pPr algn="l"/>
+            <a:r>
+              <a:rPr lang="ru-RU" dirty="0" smtClean="0">
+                <a:solidFill>
+                  <a:schemeClr val="bg1"/>
+                </a:solidFill>
+                <a:latin typeface="Bahnschrift" panose="020B0502040204020203" pitchFamily="34" charset="0"/>
+              </a:rPr>
+              <a:t>Тольяттинский филиал ГБОУ ДО СО СОЦДЮТТ</a:t>
+            </a:r>
+            <a:endParaRPr lang="ru-RU" dirty="0">
+              <a:solidFill>
+                <a:schemeClr val="bg1"/>
+              </a:solidFill>
+              <a:latin typeface="Bahnschrift" panose="020B0502040204020203" pitchFamily="34" charset="0"/>
+            </a:endParaRPr>
+          </a:p>
+        </p:txBody>
+      </p:sp>
     </p:spTree>
   </p:cSld>
   <p:clrMapOvr>
@@ -2810,7 +3532,7 @@
 
 <file path=ppt/slides/slide10.xml><?xml version="1.0" encoding="utf-8"?>
 <p:sld xmlns:a="http://schemas.openxmlformats.org/drawingml/2006/main" xmlns:r="http://schemas.openxmlformats.org/officeDocument/2006/relationships" xmlns:p="http://schemas.openxmlformats.org/presentationml/2006/main" showMasterPhAnim="0">
-  <p:cSld name="Slide 9">
+  <p:cSld name="Slide 8">
     <p:spTree>
       <p:nvGrpSpPr>
         <p:cNvPr id="1" name=""/>
@@ -2827,14 +3549,82 @@
       </p:grpSpPr>
       <p:sp>
         <p:nvSpPr>
-          <p:cNvPr id="2130163748" name="Text 0"/>
-          <p:cNvSpPr/>
-          <p:nvPr/>
-        </p:nvSpPr>
-        <p:spPr bwMode="auto">
-          <a:xfrm>
-            <a:off x="793790" y="1692831"/>
-            <a:ext cx="8461058" cy="708779"/>
+          <p:cNvPr id="2115312480" name="Shape 0"/>
+          <p:cNvSpPr/>
+          <p:nvPr/>
+        </p:nvSpPr>
+        <p:spPr bwMode="auto">
+          <a:xfrm>
+            <a:off x="793790" y="1445895"/>
+            <a:ext cx="1152049" cy="441484"/>
+          </a:xfrm>
+          <a:prstGeom prst="roundRect">
+            <a:avLst>
+              <a:gd name="adj" fmla="val 6165"/>
+            </a:avLst>
+          </a:prstGeom>
+          <a:noFill/>
+          <a:ln w="7620">
+            <a:solidFill>
+              <a:srgbClr val="FFBC8F"/>
+            </a:solidFill>
+            <a:prstDash val="solid"/>
+          </a:ln>
+        </p:spPr>
+      </p:sp>
+      <p:sp>
+        <p:nvSpPr>
+          <p:cNvPr id="1255541461" name="Text 1"/>
+          <p:cNvSpPr/>
+          <p:nvPr/>
+        </p:nvSpPr>
+        <p:spPr bwMode="auto">
+          <a:xfrm>
+            <a:off x="937498" y="1521500"/>
+            <a:ext cx="864632" cy="290274"/>
+          </a:xfrm>
+          <a:prstGeom prst="rect">
+            <a:avLst/>
+          </a:prstGeom>
+          <a:noFill/>
+          <a:ln/>
+        </p:spPr>
+        <p:txBody>
+          <a:bodyPr wrap="none" lIns="0" tIns="0" rIns="0" bIns="0" rtlCol="0" anchor="t"/>
+          <a:lstStyle/>
+          <a:p>
+            <a:pPr marL="0" indent="0" algn="l">
+              <a:lnSpc>
+                <a:spcPts val="2250"/>
+              </a:lnSpc>
+              <a:buNone/>
+              <a:defRPr/>
+            </a:pPr>
+            <a:r>
+              <a:rPr lang="en-US" sz="1400">
+                <a:solidFill>
+                  <a:srgbClr val="FFBC8F"/>
+                </a:solidFill>
+                <a:latin typeface="Roboto"/>
+                <a:ea typeface="Roboto"/>
+                <a:cs typeface="Roboto"/>
+              </a:rPr>
+              <a:t>ROADMAP</a:t>
+            </a:r>
+            <a:endParaRPr lang="en-US" sz="1400"/>
+          </a:p>
+        </p:txBody>
+      </p:sp>
+      <p:sp>
+        <p:nvSpPr>
+          <p:cNvPr id="722931004" name="Text 2"/>
+          <p:cNvSpPr/>
+          <p:nvPr/>
+        </p:nvSpPr>
+        <p:spPr bwMode="auto">
+          <a:xfrm>
+            <a:off x="793790" y="1978104"/>
+            <a:ext cx="6802636" cy="708779"/>
           </a:xfrm>
           <a:prstGeom prst="rect">
             <a:avLst/>
@@ -2862,7 +3652,7 @@
                 <a:ea typeface="IBM Plex Sans Medium"/>
                 <a:cs typeface="IBM Plex Sans Medium"/>
               </a:rPr>
-              <a:t>Pixels — CSS без компромиссов</a:t>
+              <a:t>Планы развития проекта</a:t>
             </a:r>
             <a:endParaRPr lang="en-US" sz="4450"/>
           </a:p>
@@ -2870,14 +3660,86 @@
       </p:sp>
       <p:sp>
         <p:nvSpPr>
-          <p:cNvPr id="1650311294" name="Text 1"/>
-          <p:cNvSpPr/>
-          <p:nvPr/>
-        </p:nvSpPr>
-        <p:spPr bwMode="auto">
-          <a:xfrm>
-            <a:off x="793790" y="2968585"/>
-            <a:ext cx="4198382" cy="425291"/>
+          <p:cNvPr id="138181191" name="Shape 3"/>
+          <p:cNvSpPr/>
+          <p:nvPr/>
+        </p:nvSpPr>
+        <p:spPr bwMode="auto">
+          <a:xfrm>
+            <a:off x="1133951" y="3934301"/>
+            <a:ext cx="3856077" cy="226814"/>
+          </a:xfrm>
+          <a:prstGeom prst="roundRect">
+            <a:avLst>
+              <a:gd name="adj" fmla="val 15001"/>
+            </a:avLst>
+          </a:prstGeom>
+          <a:solidFill>
+            <a:srgbClr val="484B51"/>
+          </a:solidFill>
+          <a:ln/>
+        </p:spPr>
+      </p:sp>
+      <p:sp>
+        <p:nvSpPr>
+          <p:cNvPr id="102757948" name="Shape 4"/>
+          <p:cNvSpPr/>
+          <p:nvPr/>
+        </p:nvSpPr>
+        <p:spPr bwMode="auto">
+          <a:xfrm>
+            <a:off x="793790" y="3707428"/>
+            <a:ext cx="680441" cy="680441"/>
+          </a:xfrm>
+          <a:prstGeom prst="roundRect">
+            <a:avLst>
+              <a:gd name="adj" fmla="val 67192"/>
+            </a:avLst>
+          </a:prstGeom>
+          <a:solidFill>
+            <a:srgbClr val="484B51"/>
+          </a:solidFill>
+          <a:ln/>
+        </p:spPr>
+      </p:sp>
+      <p:pic>
+        <p:nvPicPr>
+          <p:cNvPr id="77162530" name="Image 0" descr="preencoded.png"/>
+          <p:cNvPicPr>
+            <a:picLocks noChangeAspect="1"/>
+          </p:cNvPicPr>
+          <p:nvPr/>
+        </p:nvPicPr>
+        <p:blipFill rotWithShape="1">
+          <a:blip r:embed="rId3">
+            <a:extLst>
+              <a:ext uri="{96DAC541-7B7A-43D3-8B79-37D633B846F1}">
+                <asvg:svgBlip xmlns:asvg="http://schemas.microsoft.com/office/drawing/2016/SVG/main" xmlns="" r:embed="rId4"/>
+              </a:ext>
+            </a:extLst>
+          </a:blip>
+          <a:stretch/>
+        </p:blipFill>
+        <p:spPr bwMode="auto">
+          <a:xfrm>
+            <a:off x="963930" y="3877568"/>
+            <a:ext cx="340162" cy="340162"/>
+          </a:xfrm>
+          <a:prstGeom prst="rect">
+            <a:avLst/>
+          </a:prstGeom>
+        </p:spPr>
+      </p:pic>
+      <p:sp>
+        <p:nvSpPr>
+          <p:cNvPr id="1633818275" name="Text 5"/>
+          <p:cNvSpPr/>
+          <p:nvPr/>
+        </p:nvSpPr>
+        <p:spPr bwMode="auto">
+          <a:xfrm>
+            <a:off x="1020604" y="4614743"/>
+            <a:ext cx="2835235" cy="354330"/>
           </a:xfrm>
           <a:prstGeom prst="rect">
             <a:avLst/>
@@ -2891,256 +3753,36 @@
           <a:p>
             <a:pPr marL="0" indent="0" algn="l">
               <a:lnSpc>
-                <a:spcPts val="3300"/>
+                <a:spcPts val="2750"/>
               </a:lnSpc>
               <a:buNone/>
               <a:defRPr/>
             </a:pPr>
             <a:r>
-              <a:rPr lang="en-US" sz="2650">
-                <a:solidFill>
-                  <a:srgbClr val="F3F3F2"/>
+              <a:rPr lang="en-US" sz="2200">
+                <a:solidFill>
+                  <a:srgbClr val="D4D4D1"/>
                 </a:solidFill>
                 <a:latin typeface="IBM Plex Sans Medium"/>
                 <a:ea typeface="IBM Plex Sans Medium"/>
                 <a:cs typeface="IBM Plex Sans Medium"/>
               </a:rPr>
-              <a:t>Ключевые преимущества</a:t>
-            </a:r>
-            <a:endParaRPr lang="en-US" sz="2650"/>
-          </a:p>
-        </p:txBody>
-      </p:sp>
-      <p:sp>
-        <p:nvSpPr>
-          <p:cNvPr id="1654479021" name="Text 2"/>
-          <p:cNvSpPr/>
-          <p:nvPr/>
-        </p:nvSpPr>
-        <p:spPr bwMode="auto">
-          <a:xfrm>
-            <a:off x="793790" y="3620691"/>
-            <a:ext cx="6924437" cy="362903"/>
-          </a:xfrm>
-          <a:prstGeom prst="rect">
-            <a:avLst/>
-          </a:prstGeom>
-          <a:noFill/>
-          <a:ln/>
-        </p:spPr>
-        <p:txBody>
-          <a:bodyPr wrap="none" lIns="0" tIns="0" rIns="0" bIns="0" rtlCol="0" anchor="t"/>
-          <a:lstStyle/>
-          <a:p>
-            <a:pPr marL="342900" indent="-342900" algn="l">
-              <a:lnSpc>
-                <a:spcPts val="2850"/>
-              </a:lnSpc>
-              <a:buSzPct val="100000"/>
-              <a:buChar char="•"/>
-              <a:defRPr/>
-            </a:pPr>
-            <a:r>
-              <a:rPr lang="en-US" sz="1750">
-                <a:solidFill>
-                  <a:srgbClr val="D4D4D1"/>
-                </a:solidFill>
-                <a:latin typeface="Roboto"/>
-                <a:ea typeface="Roboto"/>
-                <a:cs typeface="Roboto"/>
-              </a:rPr>
-              <a:t>Векторная четкость на любых экранах</a:t>
-            </a:r>
-            <a:endParaRPr lang="en-US" sz="1750"/>
-          </a:p>
-        </p:txBody>
-      </p:sp>
-      <p:sp>
-        <p:nvSpPr>
-          <p:cNvPr id="717026560" name="Text 3"/>
-          <p:cNvSpPr/>
-          <p:nvPr/>
-        </p:nvSpPr>
-        <p:spPr bwMode="auto">
-          <a:xfrm>
-            <a:off x="793790" y="4062889"/>
-            <a:ext cx="6924437" cy="362903"/>
-          </a:xfrm>
-          <a:prstGeom prst="rect">
-            <a:avLst/>
-          </a:prstGeom>
-          <a:noFill/>
-          <a:ln/>
-        </p:spPr>
-        <p:txBody>
-          <a:bodyPr wrap="none" lIns="0" tIns="0" rIns="0" bIns="0" rtlCol="0" anchor="t"/>
-          <a:lstStyle/>
-          <a:p>
-            <a:pPr marL="342900" indent="-342900" algn="l">
-              <a:lnSpc>
-                <a:spcPts val="2850"/>
-              </a:lnSpc>
-              <a:buSzPct val="100000"/>
-              <a:buChar char="•"/>
-              <a:defRPr/>
-            </a:pPr>
-            <a:r>
-              <a:rPr lang="en-US" sz="1750">
-                <a:solidFill>
-                  <a:srgbClr val="D4D4D1"/>
-                </a:solidFill>
-                <a:latin typeface="Roboto"/>
-                <a:ea typeface="Roboto"/>
-                <a:cs typeface="Roboto"/>
-              </a:rPr>
-              <a:t>Нулевая задержка загрузки</a:t>
-            </a:r>
-            <a:endParaRPr lang="en-US" sz="1750"/>
-          </a:p>
-        </p:txBody>
-      </p:sp>
-      <p:sp>
-        <p:nvSpPr>
-          <p:cNvPr id="1848289755" name="Text 4"/>
-          <p:cNvSpPr/>
-          <p:nvPr/>
-        </p:nvSpPr>
-        <p:spPr bwMode="auto">
-          <a:xfrm>
-            <a:off x="793790" y="4505087"/>
-            <a:ext cx="6924437" cy="362903"/>
-          </a:xfrm>
-          <a:prstGeom prst="rect">
-            <a:avLst/>
-          </a:prstGeom>
-          <a:noFill/>
-          <a:ln/>
-        </p:spPr>
-        <p:txBody>
-          <a:bodyPr wrap="none" lIns="0" tIns="0" rIns="0" bIns="0" rtlCol="0" anchor="t"/>
-          <a:lstStyle/>
-          <a:p>
-            <a:pPr marL="342900" indent="-342900" algn="l">
-              <a:lnSpc>
-                <a:spcPts val="2850"/>
-              </a:lnSpc>
-              <a:buSzPct val="100000"/>
-              <a:buChar char="•"/>
-              <a:defRPr/>
-            </a:pPr>
-            <a:r>
-              <a:rPr lang="en-US" sz="1750">
-                <a:solidFill>
-                  <a:srgbClr val="D4D4D1"/>
-                </a:solidFill>
-                <a:latin typeface="Roboto"/>
-                <a:ea typeface="Roboto"/>
-                <a:cs typeface="Roboto"/>
-              </a:rPr>
-              <a:t>Чистый JavaScript без библиотек</a:t>
-            </a:r>
-            <a:endParaRPr lang="en-US" sz="1750"/>
-          </a:p>
-        </p:txBody>
-      </p:sp>
-      <p:sp>
-        <p:nvSpPr>
-          <p:cNvPr id="1298308717" name="Text 5"/>
-          <p:cNvSpPr/>
-          <p:nvPr/>
-        </p:nvSpPr>
-        <p:spPr bwMode="auto">
-          <a:xfrm>
-            <a:off x="793790" y="4947285"/>
-            <a:ext cx="6924437" cy="362903"/>
-          </a:xfrm>
-          <a:prstGeom prst="rect">
-            <a:avLst/>
-          </a:prstGeom>
-          <a:noFill/>
-          <a:ln/>
-        </p:spPr>
-        <p:txBody>
-          <a:bodyPr wrap="none" lIns="0" tIns="0" rIns="0" bIns="0" rtlCol="0" anchor="t"/>
-          <a:lstStyle/>
-          <a:p>
-            <a:pPr marL="342900" indent="-342900" algn="l">
-              <a:lnSpc>
-                <a:spcPts val="2850"/>
-              </a:lnSpc>
-              <a:buSzPct val="100000"/>
-              <a:buChar char="•"/>
-              <a:defRPr/>
-            </a:pPr>
-            <a:r>
-              <a:rPr lang="en-US" sz="1750">
-                <a:solidFill>
-                  <a:srgbClr val="D4D4D1"/>
-                </a:solidFill>
-                <a:latin typeface="Roboto"/>
-                <a:ea typeface="Roboto"/>
-                <a:cs typeface="Roboto"/>
-              </a:rPr>
-              <a:t>Полный контроль через код</a:t>
-            </a:r>
-            <a:endParaRPr lang="en-US" sz="1750"/>
-          </a:p>
-        </p:txBody>
-      </p:sp>
-      <p:sp>
-        <p:nvSpPr>
-          <p:cNvPr id="693835616" name="Shape 8"/>
-          <p:cNvSpPr/>
-          <p:nvPr/>
-        </p:nvSpPr>
-        <p:spPr bwMode="auto">
-          <a:xfrm>
-            <a:off x="8279249" y="2996922"/>
-            <a:ext cx="5564862" cy="2415421"/>
-          </a:xfrm>
-          <a:prstGeom prst="roundRect">
-            <a:avLst>
-              <a:gd name="adj" fmla="val 1409"/>
-            </a:avLst>
-          </a:prstGeom>
-          <a:solidFill>
-            <a:srgbClr val="4D1F00"/>
-          </a:solidFill>
-          <a:ln/>
-        </p:spPr>
-      </p:sp>
-      <p:pic>
-        <p:nvPicPr>
-          <p:cNvPr id="1655875260" name="Image 0" descr="preencoded.png"/>
-          <p:cNvPicPr>
-            <a:picLocks noChangeAspect="1"/>
-          </p:cNvPicPr>
-          <p:nvPr/>
-        </p:nvPicPr>
-        <p:blipFill rotWithShape="1">
-          <a:blip r:embed="rId3"/>
-          <a:stretch/>
-        </p:blipFill>
-        <p:spPr bwMode="auto">
-          <a:xfrm>
-            <a:off x="8506063" y="3341013"/>
-            <a:ext cx="283488" cy="226814"/>
-          </a:xfrm>
-          <a:prstGeom prst="rect">
-            <a:avLst/>
-          </a:prstGeom>
-        </p:spPr>
-      </p:pic>
-      <p:sp>
-        <p:nvSpPr>
-          <p:cNvPr id="1555851315" name="Text 9"/>
-          <p:cNvSpPr/>
-          <p:nvPr/>
-        </p:nvSpPr>
-        <p:spPr bwMode="auto">
-          <a:xfrm>
-            <a:off x="9016365" y="3280410"/>
-            <a:ext cx="4600932" cy="1814513"/>
+              <a:t>LocalStorage API</a:t>
+            </a:r>
+            <a:endParaRPr lang="en-US" sz="2200"/>
+          </a:p>
+        </p:txBody>
+      </p:sp>
+      <p:sp>
+        <p:nvSpPr>
+          <p:cNvPr id="730369214" name="Text 6"/>
+          <p:cNvSpPr/>
+          <p:nvPr/>
+        </p:nvSpPr>
+        <p:spPr bwMode="auto">
+          <a:xfrm>
+            <a:off x="1020604" y="5105162"/>
+            <a:ext cx="3742730" cy="1451610"/>
           </a:xfrm>
           <a:prstGeom prst="rect">
             <a:avLst/>
@@ -3160,46 +3802,351 @@
               <a:defRPr/>
             </a:pPr>
             <a:r>
-              <a:rPr lang="en-US" sz="1750" b="1">
-                <a:solidFill>
-                  <a:srgbClr val="FFFFFF"/>
+              <a:rPr lang="en-US" sz="1750">
+                <a:solidFill>
+                  <a:srgbClr val="D4D4D1"/>
                 </a:solidFill>
                 <a:latin typeface="Roboto"/>
                 <a:ea typeface="Roboto"/>
                 <a:cs typeface="Roboto"/>
               </a:rPr>
-              <a:t>Вывод:</a:t>
-            </a:r>
-            <a:r>
-              <a:rPr lang="en-US" sz="1750">
-                <a:solidFill>
-                  <a:srgbClr val="FFFFFF"/>
-                </a:solidFill>
-                <a:latin typeface="Roboto"/>
-                <a:ea typeface="Roboto"/>
-                <a:cs typeface="Roboto"/>
-              </a:rPr>
-              <a:t> CSS box-shadow превращает браузер в графический редактор, доказывая, что веб-стандарты способны решать задачи, выходящие за рамки их изначального предназначения</a:t>
+              <a:t>Сохранение работ пользователя в браузере для возможности продолжить рисование позже без потери данных</a:t>
             </a:r>
             <a:endParaRPr lang="en-US" sz="1750"/>
           </a:p>
         </p:txBody>
+      </p:sp>
+      <p:sp>
+        <p:nvSpPr>
+          <p:cNvPr id="918102026" name="Shape 7"/>
+          <p:cNvSpPr/>
+          <p:nvPr/>
+        </p:nvSpPr>
+        <p:spPr bwMode="auto">
+          <a:xfrm>
+            <a:off x="5557123" y="3594021"/>
+            <a:ext cx="3856077" cy="226814"/>
+          </a:xfrm>
+          <a:prstGeom prst="roundRect">
+            <a:avLst>
+              <a:gd name="adj" fmla="val 15001"/>
+            </a:avLst>
+          </a:prstGeom>
+          <a:solidFill>
+            <a:srgbClr val="484B51"/>
+          </a:solidFill>
+          <a:ln/>
+        </p:spPr>
+      </p:sp>
+      <p:sp>
+        <p:nvSpPr>
+          <p:cNvPr id="1134242864" name="Shape 8"/>
+          <p:cNvSpPr/>
+          <p:nvPr/>
+        </p:nvSpPr>
+        <p:spPr bwMode="auto">
+          <a:xfrm>
+            <a:off x="5216962" y="3367147"/>
+            <a:ext cx="680441" cy="680441"/>
+          </a:xfrm>
+          <a:prstGeom prst="roundRect">
+            <a:avLst>
+              <a:gd name="adj" fmla="val 67192"/>
+            </a:avLst>
+          </a:prstGeom>
+          <a:solidFill>
+            <a:srgbClr val="484B51"/>
+          </a:solidFill>
+          <a:ln/>
+        </p:spPr>
       </p:sp>
       <p:pic>
         <p:nvPicPr>
-          <p:cNvPr id="2051207809" name="Рисунок 2051207808"/>
+          <p:cNvPr id="697474661" name="Image 1" descr="preencoded.png"/>
           <p:cNvPicPr>
             <a:picLocks noChangeAspect="1"/>
           </p:cNvPicPr>
           <p:nvPr/>
         </p:nvPicPr>
         <p:blipFill rotWithShape="1">
-          <a:blip r:embed="rId4"/>
+          <a:blip r:embed="rId5">
+            <a:extLst>
+              <a:ext uri="{96DAC541-7B7A-43D3-8B79-37D633B846F1}">
+                <asvg:svgBlip xmlns:asvg="http://schemas.microsoft.com/office/drawing/2016/SVG/main" xmlns="" r:embed="rId6"/>
+              </a:ext>
+            </a:extLst>
+          </a:blip>
           <a:stretch/>
         </p:blipFill>
         <p:spPr bwMode="auto">
           <a:xfrm>
-            <a:off x="12337142" y="7540624"/>
+            <a:off x="5387102" y="3537287"/>
+            <a:ext cx="340162" cy="340162"/>
+          </a:xfrm>
+          <a:prstGeom prst="rect">
+            <a:avLst/>
+          </a:prstGeom>
+        </p:spPr>
+      </p:pic>
+      <p:sp>
+        <p:nvSpPr>
+          <p:cNvPr id="2104012764" name="Text 9"/>
+          <p:cNvSpPr/>
+          <p:nvPr/>
+        </p:nvSpPr>
+        <p:spPr bwMode="auto">
+          <a:xfrm>
+            <a:off x="5443776" y="4274463"/>
+            <a:ext cx="2835235" cy="354330"/>
+          </a:xfrm>
+          <a:prstGeom prst="rect">
+            <a:avLst/>
+          </a:prstGeom>
+          <a:noFill/>
+          <a:ln/>
+        </p:spPr>
+        <p:txBody>
+          <a:bodyPr wrap="none" lIns="0" tIns="0" rIns="0" bIns="0" rtlCol="0" anchor="t"/>
+          <a:lstStyle/>
+          <a:p>
+            <a:pPr marL="0" indent="0" algn="l">
+              <a:lnSpc>
+                <a:spcPts val="2750"/>
+              </a:lnSpc>
+              <a:buNone/>
+              <a:defRPr/>
+            </a:pPr>
+            <a:r>
+              <a:rPr lang="en-US" sz="2200">
+                <a:solidFill>
+                  <a:srgbClr val="D4D4D1"/>
+                </a:solidFill>
+                <a:latin typeface="IBM Plex Sans Medium"/>
+                <a:ea typeface="IBM Plex Sans Medium"/>
+                <a:cs typeface="IBM Plex Sans Medium"/>
+              </a:rPr>
+              <a:t>CSS Animations</a:t>
+            </a:r>
+            <a:endParaRPr lang="en-US" sz="2200"/>
+          </a:p>
+        </p:txBody>
+      </p:sp>
+      <p:sp>
+        <p:nvSpPr>
+          <p:cNvPr id="615366454" name="Text 10"/>
+          <p:cNvSpPr/>
+          <p:nvPr/>
+        </p:nvSpPr>
+        <p:spPr bwMode="auto">
+          <a:xfrm>
+            <a:off x="5443776" y="4764881"/>
+            <a:ext cx="3742730" cy="1451610"/>
+          </a:xfrm>
+          <a:prstGeom prst="rect">
+            <a:avLst/>
+          </a:prstGeom>
+          <a:noFill/>
+          <a:ln/>
+        </p:spPr>
+        <p:txBody>
+          <a:bodyPr wrap="square" lIns="0" tIns="0" rIns="0" bIns="0" rtlCol="0" anchor="t"/>
+          <a:lstStyle/>
+          <a:p>
+            <a:pPr marL="0" indent="0" algn="l">
+              <a:lnSpc>
+                <a:spcPts val="2850"/>
+              </a:lnSpc>
+              <a:buNone/>
+              <a:defRPr/>
+            </a:pPr>
+            <a:r>
+              <a:rPr lang="en-US" sz="1750">
+                <a:solidFill>
+                  <a:srgbClr val="D4D4D1"/>
+                </a:solidFill>
+                <a:latin typeface="Roboto"/>
+                <a:ea typeface="Roboto"/>
+                <a:cs typeface="Roboto"/>
+              </a:rPr>
+              <a:t>Генерация @keyframes для создания анимированных спрайтов с покадровой сменой box-shadow</a:t>
+            </a:r>
+            <a:endParaRPr lang="en-US" sz="1750"/>
+          </a:p>
+        </p:txBody>
+      </p:sp>
+      <p:sp>
+        <p:nvSpPr>
+          <p:cNvPr id="1730386070" name="Shape 11"/>
+          <p:cNvSpPr/>
+          <p:nvPr/>
+        </p:nvSpPr>
+        <p:spPr bwMode="auto">
+          <a:xfrm>
+            <a:off x="9980295" y="3253859"/>
+            <a:ext cx="3856077" cy="226814"/>
+          </a:xfrm>
+          <a:prstGeom prst="roundRect">
+            <a:avLst>
+              <a:gd name="adj" fmla="val 15001"/>
+            </a:avLst>
+          </a:prstGeom>
+          <a:solidFill>
+            <a:srgbClr val="484B51"/>
+          </a:solidFill>
+          <a:ln/>
+        </p:spPr>
+      </p:sp>
+      <p:sp>
+        <p:nvSpPr>
+          <p:cNvPr id="1692837634" name="Shape 12"/>
+          <p:cNvSpPr/>
+          <p:nvPr/>
+        </p:nvSpPr>
+        <p:spPr bwMode="auto">
+          <a:xfrm>
+            <a:off x="9640133" y="3026985"/>
+            <a:ext cx="680441" cy="680441"/>
+          </a:xfrm>
+          <a:prstGeom prst="roundRect">
+            <a:avLst>
+              <a:gd name="adj" fmla="val 67192"/>
+            </a:avLst>
+          </a:prstGeom>
+          <a:solidFill>
+            <a:srgbClr val="484B51"/>
+          </a:solidFill>
+          <a:ln/>
+        </p:spPr>
+      </p:sp>
+      <p:pic>
+        <p:nvPicPr>
+          <p:cNvPr id="552554926" name="Image 2" descr="preencoded.png"/>
+          <p:cNvPicPr>
+            <a:picLocks noChangeAspect="1"/>
+          </p:cNvPicPr>
+          <p:nvPr/>
+        </p:nvPicPr>
+        <p:blipFill rotWithShape="1">
+          <a:blip r:embed="rId7">
+            <a:extLst>
+              <a:ext uri="{96DAC541-7B7A-43D3-8B79-37D633B846F1}">
+                <asvg:svgBlip xmlns:asvg="http://schemas.microsoft.com/office/drawing/2016/SVG/main" xmlns="" r:embed="rId8"/>
+              </a:ext>
+            </a:extLst>
+          </a:blip>
+          <a:stretch/>
+        </p:blipFill>
+        <p:spPr bwMode="auto">
+          <a:xfrm>
+            <a:off x="9810274" y="3197126"/>
+            <a:ext cx="340162" cy="340162"/>
+          </a:xfrm>
+          <a:prstGeom prst="rect">
+            <a:avLst/>
+          </a:prstGeom>
+        </p:spPr>
+      </p:pic>
+      <p:sp>
+        <p:nvSpPr>
+          <p:cNvPr id="694439995" name="Text 13"/>
+          <p:cNvSpPr/>
+          <p:nvPr/>
+        </p:nvSpPr>
+        <p:spPr bwMode="auto">
+          <a:xfrm>
+            <a:off x="9866948" y="3934301"/>
+            <a:ext cx="3654981" cy="354330"/>
+          </a:xfrm>
+          <a:prstGeom prst="rect">
+            <a:avLst/>
+          </a:prstGeom>
+          <a:noFill/>
+          <a:ln/>
+        </p:spPr>
+        <p:txBody>
+          <a:bodyPr wrap="none" lIns="0" tIns="0" rIns="0" bIns="0" rtlCol="0" anchor="t"/>
+          <a:lstStyle/>
+          <a:p>
+            <a:pPr marL="0" indent="0" algn="l">
+              <a:lnSpc>
+                <a:spcPts val="2750"/>
+              </a:lnSpc>
+              <a:buNone/>
+              <a:defRPr/>
+            </a:pPr>
+            <a:r>
+              <a:rPr lang="en-US" sz="2200">
+                <a:solidFill>
+                  <a:srgbClr val="D4D4D1"/>
+                </a:solidFill>
+                <a:latin typeface="IBM Plex Sans Medium"/>
+                <a:ea typeface="IBM Plex Sans Medium"/>
+                <a:cs typeface="IBM Plex Sans Medium"/>
+              </a:rPr>
+              <a:t>Переменный размер сетки</a:t>
+            </a:r>
+            <a:endParaRPr lang="en-US" sz="2200"/>
+          </a:p>
+        </p:txBody>
+      </p:sp>
+      <p:sp>
+        <p:nvSpPr>
+          <p:cNvPr id="1289289465" name="Text 14"/>
+          <p:cNvSpPr/>
+          <p:nvPr/>
+        </p:nvSpPr>
+        <p:spPr bwMode="auto">
+          <a:xfrm>
+            <a:off x="9866948" y="4424720"/>
+            <a:ext cx="3742730" cy="1088708"/>
+          </a:xfrm>
+          <a:prstGeom prst="rect">
+            <a:avLst/>
+          </a:prstGeom>
+          <a:noFill/>
+          <a:ln/>
+        </p:spPr>
+        <p:txBody>
+          <a:bodyPr wrap="square" lIns="0" tIns="0" rIns="0" bIns="0" rtlCol="0" anchor="t"/>
+          <a:lstStyle/>
+          <a:p>
+            <a:pPr marL="0" indent="0" algn="l">
+              <a:lnSpc>
+                <a:spcPts val="2850"/>
+              </a:lnSpc>
+              <a:buNone/>
+              <a:defRPr/>
+            </a:pPr>
+            <a:r>
+              <a:rPr lang="en-US" sz="1750">
+                <a:solidFill>
+                  <a:srgbClr val="D4D4D1"/>
+                </a:solidFill>
+                <a:latin typeface="Roboto"/>
+                <a:ea typeface="Roboto"/>
+                <a:cs typeface="Roboto"/>
+              </a:rPr>
+              <a:t>Поддержка холстов 8×8, 32×32, 64×64 для более детальных или оптимизированных изображений</a:t>
+            </a:r>
+            <a:endParaRPr lang="en-US" sz="1750"/>
+          </a:p>
+        </p:txBody>
+      </p:sp>
+      <p:pic>
+        <p:nvPicPr>
+          <p:cNvPr id="729006083" name="Рисунок 729006082"/>
+          <p:cNvPicPr>
+            <a:picLocks noChangeAspect="1"/>
+          </p:cNvPicPr>
+          <p:nvPr/>
+        </p:nvPicPr>
+        <p:blipFill rotWithShape="1">
+          <a:blip r:embed="rId9"/>
+          <a:stretch/>
+        </p:blipFill>
+        <p:spPr bwMode="auto">
+          <a:xfrm>
+            <a:off x="12325803" y="7551964"/>
             <a:ext cx="2228850" cy="657225"/>
           </a:xfrm>
           <a:prstGeom prst="rect">
@@ -3234,6 +4181,413 @@
       </p:grpSpPr>
       <p:sp>
         <p:nvSpPr>
+          <p:cNvPr id="2130163748" name="Text 0"/>
+          <p:cNvSpPr/>
+          <p:nvPr/>
+        </p:nvSpPr>
+        <p:spPr bwMode="auto">
+          <a:xfrm>
+            <a:off x="793790" y="1692831"/>
+            <a:ext cx="8461058" cy="708779"/>
+          </a:xfrm>
+          <a:prstGeom prst="rect">
+            <a:avLst/>
+          </a:prstGeom>
+          <a:noFill/>
+          <a:ln/>
+        </p:spPr>
+        <p:txBody>
+          <a:bodyPr wrap="none" lIns="0" tIns="0" rIns="0" bIns="0" rtlCol="0" anchor="t"/>
+          <a:lstStyle/>
+          <a:p>
+            <a:pPr marL="0" indent="0" algn="l">
+              <a:lnSpc>
+                <a:spcPts val="5550"/>
+              </a:lnSpc>
+              <a:buNone/>
+              <a:defRPr/>
+            </a:pPr>
+            <a:r>
+              <a:rPr lang="en-US" sz="4450">
+                <a:solidFill>
+                  <a:srgbClr val="F3F3F2"/>
+                </a:solidFill>
+                <a:latin typeface="IBM Plex Sans Medium"/>
+                <a:ea typeface="IBM Plex Sans Medium"/>
+                <a:cs typeface="IBM Plex Sans Medium"/>
+              </a:rPr>
+              <a:t>Pixels — CSS без компромиссов</a:t>
+            </a:r>
+            <a:endParaRPr lang="en-US" sz="4450"/>
+          </a:p>
+        </p:txBody>
+      </p:sp>
+      <p:sp>
+        <p:nvSpPr>
+          <p:cNvPr id="1650311294" name="Text 1"/>
+          <p:cNvSpPr/>
+          <p:nvPr/>
+        </p:nvSpPr>
+        <p:spPr bwMode="auto">
+          <a:xfrm>
+            <a:off x="793790" y="2968585"/>
+            <a:ext cx="4198382" cy="425291"/>
+          </a:xfrm>
+          <a:prstGeom prst="rect">
+            <a:avLst/>
+          </a:prstGeom>
+          <a:noFill/>
+          <a:ln/>
+        </p:spPr>
+        <p:txBody>
+          <a:bodyPr wrap="none" lIns="0" tIns="0" rIns="0" bIns="0" rtlCol="0" anchor="t"/>
+          <a:lstStyle/>
+          <a:p>
+            <a:pPr marL="0" indent="0" algn="l">
+              <a:lnSpc>
+                <a:spcPts val="3300"/>
+              </a:lnSpc>
+              <a:buNone/>
+              <a:defRPr/>
+            </a:pPr>
+            <a:r>
+              <a:rPr lang="en-US" sz="2650">
+                <a:solidFill>
+                  <a:srgbClr val="F3F3F2"/>
+                </a:solidFill>
+                <a:latin typeface="IBM Plex Sans Medium"/>
+                <a:ea typeface="IBM Plex Sans Medium"/>
+                <a:cs typeface="IBM Plex Sans Medium"/>
+              </a:rPr>
+              <a:t>Ключевые преимущества</a:t>
+            </a:r>
+            <a:endParaRPr lang="en-US" sz="2650"/>
+          </a:p>
+        </p:txBody>
+      </p:sp>
+      <p:sp>
+        <p:nvSpPr>
+          <p:cNvPr id="1654479021" name="Text 2"/>
+          <p:cNvSpPr/>
+          <p:nvPr/>
+        </p:nvSpPr>
+        <p:spPr bwMode="auto">
+          <a:xfrm>
+            <a:off x="793790" y="3620691"/>
+            <a:ext cx="6924437" cy="362903"/>
+          </a:xfrm>
+          <a:prstGeom prst="rect">
+            <a:avLst/>
+          </a:prstGeom>
+          <a:noFill/>
+          <a:ln/>
+        </p:spPr>
+        <p:txBody>
+          <a:bodyPr wrap="none" lIns="0" tIns="0" rIns="0" bIns="0" rtlCol="0" anchor="t"/>
+          <a:lstStyle/>
+          <a:p>
+            <a:pPr marL="342900" indent="-342900" algn="l">
+              <a:lnSpc>
+                <a:spcPts val="2850"/>
+              </a:lnSpc>
+              <a:buSzPct val="100000"/>
+              <a:buChar char="•"/>
+              <a:defRPr/>
+            </a:pPr>
+            <a:r>
+              <a:rPr lang="en-US" sz="1750">
+                <a:solidFill>
+                  <a:srgbClr val="D4D4D1"/>
+                </a:solidFill>
+                <a:latin typeface="Roboto"/>
+                <a:ea typeface="Roboto"/>
+                <a:cs typeface="Roboto"/>
+              </a:rPr>
+              <a:t>Векторная четкость на любых экранах</a:t>
+            </a:r>
+            <a:endParaRPr lang="en-US" sz="1750"/>
+          </a:p>
+        </p:txBody>
+      </p:sp>
+      <p:sp>
+        <p:nvSpPr>
+          <p:cNvPr id="717026560" name="Text 3"/>
+          <p:cNvSpPr/>
+          <p:nvPr/>
+        </p:nvSpPr>
+        <p:spPr bwMode="auto">
+          <a:xfrm>
+            <a:off x="793790" y="4062889"/>
+            <a:ext cx="6924437" cy="362903"/>
+          </a:xfrm>
+          <a:prstGeom prst="rect">
+            <a:avLst/>
+          </a:prstGeom>
+          <a:noFill/>
+          <a:ln/>
+        </p:spPr>
+        <p:txBody>
+          <a:bodyPr wrap="none" lIns="0" tIns="0" rIns="0" bIns="0" rtlCol="0" anchor="t"/>
+          <a:lstStyle/>
+          <a:p>
+            <a:pPr marL="342900" indent="-342900" algn="l">
+              <a:lnSpc>
+                <a:spcPts val="2850"/>
+              </a:lnSpc>
+              <a:buSzPct val="100000"/>
+              <a:buChar char="•"/>
+              <a:defRPr/>
+            </a:pPr>
+            <a:r>
+              <a:rPr lang="en-US" sz="1750">
+                <a:solidFill>
+                  <a:srgbClr val="D4D4D1"/>
+                </a:solidFill>
+                <a:latin typeface="Roboto"/>
+                <a:ea typeface="Roboto"/>
+                <a:cs typeface="Roboto"/>
+              </a:rPr>
+              <a:t>Нулевая задержка загрузки</a:t>
+            </a:r>
+            <a:endParaRPr lang="en-US" sz="1750"/>
+          </a:p>
+        </p:txBody>
+      </p:sp>
+      <p:sp>
+        <p:nvSpPr>
+          <p:cNvPr id="1848289755" name="Text 4"/>
+          <p:cNvSpPr/>
+          <p:nvPr/>
+        </p:nvSpPr>
+        <p:spPr bwMode="auto">
+          <a:xfrm>
+            <a:off x="793790" y="4505087"/>
+            <a:ext cx="6924437" cy="362903"/>
+          </a:xfrm>
+          <a:prstGeom prst="rect">
+            <a:avLst/>
+          </a:prstGeom>
+          <a:noFill/>
+          <a:ln/>
+        </p:spPr>
+        <p:txBody>
+          <a:bodyPr wrap="none" lIns="0" tIns="0" rIns="0" bIns="0" rtlCol="0" anchor="t"/>
+          <a:lstStyle/>
+          <a:p>
+            <a:pPr marL="342900" indent="-342900" algn="l">
+              <a:lnSpc>
+                <a:spcPts val="2850"/>
+              </a:lnSpc>
+              <a:buSzPct val="100000"/>
+              <a:buChar char="•"/>
+              <a:defRPr/>
+            </a:pPr>
+            <a:r>
+              <a:rPr lang="en-US" sz="1750">
+                <a:solidFill>
+                  <a:srgbClr val="D4D4D1"/>
+                </a:solidFill>
+                <a:latin typeface="Roboto"/>
+                <a:ea typeface="Roboto"/>
+                <a:cs typeface="Roboto"/>
+              </a:rPr>
+              <a:t>Чистый JavaScript без библиотек</a:t>
+            </a:r>
+            <a:endParaRPr lang="en-US" sz="1750"/>
+          </a:p>
+        </p:txBody>
+      </p:sp>
+      <p:sp>
+        <p:nvSpPr>
+          <p:cNvPr id="1298308717" name="Text 5"/>
+          <p:cNvSpPr/>
+          <p:nvPr/>
+        </p:nvSpPr>
+        <p:spPr bwMode="auto">
+          <a:xfrm>
+            <a:off x="793790" y="4947285"/>
+            <a:ext cx="6924437" cy="362903"/>
+          </a:xfrm>
+          <a:prstGeom prst="rect">
+            <a:avLst/>
+          </a:prstGeom>
+          <a:noFill/>
+          <a:ln/>
+        </p:spPr>
+        <p:txBody>
+          <a:bodyPr wrap="none" lIns="0" tIns="0" rIns="0" bIns="0" rtlCol="0" anchor="t"/>
+          <a:lstStyle/>
+          <a:p>
+            <a:pPr marL="342900" indent="-342900" algn="l">
+              <a:lnSpc>
+                <a:spcPts val="2850"/>
+              </a:lnSpc>
+              <a:buSzPct val="100000"/>
+              <a:buChar char="•"/>
+              <a:defRPr/>
+            </a:pPr>
+            <a:r>
+              <a:rPr lang="en-US" sz="1750">
+                <a:solidFill>
+                  <a:srgbClr val="D4D4D1"/>
+                </a:solidFill>
+                <a:latin typeface="Roboto"/>
+                <a:ea typeface="Roboto"/>
+                <a:cs typeface="Roboto"/>
+              </a:rPr>
+              <a:t>Полный контроль через код</a:t>
+            </a:r>
+            <a:endParaRPr lang="en-US" sz="1750"/>
+          </a:p>
+        </p:txBody>
+      </p:sp>
+      <p:sp>
+        <p:nvSpPr>
+          <p:cNvPr id="693835616" name="Shape 8"/>
+          <p:cNvSpPr/>
+          <p:nvPr/>
+        </p:nvSpPr>
+        <p:spPr bwMode="auto">
+          <a:xfrm>
+            <a:off x="8279249" y="2996922"/>
+            <a:ext cx="5564862" cy="2415421"/>
+          </a:xfrm>
+          <a:prstGeom prst="roundRect">
+            <a:avLst>
+              <a:gd name="adj" fmla="val 1409"/>
+            </a:avLst>
+          </a:prstGeom>
+          <a:solidFill>
+            <a:srgbClr val="4D1F00"/>
+          </a:solidFill>
+          <a:ln/>
+        </p:spPr>
+      </p:sp>
+      <p:pic>
+        <p:nvPicPr>
+          <p:cNvPr id="1655875260" name="Image 0" descr="preencoded.png"/>
+          <p:cNvPicPr>
+            <a:picLocks noChangeAspect="1"/>
+          </p:cNvPicPr>
+          <p:nvPr/>
+        </p:nvPicPr>
+        <p:blipFill rotWithShape="1">
+          <a:blip r:embed="rId3"/>
+          <a:stretch/>
+        </p:blipFill>
+        <p:spPr bwMode="auto">
+          <a:xfrm>
+            <a:off x="8506063" y="3341013"/>
+            <a:ext cx="283488" cy="226814"/>
+          </a:xfrm>
+          <a:prstGeom prst="rect">
+            <a:avLst/>
+          </a:prstGeom>
+        </p:spPr>
+      </p:pic>
+      <p:sp>
+        <p:nvSpPr>
+          <p:cNvPr id="1555851315" name="Text 9"/>
+          <p:cNvSpPr/>
+          <p:nvPr/>
+        </p:nvSpPr>
+        <p:spPr bwMode="auto">
+          <a:xfrm>
+            <a:off x="9016365" y="3280410"/>
+            <a:ext cx="4600932" cy="1814513"/>
+          </a:xfrm>
+          <a:prstGeom prst="rect">
+            <a:avLst/>
+          </a:prstGeom>
+          <a:noFill/>
+          <a:ln/>
+        </p:spPr>
+        <p:txBody>
+          <a:bodyPr wrap="square" lIns="0" tIns="0" rIns="0" bIns="0" rtlCol="0" anchor="t"/>
+          <a:lstStyle/>
+          <a:p>
+            <a:pPr marL="0" indent="0" algn="l">
+              <a:lnSpc>
+                <a:spcPts val="2850"/>
+              </a:lnSpc>
+              <a:buNone/>
+              <a:defRPr/>
+            </a:pPr>
+            <a:r>
+              <a:rPr lang="en-US" sz="1750" b="1">
+                <a:solidFill>
+                  <a:srgbClr val="FFFFFF"/>
+                </a:solidFill>
+                <a:latin typeface="Roboto"/>
+                <a:ea typeface="Roboto"/>
+                <a:cs typeface="Roboto"/>
+              </a:rPr>
+              <a:t>Вывод:</a:t>
+            </a:r>
+            <a:r>
+              <a:rPr lang="en-US" sz="1750">
+                <a:solidFill>
+                  <a:srgbClr val="FFFFFF"/>
+                </a:solidFill>
+                <a:latin typeface="Roboto"/>
+                <a:ea typeface="Roboto"/>
+                <a:cs typeface="Roboto"/>
+              </a:rPr>
+              <a:t> CSS box-shadow превращает браузер в графический редактор, доказывая, что веб-стандарты способны решать задачи, выходящие за рамки их изначального предназначения</a:t>
+            </a:r>
+            <a:endParaRPr lang="en-US" sz="1750"/>
+          </a:p>
+        </p:txBody>
+      </p:sp>
+      <p:pic>
+        <p:nvPicPr>
+          <p:cNvPr id="2051207809" name="Рисунок 2051207808"/>
+          <p:cNvPicPr>
+            <a:picLocks noChangeAspect="1"/>
+          </p:cNvPicPr>
+          <p:nvPr/>
+        </p:nvPicPr>
+        <p:blipFill rotWithShape="1">
+          <a:blip r:embed="rId4"/>
+          <a:stretch/>
+        </p:blipFill>
+        <p:spPr bwMode="auto">
+          <a:xfrm>
+            <a:off x="12337142" y="7540624"/>
+            <a:ext cx="2228850" cy="657225"/>
+          </a:xfrm>
+          <a:prstGeom prst="rect">
+            <a:avLst/>
+          </a:prstGeom>
+        </p:spPr>
+      </p:pic>
+    </p:spTree>
+  </p:cSld>
+  <p:clrMapOvr>
+    <a:masterClrMapping/>
+  </p:clrMapOvr>
+</p:sld>
+</file>
+
+<file path=ppt/slides/slide12.xml><?xml version="1.0" encoding="utf-8"?>
+<p:sld xmlns:a="http://schemas.openxmlformats.org/drawingml/2006/main" xmlns:r="http://schemas.openxmlformats.org/officeDocument/2006/relationships" xmlns:p="http://schemas.openxmlformats.org/presentationml/2006/main" showMasterPhAnim="0">
+  <p:cSld name="Slide 9">
+    <p:spTree>
+      <p:nvGrpSpPr>
+        <p:cNvPr id="1" name=""/>
+        <p:cNvGrpSpPr/>
+        <p:nvPr/>
+      </p:nvGrpSpPr>
+      <p:grpSpPr bwMode="auto">
+        <a:xfrm>
+          <a:off x="0" y="0"/>
+          <a:ext cx="0" cy="0"/>
+          <a:chOff x="0" y="0"/>
+          <a:chExt cx="0" cy="0"/>
+        </a:xfrm>
+      </p:grpSpPr>
+      <p:sp>
+        <p:nvSpPr>
           <p:cNvPr id="1053305527" name="Text 0"/>
           <p:cNvSpPr/>
           <p:nvPr/>
@@ -4493,7 +5847,7 @@
         <p:cNvPr id="1" name="">
           <a:extLst>
             <a:ext uri="{FF2B5EF4-FFF2-40B4-BE49-F238E27FC236}">
-              <a16:creationId xmlns:a16="http://schemas.microsoft.com/office/drawing/2014/main" id="{9ACF7C50-9D84-B641-A53D-D9D2594EA9FF}"/>
+              <a16:creationId xmlns:a16="http://schemas.microsoft.com/office/drawing/2014/main" xmlns="" id="{9ACF7C50-9D84-B641-A53D-D9D2594EA9FF}"/>
             </a:ext>
           </a:extLst>
         </p:cNvPr>
@@ -4513,7 +5867,7 @@
           <p:cNvPr id="1751934005" name="Shape 0">
             <a:extLst>
               <a:ext uri="{FF2B5EF4-FFF2-40B4-BE49-F238E27FC236}">
-                <a16:creationId xmlns:a16="http://schemas.microsoft.com/office/drawing/2014/main" id="{6A4F5BD5-9604-E9CB-6BD2-A8E8942AEB7D}"/>
+                <a16:creationId xmlns:a16="http://schemas.microsoft.com/office/drawing/2014/main" xmlns="" id="{6A4F5BD5-9604-E9CB-6BD2-A8E8942AEB7D}"/>
               </a:ext>
             </a:extLst>
           </p:cNvPr>
@@ -4544,7 +5898,7 @@
           <p:cNvPr id="2010447823" name="Text 1">
             <a:extLst>
               <a:ext uri="{FF2B5EF4-FFF2-40B4-BE49-F238E27FC236}">
-                <a16:creationId xmlns:a16="http://schemas.microsoft.com/office/drawing/2014/main" id="{2D6D5F5A-999C-CC12-CF18-44913E921EDE}"/>
+                <a16:creationId xmlns:a16="http://schemas.microsoft.com/office/drawing/2014/main" xmlns="" id="{2D6D5F5A-999C-CC12-CF18-44913E921EDE}"/>
               </a:ext>
             </a:extLst>
           </p:cNvPr>
@@ -4592,7 +5946,7 @@
           <p:cNvPr id="1305221954" name="Text 2">
             <a:extLst>
               <a:ext uri="{FF2B5EF4-FFF2-40B4-BE49-F238E27FC236}">
-                <a16:creationId xmlns:a16="http://schemas.microsoft.com/office/drawing/2014/main" id="{B26211C5-B27B-B378-2AC8-AB148EC478B8}"/>
+                <a16:creationId xmlns:a16="http://schemas.microsoft.com/office/drawing/2014/main" xmlns="" id="{B26211C5-B27B-B378-2AC8-AB148EC478B8}"/>
               </a:ext>
             </a:extLst>
           </p:cNvPr>
@@ -4621,40 +5975,13 @@
               <a:defRPr/>
             </a:pPr>
             <a:r>
-              <a:rPr lang="en-US" sz="4450" dirty="0" err="1">
+              <a:rPr lang="ru-RU" sz="4450" dirty="0" smtClean="0">
                 <a:solidFill>
                   <a:srgbClr val="F3F3F2"/>
                 </a:solidFill>
                 <a:latin typeface="IBM Plex Sans Medium"/>
               </a:rPr>
-              <a:t>Кому</a:t>
-            </a:r>
-            <a:r>
-              <a:rPr lang="en-US" sz="4450" dirty="0">
-                <a:solidFill>
-                  <a:srgbClr val="F3F3F2"/>
-                </a:solidFill>
-                <a:latin typeface="IBM Plex Sans Medium"/>
-              </a:rPr>
-              <a:t> </a:t>
-            </a:r>
-            <a:r>
-              <a:rPr lang="en-US" sz="4450" dirty="0" err="1">
-                <a:solidFill>
-                  <a:srgbClr val="F3F3F2"/>
-                </a:solidFill>
-                <a:latin typeface="IBM Plex Sans Medium"/>
-              </a:rPr>
-              <a:t>полезен</a:t>
-            </a:r>
-            <a:r>
-              <a:rPr lang="en-US" sz="4450" dirty="0">
-                <a:solidFill>
-                  <a:srgbClr val="F3F3F2"/>
-                </a:solidFill>
-                <a:latin typeface="IBM Plex Sans Medium"/>
-              </a:rPr>
-              <a:t> Pixels?</a:t>
+              <a:t>Аудитория</a:t>
             </a:r>
             <a:endParaRPr lang="ru-RU" dirty="0"/>
           </a:p>
@@ -4662,10 +5989,10 @@
       </p:sp>
       <p:sp>
         <p:nvSpPr>
-          <p:cNvPr id="1402851431" name="Text 3">
+          <p:cNvPr id="2008858583" name="Text 4">
             <a:extLst>
               <a:ext uri="{FF2B5EF4-FFF2-40B4-BE49-F238E27FC236}">
-                <a16:creationId xmlns:a16="http://schemas.microsoft.com/office/drawing/2014/main" id="{66028260-E939-096A-5108-C495268A2093}"/>
+                <a16:creationId xmlns:a16="http://schemas.microsoft.com/office/drawing/2014/main" xmlns="" id="{9A9AE32F-2999-643B-7A80-FAA14E36BCB4}"/>
               </a:ext>
             </a:extLst>
           </p:cNvPr>
@@ -4674,8 +6001,8 @@
         </p:nvSpPr>
         <p:spPr bwMode="auto">
           <a:xfrm>
-            <a:off x="793790" y="3029776"/>
-            <a:ext cx="4385072" cy="425291"/>
+            <a:off x="793790" y="3010884"/>
+            <a:ext cx="11887040" cy="2523938"/>
           </a:xfrm>
           <a:prstGeom prst="rect">
             <a:avLst/>
@@ -4687,77 +6014,17 @@
           <a:bodyPr wrap="none" lIns="0" tIns="0" rIns="0" bIns="0" rtlCol="0" anchor="t"/>
           <a:lstStyle/>
           <a:p>
-            <a:pPr>
+            <a:pPr marL="285750" indent="-285750">
               <a:lnSpc>
-                <a:spcPts val="3300"/>
+                <a:spcPct val="150000"/>
               </a:lnSpc>
-              <a:defRPr/>
-            </a:pPr>
-            <a:r>
-              <a:rPr lang="en-US" sz="2650" dirty="0" err="1">
-                <a:solidFill>
-                  <a:srgbClr val="F3F3F2"/>
-                </a:solidFill>
-                <a:latin typeface="IBM Plex Sans Medium"/>
-              </a:rPr>
-              <a:t>Основные</a:t>
-            </a:r>
-            <a:r>
-              <a:rPr lang="en-US" sz="2650" dirty="0">
-                <a:solidFill>
-                  <a:srgbClr val="F3F3F2"/>
-                </a:solidFill>
-                <a:latin typeface="IBM Plex Sans Medium"/>
-              </a:rPr>
-              <a:t> </a:t>
-            </a:r>
-            <a:r>
-              <a:rPr lang="en-US" sz="2650" dirty="0" err="1">
-                <a:solidFill>
-                  <a:srgbClr val="F3F3F2"/>
-                </a:solidFill>
-                <a:latin typeface="IBM Plex Sans Medium"/>
-              </a:rPr>
-              <a:t>пользователи</a:t>
-            </a:r>
-          </a:p>
-        </p:txBody>
-      </p:sp>
-      <p:sp>
-        <p:nvSpPr>
-          <p:cNvPr id="2008858583" name="Text 4">
-            <a:extLst>
-              <a:ext uri="{FF2B5EF4-FFF2-40B4-BE49-F238E27FC236}">
-                <a16:creationId xmlns:a16="http://schemas.microsoft.com/office/drawing/2014/main" id="{9A9AE32F-2999-643B-7A80-FAA14E36BCB4}"/>
-              </a:ext>
-            </a:extLst>
-          </p:cNvPr>
-          <p:cNvSpPr/>
-          <p:nvPr/>
-        </p:nvSpPr>
-        <p:spPr bwMode="auto">
-          <a:xfrm>
-            <a:off x="788773" y="3524492"/>
-            <a:ext cx="8055044" cy="1174270"/>
-          </a:xfrm>
-          <a:prstGeom prst="rect">
-            <a:avLst/>
-          </a:prstGeom>
-          <a:noFill/>
-          <a:ln/>
-        </p:spPr>
-        <p:txBody>
-          <a:bodyPr wrap="none" lIns="0" tIns="0" rIns="0" bIns="0" rtlCol="0" anchor="t"/>
-          <a:lstStyle/>
-          <a:p>
-            <a:pPr marL="285750" indent="-285750">
               <a:buSzPct val="100000"/>
               <a:buFont typeface="Arial"/>
               <a:buChar char="•"/>
               <a:defRPr/>
             </a:pPr>
             <a:r>
-              <a:rPr lang="en-US" sz="1750" b="1" dirty="0">
+              <a:rPr lang="en-US" sz="2400" b="1" dirty="0">
                 <a:solidFill>
                   <a:srgbClr val="E7E1E4"/>
                 </a:solidFill>
@@ -4766,7 +6033,7 @@
               <a:t>Frontend-</a:t>
             </a:r>
             <a:r>
-              <a:rPr lang="en-US" sz="1750" b="1" err="1">
+              <a:rPr lang="en-US" sz="2400" b="1" dirty="0" err="1">
                 <a:solidFill>
                   <a:srgbClr val="E7E1E4"/>
                 </a:solidFill>
@@ -4775,7 +6042,7 @@
               <a:t>разработчики</a:t>
             </a:r>
             <a:r>
-              <a:rPr lang="en-US" sz="1750" b="1" dirty="0">
+              <a:rPr lang="en-US" sz="2400" b="1" dirty="0">
                 <a:solidFill>
                   <a:srgbClr val="E7E1E4"/>
                 </a:solidFill>
@@ -4784,7 +6051,7 @@
               <a:t>: </a:t>
             </a:r>
             <a:r>
-              <a:rPr lang="en-US" sz="1750" b="1" err="1">
+              <a:rPr lang="en-US" sz="2400" b="1" dirty="0" err="1">
                 <a:solidFill>
                   <a:srgbClr val="E7E1E4"/>
                 </a:solidFill>
@@ -4793,7 +6060,7 @@
               <a:t>создание</a:t>
             </a:r>
             <a:r>
-              <a:rPr lang="en-US" sz="1750" b="1" dirty="0">
+              <a:rPr lang="en-US" sz="2400" b="1" dirty="0">
                 <a:solidFill>
                   <a:srgbClr val="E7E1E4"/>
                 </a:solidFill>
@@ -4802,7 +6069,7 @@
               <a:t> </a:t>
             </a:r>
             <a:r>
-              <a:rPr lang="en-US" sz="1750" b="1" err="1">
+              <a:rPr lang="en-US" sz="2400" b="1" dirty="0" err="1">
                 <a:solidFill>
                   <a:srgbClr val="E7E1E4"/>
                 </a:solidFill>
@@ -4811,7 +6078,7 @@
               <a:t>иконок</a:t>
             </a:r>
             <a:r>
-              <a:rPr lang="en-US" sz="1750" b="1" dirty="0">
+              <a:rPr lang="en-US" sz="2400" b="1" dirty="0">
                 <a:solidFill>
                   <a:srgbClr val="E7E1E4"/>
                 </a:solidFill>
@@ -4820,7 +6087,7 @@
               <a:t> </a:t>
             </a:r>
             <a:r>
-              <a:rPr lang="en-US" sz="1750" b="1" err="1">
+              <a:rPr lang="en-US" sz="2400" b="1" dirty="0" err="1">
                 <a:solidFill>
                   <a:srgbClr val="E7E1E4"/>
                 </a:solidFill>
@@ -4829,7 +6096,7 @@
               <a:t>без</a:t>
             </a:r>
             <a:r>
-              <a:rPr lang="en-US" sz="1750" b="1" dirty="0">
+              <a:rPr lang="en-US" sz="2400" b="1" dirty="0">
                 <a:solidFill>
                   <a:srgbClr val="E7E1E4"/>
                 </a:solidFill>
@@ -4838,7 +6105,7 @@
               <a:t> </a:t>
             </a:r>
             <a:r>
-              <a:rPr lang="en-US" sz="1750" b="1" err="1">
+              <a:rPr lang="en-US" sz="2400" b="1" dirty="0" err="1">
                 <a:solidFill>
                   <a:srgbClr val="E7E1E4"/>
                 </a:solidFill>
@@ -4847,7 +6114,7 @@
               <a:t>лишних</a:t>
             </a:r>
             <a:r>
-              <a:rPr lang="en-US" sz="1750" b="1" dirty="0">
+              <a:rPr lang="en-US" sz="2400" b="1" dirty="0">
                 <a:solidFill>
                   <a:srgbClr val="E7E1E4"/>
                 </a:solidFill>
@@ -4856,7 +6123,7 @@
               <a:t> HTTP-</a:t>
             </a:r>
             <a:r>
-              <a:rPr lang="en-US" sz="1750" b="1" err="1">
+              <a:rPr lang="en-US" sz="2400" b="1" dirty="0" err="1">
                 <a:solidFill>
                   <a:srgbClr val="E7E1E4"/>
                 </a:solidFill>
@@ -4865,7 +6132,7 @@
               <a:t>запросов</a:t>
             </a:r>
             <a:r>
-              <a:rPr lang="en-US" sz="1750" b="1" dirty="0">
+              <a:rPr lang="en-US" sz="2400" b="1" dirty="0">
                 <a:solidFill>
                   <a:srgbClr val="E7E1E4"/>
                 </a:solidFill>
@@ -4873,7 +6140,7 @@
               </a:rPr>
               <a:t>.</a:t>
             </a:r>
-            <a:endParaRPr lang="ru-RU">
+            <a:endParaRPr lang="ru-RU" sz="2400" dirty="0">
               <a:solidFill>
                 <a:srgbClr val="E7E1E4"/>
               </a:solidFill>
@@ -4881,12 +6148,15 @@
           </a:p>
           <a:p>
             <a:pPr marL="285750" indent="-285750">
+              <a:lnSpc>
+                <a:spcPct val="150000"/>
+              </a:lnSpc>
               <a:buFont typeface="Arial"/>
               <a:buChar char="•"/>
               <a:defRPr/>
             </a:pPr>
             <a:r>
-              <a:rPr lang="en-US" sz="1750" b="1" dirty="0">
+              <a:rPr lang="en-US" sz="2400" b="1" dirty="0">
                 <a:solidFill>
                   <a:srgbClr val="E7E1E4"/>
                 </a:solidFill>
@@ -4895,7 +6165,7 @@
               <a:t>Web-</a:t>
             </a:r>
             <a:r>
-              <a:rPr lang="en-US" sz="1750" b="1" dirty="0" err="1">
+              <a:rPr lang="en-US" sz="2400" b="1" dirty="0" err="1">
                 <a:solidFill>
                   <a:srgbClr val="E7E1E4"/>
                 </a:solidFill>
@@ -4904,7 +6174,7 @@
               <a:t>дизайнеры</a:t>
             </a:r>
             <a:r>
-              <a:rPr lang="en-US" sz="1750" b="1" dirty="0">
+              <a:rPr lang="en-US" sz="2400" b="1" dirty="0">
                 <a:solidFill>
                   <a:srgbClr val="E7E1E4"/>
                 </a:solidFill>
@@ -4913,7 +6183,7 @@
               <a:t>: </a:t>
             </a:r>
             <a:r>
-              <a:rPr lang="en-US" sz="1750" b="1" dirty="0" err="1">
+              <a:rPr lang="en-US" sz="2400" b="1" dirty="0" err="1">
                 <a:solidFill>
                   <a:srgbClr val="E7E1E4"/>
                 </a:solidFill>
@@ -4922,7 +6192,7 @@
               <a:t>проектирование</a:t>
             </a:r>
             <a:r>
-              <a:rPr lang="en-US" sz="1750" b="1" dirty="0">
+              <a:rPr lang="en-US" sz="2400" b="1" dirty="0">
                 <a:solidFill>
                   <a:srgbClr val="E7E1E4"/>
                 </a:solidFill>
@@ -4931,7 +6201,7 @@
               <a:t> </a:t>
             </a:r>
             <a:r>
-              <a:rPr lang="en-US" sz="1750" b="1" dirty="0" err="1">
+              <a:rPr lang="en-US" sz="2400" b="1" dirty="0" err="1">
                 <a:solidFill>
                   <a:srgbClr val="E7E1E4"/>
                 </a:solidFill>
@@ -4940,7 +6210,7 @@
               <a:t>четкой</a:t>
             </a:r>
             <a:r>
-              <a:rPr lang="en-US" sz="1750" b="1" dirty="0">
+              <a:rPr lang="en-US" sz="2400" b="1" dirty="0">
                 <a:solidFill>
                   <a:srgbClr val="E7E1E4"/>
                 </a:solidFill>
@@ -4949,7 +6219,7 @@
               <a:t> и </a:t>
             </a:r>
             <a:r>
-              <a:rPr lang="en-US" sz="1750" b="1" dirty="0" err="1">
+              <a:rPr lang="en-US" sz="2400" b="1" dirty="0" err="1">
                 <a:solidFill>
                   <a:srgbClr val="E7E1E4"/>
                 </a:solidFill>
@@ -4958,7 +6228,7 @@
               <a:t>масштабируемой</a:t>
             </a:r>
             <a:r>
-              <a:rPr lang="en-US" sz="1750" b="1" dirty="0">
+              <a:rPr lang="en-US" sz="2400" b="1" dirty="0">
                 <a:solidFill>
                   <a:srgbClr val="E7E1E4"/>
                 </a:solidFill>
@@ -4967,7 +6237,7 @@
               <a:t> </a:t>
             </a:r>
             <a:r>
-              <a:rPr lang="en-US" sz="1750" b="1" dirty="0" err="1">
+              <a:rPr lang="en-US" sz="2400" b="1" dirty="0" err="1">
                 <a:solidFill>
                   <a:srgbClr val="E7E1E4"/>
                 </a:solidFill>
@@ -4976,7 +6246,7 @@
               <a:t>графики</a:t>
             </a:r>
             <a:r>
-              <a:rPr lang="en-US" sz="1750" b="1" dirty="0">
+              <a:rPr lang="en-US" sz="2400" b="1" dirty="0">
                 <a:solidFill>
                   <a:srgbClr val="E7E1E4"/>
                 </a:solidFill>
@@ -4987,12 +6257,15 @@
           </a:p>
           <a:p>
             <a:pPr marL="285750" indent="-285750">
+              <a:lnSpc>
+                <a:spcPct val="150000"/>
+              </a:lnSpc>
               <a:buFont typeface="Arial"/>
               <a:buChar char="•"/>
               <a:defRPr/>
             </a:pPr>
             <a:r>
-              <a:rPr lang="en-US" sz="1750" b="1" err="1">
+              <a:rPr lang="en-US" sz="2400" b="1" dirty="0" err="1">
                 <a:solidFill>
                   <a:srgbClr val="E7E1E4"/>
                 </a:solidFill>
@@ -5001,7 +6274,7 @@
               <a:t>Студенты</a:t>
             </a:r>
             <a:r>
-              <a:rPr lang="en-US" sz="1750" b="1" dirty="0">
+              <a:rPr lang="en-US" sz="2400" b="1" dirty="0">
                 <a:solidFill>
                   <a:srgbClr val="E7E1E4"/>
                 </a:solidFill>
@@ -5010,7 +6283,7 @@
               <a:t>: </a:t>
             </a:r>
             <a:r>
-              <a:rPr lang="en-US" sz="1750" b="1" err="1">
+              <a:rPr lang="en-US" sz="2400" b="1" dirty="0" err="1">
                 <a:solidFill>
                   <a:srgbClr val="E7E1E4"/>
                 </a:solidFill>
@@ -5019,7 +6292,7 @@
               <a:t>наглядное</a:t>
             </a:r>
             <a:r>
-              <a:rPr lang="en-US" sz="1750" b="1" dirty="0">
+              <a:rPr lang="en-US" sz="2400" b="1" dirty="0">
                 <a:solidFill>
                   <a:srgbClr val="E7E1E4"/>
                 </a:solidFill>
@@ -5028,7 +6301,7 @@
               <a:t> </a:t>
             </a:r>
             <a:r>
-              <a:rPr lang="en-US" sz="1750" b="1" err="1">
+              <a:rPr lang="en-US" sz="2400" b="1" dirty="0" err="1">
                 <a:solidFill>
                   <a:srgbClr val="E7E1E4"/>
                 </a:solidFill>
@@ -5037,7 +6310,7 @@
               <a:t>изучение</a:t>
             </a:r>
             <a:r>
-              <a:rPr lang="en-US" sz="1750" b="1" dirty="0">
+              <a:rPr lang="en-US" sz="2400" b="1" dirty="0">
                 <a:solidFill>
                   <a:srgbClr val="E7E1E4"/>
                 </a:solidFill>
@@ -5046,7 +6319,7 @@
               <a:t> </a:t>
             </a:r>
             <a:r>
-              <a:rPr lang="en-US" sz="1750" b="1" err="1">
+              <a:rPr lang="en-US" sz="2400" b="1" dirty="0" err="1">
                 <a:solidFill>
                   <a:srgbClr val="E7E1E4"/>
                 </a:solidFill>
@@ -5055,7 +6328,7 @@
               <a:t>работы</a:t>
             </a:r>
             <a:r>
-              <a:rPr lang="en-US" sz="1750" b="1" dirty="0">
+              <a:rPr lang="en-US" sz="2400" b="1" dirty="0">
                 <a:solidFill>
                   <a:srgbClr val="E7E1E4"/>
                 </a:solidFill>
@@ -5064,7 +6337,7 @@
               <a:t> </a:t>
             </a:r>
             <a:r>
-              <a:rPr lang="en-US" sz="1750" b="1" err="1">
+              <a:rPr lang="en-US" sz="2400" b="1" dirty="0" err="1">
                 <a:solidFill>
                   <a:srgbClr val="E7E1E4"/>
                 </a:solidFill>
@@ -5073,7 +6346,7 @@
               <a:t>координат</a:t>
             </a:r>
             <a:r>
-              <a:rPr lang="en-US" sz="1750" b="1" dirty="0">
+              <a:rPr lang="en-US" sz="2400" b="1" dirty="0">
                 <a:solidFill>
                   <a:srgbClr val="E7E1E4"/>
                 </a:solidFill>
@@ -5082,7 +6355,7 @@
               <a:t> и CSS-</a:t>
             </a:r>
             <a:r>
-              <a:rPr lang="en-US" sz="1750" b="1" err="1">
+              <a:rPr lang="en-US" sz="2400" b="1" dirty="0" err="1">
                 <a:solidFill>
                   <a:srgbClr val="E7E1E4"/>
                 </a:solidFill>
@@ -5091,7 +6364,7 @@
               <a:t>свойств</a:t>
             </a:r>
             <a:r>
-              <a:rPr lang="en-US" sz="1750" b="1" dirty="0">
+              <a:rPr lang="en-US" sz="2400" b="1" dirty="0">
                 <a:solidFill>
                   <a:srgbClr val="E7E1E4"/>
                 </a:solidFill>
@@ -5102,12 +6375,15 @@
           </a:p>
           <a:p>
             <a:pPr marL="285750" indent="-285750">
+              <a:lnSpc>
+                <a:spcPct val="150000"/>
+              </a:lnSpc>
               <a:buFont typeface="Arial"/>
               <a:buChar char="•"/>
               <a:defRPr/>
             </a:pPr>
             <a:r>
-              <a:rPr lang="en-US" sz="1750" b="1" err="1">
+              <a:rPr lang="en-US" sz="2400" b="1" dirty="0" err="1">
                 <a:solidFill>
                   <a:srgbClr val="E7E1E4"/>
                 </a:solidFill>
@@ -5116,7 +6392,7 @@
               <a:t>Инди-разработчики</a:t>
             </a:r>
             <a:r>
-              <a:rPr lang="en-US" sz="1750" b="1" dirty="0">
+              <a:rPr lang="en-US" sz="2400" b="1" dirty="0">
                 <a:solidFill>
                   <a:srgbClr val="E7E1E4"/>
                 </a:solidFill>
@@ -5125,7 +6401,7 @@
               <a:t>: </a:t>
             </a:r>
             <a:r>
-              <a:rPr lang="en-US" sz="1750" b="1" err="1">
+              <a:rPr lang="en-US" sz="2400" b="1" dirty="0" err="1">
                 <a:solidFill>
                   <a:srgbClr val="E7E1E4"/>
                 </a:solidFill>
@@ -5134,7 +6410,7 @@
               <a:t>быстрая</a:t>
             </a:r>
             <a:r>
-              <a:rPr lang="en-US" sz="1750" b="1" dirty="0">
+              <a:rPr lang="en-US" sz="2400" b="1" dirty="0">
                 <a:solidFill>
                   <a:srgbClr val="E7E1E4"/>
                 </a:solidFill>
@@ -5143,7 +6419,7 @@
               <a:t> </a:t>
             </a:r>
             <a:r>
-              <a:rPr lang="en-US" sz="1750" b="1" err="1">
+              <a:rPr lang="en-US" sz="2400" b="1" dirty="0" err="1">
                 <a:solidFill>
                   <a:srgbClr val="E7E1E4"/>
                 </a:solidFill>
@@ -5152,7 +6428,7 @@
               <a:t>генерация</a:t>
             </a:r>
             <a:r>
-              <a:rPr lang="en-US" sz="1750" b="1" dirty="0">
+              <a:rPr lang="en-US" sz="2400" b="1" dirty="0">
                 <a:solidFill>
                   <a:srgbClr val="E7E1E4"/>
                 </a:solidFill>
@@ -5161,7 +6437,7 @@
               <a:t> </a:t>
             </a:r>
             <a:r>
-              <a:rPr lang="en-US" sz="1750" b="1" err="1">
+              <a:rPr lang="en-US" sz="2400" b="1" dirty="0" err="1">
                 <a:solidFill>
                   <a:srgbClr val="E7E1E4"/>
                 </a:solidFill>
@@ -5170,7 +6446,7 @@
               <a:t>легких</a:t>
             </a:r>
             <a:r>
-              <a:rPr lang="en-US" sz="1750" b="1" dirty="0">
+              <a:rPr lang="en-US" sz="2400" b="1" dirty="0">
                 <a:solidFill>
                   <a:srgbClr val="E7E1E4"/>
                 </a:solidFill>
@@ -5179,7 +6455,7 @@
               <a:t> </a:t>
             </a:r>
             <a:r>
-              <a:rPr lang="en-US" sz="1750" b="1" err="1">
+              <a:rPr lang="en-US" sz="2400" b="1" dirty="0" err="1">
                 <a:solidFill>
                   <a:srgbClr val="E7E1E4"/>
                 </a:solidFill>
@@ -5188,7 +6464,7 @@
               <a:t>ассетов</a:t>
             </a:r>
             <a:r>
-              <a:rPr lang="en-US" sz="1750" b="1" dirty="0">
+              <a:rPr lang="en-US" sz="2400" b="1" dirty="0">
                 <a:solidFill>
                   <a:srgbClr val="E7E1E4"/>
                 </a:solidFill>
@@ -5197,7 +6473,7 @@
               <a:t> </a:t>
             </a:r>
             <a:r>
-              <a:rPr lang="en-US" sz="1750" b="1" err="1">
+              <a:rPr lang="en-US" sz="2400" b="1" dirty="0" err="1">
                 <a:solidFill>
                   <a:srgbClr val="E7E1E4"/>
                 </a:solidFill>
@@ -5206,7 +6482,7 @@
               <a:t>для</a:t>
             </a:r>
             <a:r>
-              <a:rPr lang="en-US" sz="1750" b="1" dirty="0">
+              <a:rPr lang="en-US" sz="2400" b="1" dirty="0">
                 <a:solidFill>
                   <a:srgbClr val="E7E1E4"/>
                 </a:solidFill>
@@ -5215,7 +6491,7 @@
               <a:t> </a:t>
             </a:r>
             <a:r>
-              <a:rPr lang="en-US" sz="1750" b="1" err="1">
+              <a:rPr lang="en-US" sz="2400" b="1" dirty="0" err="1">
                 <a:solidFill>
                   <a:srgbClr val="E7E1E4"/>
                 </a:solidFill>
@@ -5224,7 +6500,7 @@
               <a:t>веб-игр</a:t>
             </a:r>
             <a:r>
-              <a:rPr lang="en-US" sz="1750" b="1" dirty="0">
+              <a:rPr lang="en-US" sz="2400" b="1" dirty="0">
                 <a:solidFill>
                   <a:srgbClr val="E7E1E4"/>
                 </a:solidFill>
@@ -5240,7 +6516,7 @@
           <p:cNvPr id="1183227875" name="Рисунок 1183227874">
             <a:extLst>
               <a:ext uri="{FF2B5EF4-FFF2-40B4-BE49-F238E27FC236}">
-                <a16:creationId xmlns:a16="http://schemas.microsoft.com/office/drawing/2014/main" id="{1C9D4CF7-ED55-E4C0-3BC5-BAEF11B59DCC}"/>
+                <a16:creationId xmlns:a16="http://schemas.microsoft.com/office/drawing/2014/main" xmlns="" id="{1C9D4CF7-ED55-E4C0-3BC5-BAEF11B59DCC}"/>
               </a:ext>
             </a:extLst>
           </p:cNvPr>
@@ -5265,10 +6541,10 @@
       </p:pic>
       <p:sp>
         <p:nvSpPr>
-          <p:cNvPr id="2" name="Text 3">
+          <p:cNvPr id="3" name="Text 4">
             <a:extLst>
               <a:ext uri="{FF2B5EF4-FFF2-40B4-BE49-F238E27FC236}">
-                <a16:creationId xmlns:a16="http://schemas.microsoft.com/office/drawing/2014/main" id="{BAA19259-F3D1-80E2-3825-3DFBE91579EA}"/>
+                <a16:creationId xmlns:a16="http://schemas.microsoft.com/office/drawing/2014/main" xmlns="" id="{4BE62519-2CA8-F3B5-A41C-E00AD5A7FB73}"/>
               </a:ext>
             </a:extLst>
           </p:cNvPr>
@@ -5277,71 +6553,8 @@
         </p:nvSpPr>
         <p:spPr bwMode="auto">
           <a:xfrm>
-            <a:off x="793789" y="4858575"/>
-            <a:ext cx="4385072" cy="425291"/>
-          </a:xfrm>
-          <a:prstGeom prst="rect">
-            <a:avLst/>
-          </a:prstGeom>
-          <a:noFill/>
-          <a:ln/>
-        </p:spPr>
-        <p:txBody>
-          <a:bodyPr wrap="none" lIns="0" tIns="0" rIns="0" bIns="0" rtlCol="0" anchor="t"/>
-          <a:lstStyle/>
-          <a:p>
-            <a:pPr>
-              <a:lnSpc>
-                <a:spcPts val="3300"/>
-              </a:lnSpc>
-              <a:defRPr/>
-            </a:pPr>
-            <a:r>
-              <a:rPr lang="en-US" sz="2650" dirty="0" err="1">
-                <a:solidFill>
-                  <a:srgbClr val="F3F3F2"/>
-                </a:solidFill>
-                <a:latin typeface="IBM Plex Sans Medium"/>
-              </a:rPr>
-              <a:t>Основные</a:t>
-            </a:r>
-            <a:r>
-              <a:rPr lang="en-US" sz="2650" dirty="0">
-                <a:solidFill>
-                  <a:srgbClr val="F3F3F2"/>
-                </a:solidFill>
-                <a:latin typeface="IBM Plex Sans Medium"/>
-              </a:rPr>
-              <a:t> </a:t>
-            </a:r>
-            <a:r>
-              <a:rPr lang="en-US" sz="2650" dirty="0" err="1">
-                <a:solidFill>
-                  <a:srgbClr val="F3F3F2"/>
-                </a:solidFill>
-                <a:latin typeface="IBM Plex Sans Medium"/>
-              </a:rPr>
-              <a:t>пользователи</a:t>
-            </a:r>
-          </a:p>
-        </p:txBody>
-      </p:sp>
-      <p:sp>
-        <p:nvSpPr>
-          <p:cNvPr id="3" name="Text 4">
-            <a:extLst>
-              <a:ext uri="{FF2B5EF4-FFF2-40B4-BE49-F238E27FC236}">
-                <a16:creationId xmlns:a16="http://schemas.microsoft.com/office/drawing/2014/main" id="{4BE62519-2CA8-F3B5-A41C-E00AD5A7FB73}"/>
-              </a:ext>
-            </a:extLst>
-          </p:cNvPr>
-          <p:cNvSpPr/>
-          <p:nvPr/>
-        </p:nvSpPr>
-        <p:spPr bwMode="auto">
-          <a:xfrm>
-            <a:off x="788772" y="5282039"/>
-            <a:ext cx="10097598" cy="1423651"/>
+            <a:off x="686441" y="6393702"/>
+            <a:ext cx="13324043" cy="1423651"/>
           </a:xfrm>
           <a:prstGeom prst="rect">
             <a:avLst/>
@@ -5359,7 +6572,7 @@
               <a:defRPr/>
             </a:pPr>
             <a:r>
-              <a:rPr lang="en-US" sz="1750" err="1">
+              <a:rPr lang="en-US" sz="2400" dirty="0" err="1">
                 <a:solidFill>
                   <a:srgbClr val="E7E1E4"/>
                 </a:solidFill>
@@ -5368,7 +6581,7 @@
               <a:t>Соблюдена</a:t>
             </a:r>
             <a:r>
-              <a:rPr lang="en-US" sz="1750" dirty="0">
+              <a:rPr lang="en-US" sz="2400" dirty="0">
                 <a:solidFill>
                   <a:srgbClr val="E7E1E4"/>
                 </a:solidFill>
@@ -5377,7 +6590,7 @@
               <a:t> </a:t>
             </a:r>
             <a:r>
-              <a:rPr lang="en-US" sz="1750" err="1">
+              <a:rPr lang="en-US" sz="2400" dirty="0" err="1">
                 <a:solidFill>
                   <a:srgbClr val="E7E1E4"/>
                 </a:solidFill>
@@ -5386,16 +6599,34 @@
               <a:t>иерархия</a:t>
             </a:r>
             <a:r>
-              <a:rPr lang="en-US" sz="1750">
-                <a:solidFill>
-                  <a:srgbClr val="E7E1E4"/>
-                </a:solidFill>
-                <a:latin typeface="Roboto"/>
-              </a:rPr>
-              <a:t>: Заголовок и </a:t>
-            </a:r>
-            <a:r>
-              <a:rPr lang="en-US" sz="1750" err="1">
+              <a:rPr lang="en-US" sz="2400" dirty="0">
+                <a:solidFill>
+                  <a:srgbClr val="E7E1E4"/>
+                </a:solidFill>
+                <a:latin typeface="Roboto"/>
+              </a:rPr>
+              <a:t>: </a:t>
+            </a:r>
+            <a:r>
+              <a:rPr lang="en-US" sz="2400" dirty="0" err="1">
+                <a:solidFill>
+                  <a:srgbClr val="E7E1E4"/>
+                </a:solidFill>
+                <a:latin typeface="Roboto"/>
+              </a:rPr>
+              <a:t>Заголовок</a:t>
+            </a:r>
+            <a:r>
+              <a:rPr lang="en-US" sz="2400" dirty="0">
+                <a:solidFill>
+                  <a:srgbClr val="E7E1E4"/>
+                </a:solidFill>
+                <a:latin typeface="Roboto"/>
+              </a:rPr>
+              <a:t> и </a:t>
+            </a:r>
+            <a:r>
+              <a:rPr lang="en-US" sz="2400" dirty="0" err="1">
                 <a:solidFill>
                   <a:srgbClr val="E7E1E4"/>
                 </a:solidFill>
@@ -5404,7 +6635,7 @@
               <a:t>подзаголовок</a:t>
             </a:r>
             <a:r>
-              <a:rPr lang="en-US" sz="1750">
+              <a:rPr lang="en-US" sz="2400" dirty="0">
                 <a:solidFill>
                   <a:srgbClr val="E7E1E4"/>
                 </a:solidFill>
@@ -5413,7 +6644,7 @@
               <a:t> в </a:t>
             </a:r>
             <a:r>
-              <a:rPr lang="en-US" sz="1750" err="1">
+              <a:rPr lang="en-US" sz="2400" dirty="0" err="1">
                 <a:solidFill>
                   <a:srgbClr val="E7E1E4"/>
                 </a:solidFill>
@@ -5422,7 +6653,7 @@
               <a:t>вашем</a:t>
             </a:r>
             <a:r>
-              <a:rPr lang="en-US" sz="1750" dirty="0">
+              <a:rPr lang="en-US" sz="2400" dirty="0">
                 <a:solidFill>
                   <a:srgbClr val="E7E1E4"/>
                 </a:solidFill>
@@ -5431,7 +6662,7 @@
               <a:t> </a:t>
             </a:r>
             <a:r>
-              <a:rPr lang="en-US" sz="1750" err="1">
+              <a:rPr lang="en-US" sz="2400" dirty="0" err="1">
                 <a:solidFill>
                   <a:srgbClr val="E7E1E4"/>
                 </a:solidFill>
@@ -5440,7 +6671,7 @@
               <a:t>стиле</a:t>
             </a:r>
             <a:r>
-              <a:rPr lang="en-US" sz="1750">
+              <a:rPr lang="en-US" sz="2400" dirty="0">
                 <a:solidFill>
                   <a:srgbClr val="E7E1E4"/>
                 </a:solidFill>
@@ -5448,7 +6679,7 @@
               </a:rPr>
               <a:t>.</a:t>
             </a:r>
-            <a:endParaRPr lang="ru-RU" sz="1750">
+            <a:endParaRPr lang="ru-RU" sz="2400" dirty="0">
               <a:solidFill>
                 <a:srgbClr val="E7E1E4"/>
               </a:solidFill>
@@ -5461,7 +6692,7 @@
               <a:defRPr/>
             </a:pPr>
             <a:r>
-              <a:rPr lang="en-US" sz="1750" err="1">
+              <a:rPr lang="en-US" sz="2400" dirty="0" err="1">
                 <a:solidFill>
                   <a:srgbClr val="E7E1E4"/>
                 </a:solidFill>
@@ -5470,7 +6701,7 @@
               <a:t>Акцент</a:t>
             </a:r>
             <a:r>
-              <a:rPr lang="en-US" sz="1750" dirty="0">
+              <a:rPr lang="en-US" sz="2400" dirty="0">
                 <a:solidFill>
                   <a:srgbClr val="E7E1E4"/>
                 </a:solidFill>
@@ -5479,7 +6710,7 @@
               <a:t> </a:t>
             </a:r>
             <a:r>
-              <a:rPr lang="en-US" sz="1750" err="1">
+              <a:rPr lang="en-US" sz="2400" dirty="0" err="1">
                 <a:solidFill>
                   <a:srgbClr val="E7E1E4"/>
                 </a:solidFill>
@@ -5488,7 +6719,7 @@
               <a:t>на</a:t>
             </a:r>
             <a:r>
-              <a:rPr lang="en-US" sz="1750" dirty="0">
+              <a:rPr lang="en-US" sz="2400" dirty="0">
                 <a:solidFill>
                   <a:srgbClr val="E7E1E4"/>
                 </a:solidFill>
@@ -5497,7 +6728,7 @@
               <a:t> </a:t>
             </a:r>
             <a:r>
-              <a:rPr lang="en-US" sz="1750" err="1">
+              <a:rPr lang="en-US" sz="2400" dirty="0" err="1">
                 <a:solidFill>
                   <a:srgbClr val="E7E1E4"/>
                 </a:solidFill>
@@ -5506,7 +6737,7 @@
               <a:t>пользу</a:t>
             </a:r>
             <a:r>
-              <a:rPr lang="en-US" sz="1750" dirty="0">
+              <a:rPr lang="en-US" sz="2400" dirty="0">
                 <a:solidFill>
                   <a:srgbClr val="E7E1E4"/>
                 </a:solidFill>
@@ -5515,7 +6746,7 @@
               <a:t>: </a:t>
             </a:r>
             <a:r>
-              <a:rPr lang="en-US" sz="1750" err="1">
+              <a:rPr lang="en-US" sz="2400" dirty="0" err="1">
                 <a:solidFill>
                   <a:srgbClr val="E7E1E4"/>
                 </a:solidFill>
@@ -5524,7 +6755,7 @@
               <a:t>Сразу</a:t>
             </a:r>
             <a:r>
-              <a:rPr lang="en-US" sz="1750" dirty="0">
+              <a:rPr lang="en-US" sz="2400" dirty="0">
                 <a:solidFill>
                   <a:srgbClr val="E7E1E4"/>
                 </a:solidFill>
@@ -5533,7 +6764,7 @@
               <a:t> </a:t>
             </a:r>
             <a:r>
-              <a:rPr lang="en-US" sz="1750" err="1">
+              <a:rPr lang="en-US" sz="2400" dirty="0" err="1">
                 <a:solidFill>
                   <a:srgbClr val="E7E1E4"/>
                 </a:solidFill>
@@ -5542,7 +6773,7 @@
               <a:t>понятно</a:t>
             </a:r>
             <a:r>
-              <a:rPr lang="en-US" sz="1750" dirty="0">
+              <a:rPr lang="en-US" sz="2400" dirty="0">
                 <a:solidFill>
                   <a:srgbClr val="E7E1E4"/>
                 </a:solidFill>
@@ -5551,7 +6782,7 @@
               <a:t>, </a:t>
             </a:r>
             <a:r>
-              <a:rPr lang="en-US" sz="1750" err="1">
+              <a:rPr lang="en-US" sz="2400" dirty="0" err="1">
                 <a:solidFill>
                   <a:srgbClr val="E7E1E4"/>
                 </a:solidFill>
@@ -5560,7 +6791,7 @@
               <a:t>какую</a:t>
             </a:r>
             <a:r>
-              <a:rPr lang="en-US" sz="1750" dirty="0">
+              <a:rPr lang="en-US" sz="2400" dirty="0">
                 <a:solidFill>
                   <a:srgbClr val="E7E1E4"/>
                 </a:solidFill>
@@ -5569,7 +6800,7 @@
               <a:t> </a:t>
             </a:r>
             <a:r>
-              <a:rPr lang="en-US" sz="1750" err="1">
+              <a:rPr lang="en-US" sz="2400" dirty="0" err="1">
                 <a:solidFill>
                   <a:srgbClr val="E7E1E4"/>
                 </a:solidFill>
@@ -5578,7 +6809,7 @@
               <a:t>задачу</a:t>
             </a:r>
             <a:r>
-              <a:rPr lang="en-US" sz="1750" dirty="0">
+              <a:rPr lang="en-US" sz="2400" dirty="0">
                 <a:solidFill>
                   <a:srgbClr val="E7E1E4"/>
                 </a:solidFill>
@@ -5587,7 +6818,7 @@
               <a:t> </a:t>
             </a:r>
             <a:r>
-              <a:rPr lang="en-US" sz="1750" err="1">
+              <a:rPr lang="en-US" sz="2400" dirty="0" err="1">
                 <a:solidFill>
                   <a:srgbClr val="E7E1E4"/>
                 </a:solidFill>
@@ -5596,7 +6827,7 @@
               <a:t>решает</a:t>
             </a:r>
             <a:r>
-              <a:rPr lang="en-US" sz="1750" dirty="0">
+              <a:rPr lang="en-US" sz="2400" dirty="0">
                 <a:solidFill>
                   <a:srgbClr val="E7E1E4"/>
                 </a:solidFill>
@@ -5605,7 +6836,7 @@
               <a:t> </a:t>
             </a:r>
             <a:r>
-              <a:rPr lang="en-US" sz="1750" err="1">
+              <a:rPr lang="en-US" sz="2400" dirty="0" err="1">
                 <a:solidFill>
                   <a:srgbClr val="E7E1E4"/>
                 </a:solidFill>
@@ -5614,7 +6845,7 @@
               <a:t>инструмент</a:t>
             </a:r>
             <a:r>
-              <a:rPr lang="en-US" sz="1750" dirty="0">
+              <a:rPr lang="en-US" sz="2400" dirty="0">
                 <a:solidFill>
                   <a:srgbClr val="E7E1E4"/>
                 </a:solidFill>
@@ -5623,7 +6854,7 @@
               <a:t> </a:t>
             </a:r>
             <a:r>
-              <a:rPr lang="en-US" sz="1750" err="1">
+              <a:rPr lang="en-US" sz="2400" dirty="0" err="1">
                 <a:solidFill>
                   <a:srgbClr val="E7E1E4"/>
                 </a:solidFill>
@@ -5632,7 +6863,7 @@
               <a:t>для</a:t>
             </a:r>
             <a:r>
-              <a:rPr lang="en-US" sz="1750" dirty="0">
+              <a:rPr lang="en-US" sz="2400" dirty="0">
                 <a:solidFill>
                   <a:srgbClr val="E7E1E4"/>
                 </a:solidFill>
@@ -5641,7 +6872,7 @@
               <a:t> </a:t>
             </a:r>
             <a:r>
-              <a:rPr lang="en-US" sz="1750" err="1">
+              <a:rPr lang="en-US" sz="2400" dirty="0" err="1">
                 <a:solidFill>
                   <a:srgbClr val="E7E1E4"/>
                 </a:solidFill>
@@ -5650,7 +6881,7 @@
               <a:t>каждой</a:t>
             </a:r>
             <a:r>
-              <a:rPr lang="en-US" sz="1750" dirty="0">
+              <a:rPr lang="en-US" sz="2400" dirty="0">
                 <a:solidFill>
                   <a:srgbClr val="E7E1E4"/>
                 </a:solidFill>
@@ -5659,7 +6890,7 @@
               <a:t> </a:t>
             </a:r>
             <a:r>
-              <a:rPr lang="en-US" sz="1750" err="1">
+              <a:rPr lang="en-US" sz="2400" dirty="0" err="1">
                 <a:solidFill>
                   <a:srgbClr val="E7E1E4"/>
                 </a:solidFill>
@@ -5668,7 +6899,7 @@
               <a:t>группы</a:t>
             </a:r>
             <a:r>
-              <a:rPr lang="en-US" sz="1750" dirty="0">
+              <a:rPr lang="en-US" sz="2400" dirty="0">
                 <a:solidFill>
                   <a:srgbClr val="E7E1E4"/>
                 </a:solidFill>
@@ -5683,7 +6914,7 @@
               <a:defRPr/>
             </a:pPr>
             <a:r>
-              <a:rPr lang="en-US" sz="1750" err="1">
+              <a:rPr lang="en-US" sz="2400" dirty="0" err="1">
                 <a:solidFill>
                   <a:srgbClr val="E7E1E4"/>
                 </a:solidFill>
@@ -5692,7 +6923,7 @@
               <a:t>Визуальная</a:t>
             </a:r>
             <a:r>
-              <a:rPr lang="en-US" sz="1750" dirty="0">
+              <a:rPr lang="en-US" sz="2400" dirty="0">
                 <a:solidFill>
                   <a:srgbClr val="E7E1E4"/>
                 </a:solidFill>
@@ -5701,7 +6932,7 @@
               <a:t> </a:t>
             </a:r>
             <a:r>
-              <a:rPr lang="en-US" sz="1750" err="1">
+              <a:rPr lang="en-US" sz="2400" dirty="0" err="1">
                 <a:solidFill>
                   <a:srgbClr val="E7E1E4"/>
                 </a:solidFill>
@@ -5710,7 +6941,7 @@
               <a:t>чистота</a:t>
             </a:r>
             <a:r>
-              <a:rPr lang="en-US" sz="1750" dirty="0">
+              <a:rPr lang="en-US" sz="2400" dirty="0">
                 <a:solidFill>
                   <a:srgbClr val="E7E1E4"/>
                 </a:solidFill>
@@ -5719,7 +6950,7 @@
               <a:t>: </a:t>
             </a:r>
             <a:r>
-              <a:rPr lang="en-US" sz="1750" err="1">
+              <a:rPr lang="en-US" sz="2400" dirty="0" err="1">
                 <a:solidFill>
                   <a:srgbClr val="E7E1E4"/>
                 </a:solidFill>
@@ -5728,7 +6959,7 @@
               <a:t>Минимум</a:t>
             </a:r>
             <a:r>
-              <a:rPr lang="en-US" sz="1750" dirty="0">
+              <a:rPr lang="en-US" sz="2400" dirty="0">
                 <a:solidFill>
                   <a:srgbClr val="E7E1E4"/>
                 </a:solidFill>
@@ -5737,7 +6968,7 @@
               <a:t> </a:t>
             </a:r>
             <a:r>
-              <a:rPr lang="en-US" sz="1750" err="1">
+              <a:rPr lang="en-US" sz="2400" dirty="0" err="1">
                 <a:solidFill>
                   <a:srgbClr val="E7E1E4"/>
                 </a:solidFill>
@@ -5746,7 +6977,7 @@
               <a:t>текста</a:t>
             </a:r>
             <a:r>
-              <a:rPr lang="en-US" sz="1750" dirty="0">
+              <a:rPr lang="en-US" sz="2400" dirty="0">
                 <a:solidFill>
                   <a:srgbClr val="E7E1E4"/>
                 </a:solidFill>
@@ -5755,7 +6986,7 @@
               <a:t>, </a:t>
             </a:r>
             <a:r>
-              <a:rPr lang="en-US" sz="1750" err="1">
+              <a:rPr lang="en-US" sz="2400" dirty="0" err="1">
                 <a:solidFill>
                   <a:srgbClr val="E7E1E4"/>
                 </a:solidFill>
@@ -5764,7 +6995,7 @@
               <a:t>максимум</a:t>
             </a:r>
             <a:r>
-              <a:rPr lang="en-US" sz="1750" dirty="0">
+              <a:rPr lang="en-US" sz="2400" dirty="0">
                 <a:solidFill>
                   <a:srgbClr val="E7E1E4"/>
                 </a:solidFill>
@@ -5773,7 +7004,7 @@
               <a:t> </a:t>
             </a:r>
             <a:r>
-              <a:rPr lang="en-US" sz="1750" err="1">
+              <a:rPr lang="en-US" sz="2400" dirty="0" err="1">
                 <a:solidFill>
                   <a:srgbClr val="E7E1E4"/>
                 </a:solidFill>
@@ -5782,7 +7013,7 @@
               <a:t>смысла</a:t>
             </a:r>
             <a:r>
-              <a:rPr lang="en-US" sz="1750" dirty="0">
+              <a:rPr lang="en-US" sz="2400" dirty="0">
                 <a:solidFill>
                   <a:srgbClr val="E7E1E4"/>
                 </a:solidFill>
@@ -5791,7 +7022,7 @@
               <a:t> — </a:t>
             </a:r>
             <a:r>
-              <a:rPr lang="en-US" sz="1750" err="1">
+              <a:rPr lang="en-US" sz="2400" dirty="0" err="1">
                 <a:solidFill>
                   <a:srgbClr val="E7E1E4"/>
                 </a:solidFill>
@@ -5800,7 +7031,7 @@
               <a:t>как</a:t>
             </a:r>
             <a:r>
-              <a:rPr lang="en-US" sz="1750" dirty="0">
+              <a:rPr lang="en-US" sz="2400" dirty="0">
                 <a:solidFill>
                   <a:srgbClr val="E7E1E4"/>
                 </a:solidFill>
@@ -5809,7 +7040,7 @@
               <a:t> </a:t>
             </a:r>
             <a:r>
-              <a:rPr lang="en-US" sz="1750" err="1">
+              <a:rPr lang="en-US" sz="2400" dirty="0" err="1">
                 <a:solidFill>
                   <a:srgbClr val="E7E1E4"/>
                 </a:solidFill>
@@ -5818,7 +7049,7 @@
               <a:t>раз</a:t>
             </a:r>
             <a:r>
-              <a:rPr lang="en-US" sz="1750" dirty="0">
+              <a:rPr lang="en-US" sz="2400" dirty="0">
                 <a:solidFill>
                   <a:srgbClr val="E7E1E4"/>
                 </a:solidFill>
@@ -5827,7 +7058,7 @@
               <a:t> </a:t>
             </a:r>
             <a:r>
-              <a:rPr lang="en-US" sz="1750" err="1">
+              <a:rPr lang="en-US" sz="2400" dirty="0" err="1">
                 <a:solidFill>
                   <a:srgbClr val="E7E1E4"/>
                 </a:solidFill>
@@ -5836,7 +7067,7 @@
               <a:t>для</a:t>
             </a:r>
             <a:r>
-              <a:rPr lang="en-US" sz="1750" dirty="0">
+              <a:rPr lang="en-US" sz="2400" dirty="0">
                 <a:solidFill>
                   <a:srgbClr val="E7E1E4"/>
                 </a:solidFill>
@@ -5845,7 +7076,7 @@
               <a:t> </a:t>
             </a:r>
             <a:r>
-              <a:rPr lang="en-US" sz="1750" err="1">
+              <a:rPr lang="en-US" sz="2400" dirty="0" err="1">
                 <a:solidFill>
                   <a:srgbClr val="E7E1E4"/>
                 </a:solidFill>
@@ -5854,7 +7085,7 @@
               <a:t>копирования</a:t>
             </a:r>
             <a:r>
-              <a:rPr lang="en-US" sz="1750" dirty="0">
+              <a:rPr lang="en-US" sz="2400" dirty="0">
                 <a:solidFill>
                   <a:srgbClr val="E7E1E4"/>
                 </a:solidFill>
@@ -5862,8 +7093,37 @@
               </a:rPr>
               <a:t> </a:t>
             </a:r>
-            <a:r>
-              <a:rPr lang="en-US" sz="1750" err="1">
+            <a:endParaRPr lang="ru-RU" sz="2400" dirty="0" smtClean="0">
+              <a:solidFill>
+                <a:srgbClr val="E7E1E4"/>
+              </a:solidFill>
+              <a:latin typeface="Roboto"/>
+            </a:endParaRPr>
+          </a:p>
+          <a:p>
+            <a:pPr>
+              <a:defRPr/>
+            </a:pPr>
+            <a:r>
+              <a:rPr lang="ru-RU" sz="2400" dirty="0">
+                <a:solidFill>
+                  <a:srgbClr val="E7E1E4"/>
+                </a:solidFill>
+                <a:latin typeface="Roboto"/>
+              </a:rPr>
+              <a:t> </a:t>
+            </a:r>
+            <a:r>
+              <a:rPr lang="ru-RU" sz="2400" dirty="0" smtClean="0">
+                <a:solidFill>
+                  <a:srgbClr val="E7E1E4"/>
+                </a:solidFill>
+                <a:latin typeface="Roboto"/>
+              </a:rPr>
+              <a:t>   </a:t>
+            </a:r>
+            <a:r>
+              <a:rPr lang="en-US" sz="2400" dirty="0" err="1" smtClean="0">
                 <a:solidFill>
                   <a:srgbClr val="E7E1E4"/>
                 </a:solidFill>
@@ -5872,7 +7132,7 @@
               <a:t>структуры</a:t>
             </a:r>
             <a:r>
-              <a:rPr lang="en-US" sz="1750" dirty="0">
+              <a:rPr lang="en-US" sz="2400" dirty="0" smtClean="0">
                 <a:solidFill>
                   <a:srgbClr val="E7E1E4"/>
                 </a:solidFill>
@@ -5881,7 +7141,7 @@
               <a:t> </a:t>
             </a:r>
             <a:r>
-              <a:rPr lang="en-US" sz="1750" err="1">
+              <a:rPr lang="en-US" sz="2400" dirty="0" err="1">
                 <a:solidFill>
                   <a:srgbClr val="E7E1E4"/>
                 </a:solidFill>
@@ -5890,7 +7150,7 @@
               <a:t>вашего</a:t>
             </a:r>
             <a:r>
-              <a:rPr lang="en-US" sz="1750" dirty="0">
+              <a:rPr lang="en-US" sz="2400" dirty="0">
                 <a:solidFill>
                   <a:srgbClr val="E7E1E4"/>
                 </a:solidFill>
@@ -5899,7 +7159,7 @@
               <a:t> </a:t>
             </a:r>
             <a:r>
-              <a:rPr lang="en-US" sz="1750" err="1">
+              <a:rPr lang="en-US" sz="2400" dirty="0" err="1">
                 <a:solidFill>
                   <a:srgbClr val="E7E1E4"/>
                 </a:solidFill>
@@ -5908,7 +7168,7 @@
               <a:t>первого</a:t>
             </a:r>
             <a:r>
-              <a:rPr lang="en-US" sz="1750" dirty="0">
+              <a:rPr lang="en-US" sz="2400" dirty="0">
                 <a:solidFill>
                   <a:srgbClr val="E7E1E4"/>
                 </a:solidFill>
@@ -5917,7 +7177,7 @@
               <a:t> </a:t>
             </a:r>
             <a:r>
-              <a:rPr lang="en-US" sz="1750" err="1">
+              <a:rPr lang="en-US" sz="2400" dirty="0" err="1">
                 <a:solidFill>
                   <a:srgbClr val="E7E1E4"/>
                 </a:solidFill>
@@ -5926,7 +7186,7 @@
               <a:t>слайда</a:t>
             </a:r>
             <a:r>
-              <a:rPr lang="en-US" sz="1750" dirty="0">
+              <a:rPr lang="en-US" sz="2400" dirty="0">
                 <a:solidFill>
                   <a:srgbClr val="E7E1E4"/>
                 </a:solidFill>
@@ -5941,7 +7201,7 @@
               <a:buAutoNum type="arabicPeriod"/>
               <a:defRPr/>
             </a:pPr>
-            <a:endParaRPr lang="en-US" sz="1750" dirty="0">
+            <a:endParaRPr lang="en-US" sz="2400" dirty="0">
               <a:solidFill>
                 <a:srgbClr val="E7E1E4"/>
               </a:solidFill>
@@ -5964,6 +7224,925 @@
 </file>
 
 <file path=ppt/slides/slide5.xml><?xml version="1.0" encoding="utf-8"?>
+<p:sld xmlns:a="http://schemas.openxmlformats.org/drawingml/2006/main" xmlns:r="http://schemas.openxmlformats.org/officeDocument/2006/relationships" xmlns:p="http://schemas.openxmlformats.org/presentationml/2006/main" showMasterPhAnim="0">
+  <p:cSld>
+    <p:spTree>
+      <p:nvGrpSpPr>
+        <p:cNvPr id="1" name="">
+          <a:extLst>
+            <a:ext uri="{FF2B5EF4-FFF2-40B4-BE49-F238E27FC236}">
+              <a16:creationId xmlns:a16="http://schemas.microsoft.com/office/drawing/2014/main" xmlns="" id="{9ACF7C50-9D84-B641-A53D-D9D2594EA9FF}"/>
+            </a:ext>
+          </a:extLst>
+        </p:cNvPr>
+        <p:cNvGrpSpPr/>
+        <p:nvPr/>
+      </p:nvGrpSpPr>
+      <p:grpSpPr bwMode="auto">
+        <a:xfrm>
+          <a:off x="0" y="0"/>
+          <a:ext cx="0" cy="0"/>
+          <a:chOff x="0" y="0"/>
+          <a:chExt cx="0" cy="0"/>
+        </a:xfrm>
+      </p:grpSpPr>
+      <p:sp>
+        <p:nvSpPr>
+          <p:cNvPr id="1751934005" name="Shape 0">
+            <a:extLst>
+              <a:ext uri="{FF2B5EF4-FFF2-40B4-BE49-F238E27FC236}">
+                <a16:creationId xmlns:a16="http://schemas.microsoft.com/office/drawing/2014/main" xmlns="" id="{6A4F5BD5-9604-E9CB-6BD2-A8E8942AEB7D}"/>
+              </a:ext>
+            </a:extLst>
+          </p:cNvPr>
+          <p:cNvSpPr/>
+          <p:nvPr/>
+        </p:nvSpPr>
+        <p:spPr bwMode="auto">
+          <a:xfrm>
+            <a:off x="793790" y="1411818"/>
+            <a:ext cx="1742376" cy="417733"/>
+          </a:xfrm>
+          <a:prstGeom prst="roundRect">
+            <a:avLst>
+              <a:gd name="adj" fmla="val 6165"/>
+            </a:avLst>
+          </a:prstGeom>
+          <a:noFill/>
+          <a:ln w="7620">
+            <a:solidFill>
+              <a:srgbClr val="FFBC8F"/>
+            </a:solidFill>
+            <a:prstDash val="solid"/>
+          </a:ln>
+        </p:spPr>
+      </p:sp>
+      <p:sp>
+        <p:nvSpPr>
+          <p:cNvPr id="2010447823" name="Text 1">
+            <a:extLst>
+              <a:ext uri="{FF2B5EF4-FFF2-40B4-BE49-F238E27FC236}">
+                <a16:creationId xmlns:a16="http://schemas.microsoft.com/office/drawing/2014/main" xmlns="" id="{2D6D5F5A-999C-CC12-CF18-44913E921EDE}"/>
+              </a:ext>
+            </a:extLst>
+          </p:cNvPr>
+          <p:cNvSpPr/>
+          <p:nvPr/>
+        </p:nvSpPr>
+        <p:spPr bwMode="auto">
+          <a:xfrm>
+            <a:off x="937498" y="1523047"/>
+            <a:ext cx="852964" cy="290274"/>
+          </a:xfrm>
+          <a:prstGeom prst="rect">
+            <a:avLst/>
+          </a:prstGeom>
+          <a:noFill/>
+          <a:ln/>
+        </p:spPr>
+        <p:txBody>
+          <a:bodyPr wrap="none" lIns="0" tIns="0" rIns="0" bIns="0" rtlCol="0" anchor="t"/>
+          <a:lstStyle/>
+          <a:p>
+            <a:pPr marL="0" indent="0" algn="l">
+              <a:lnSpc>
+                <a:spcPts val="2250"/>
+              </a:lnSpc>
+              <a:buNone/>
+              <a:defRPr/>
+            </a:pPr>
+            <a:r>
+              <a:rPr lang="ru-RU" sz="1400" dirty="0" smtClean="0">
+                <a:solidFill>
+                  <a:srgbClr val="FFBC8F"/>
+                </a:solidFill>
+                <a:latin typeface="Roboto"/>
+                <a:ea typeface="Roboto"/>
+                <a:cs typeface="Roboto"/>
+              </a:rPr>
+              <a:t>ПРЕИМУЩЕСТВА</a:t>
+            </a:r>
+            <a:endParaRPr lang="en-US" sz="1400" dirty="0">
+              <a:solidFill>
+                <a:srgbClr val="FFBC8F"/>
+              </a:solidFill>
+              <a:latin typeface="Roboto"/>
+              <a:ea typeface="Roboto"/>
+              <a:cs typeface="Roboto"/>
+            </a:endParaRPr>
+          </a:p>
+        </p:txBody>
+      </p:sp>
+      <p:sp>
+        <p:nvSpPr>
+          <p:cNvPr id="1305221954" name="Text 2">
+            <a:extLst>
+              <a:ext uri="{FF2B5EF4-FFF2-40B4-BE49-F238E27FC236}">
+                <a16:creationId xmlns:a16="http://schemas.microsoft.com/office/drawing/2014/main" xmlns="" id="{B26211C5-B27B-B378-2AC8-AB148EC478B8}"/>
+              </a:ext>
+            </a:extLst>
+          </p:cNvPr>
+          <p:cNvSpPr/>
+          <p:nvPr/>
+        </p:nvSpPr>
+        <p:spPr bwMode="auto">
+          <a:xfrm>
+            <a:off x="793790" y="1979652"/>
+            <a:ext cx="11392853" cy="708779"/>
+          </a:xfrm>
+          <a:prstGeom prst="rect">
+            <a:avLst/>
+          </a:prstGeom>
+          <a:noFill/>
+          <a:ln/>
+        </p:spPr>
+        <p:txBody>
+          <a:bodyPr wrap="none" lIns="0" tIns="0" rIns="0" bIns="0" rtlCol="0" anchor="t"/>
+          <a:lstStyle/>
+          <a:p>
+            <a:pPr>
+              <a:lnSpc>
+                <a:spcPts val="5550"/>
+              </a:lnSpc>
+              <a:defRPr/>
+            </a:pPr>
+            <a:r>
+              <a:rPr lang="ru-RU" sz="4450" dirty="0" smtClean="0">
+                <a:solidFill>
+                  <a:srgbClr val="F3F3F2"/>
+                </a:solidFill>
+                <a:latin typeface="IBM Plex Sans Medium"/>
+              </a:rPr>
+              <a:t>Преимущества</a:t>
+            </a:r>
+            <a:endParaRPr lang="ru-RU" dirty="0"/>
+          </a:p>
+        </p:txBody>
+      </p:sp>
+      <p:pic>
+        <p:nvPicPr>
+          <p:cNvPr id="1183227875" name="Рисунок 1183227874">
+            <a:extLst>
+              <a:ext uri="{FF2B5EF4-FFF2-40B4-BE49-F238E27FC236}">
+                <a16:creationId xmlns:a16="http://schemas.microsoft.com/office/drawing/2014/main" xmlns="" id="{1C9D4CF7-ED55-E4C0-3BC5-BAEF11B59DCC}"/>
+              </a:ext>
+            </a:extLst>
+          </p:cNvPr>
+          <p:cNvPicPr>
+            <a:picLocks noChangeAspect="1"/>
+          </p:cNvPicPr>
+          <p:nvPr/>
+        </p:nvPicPr>
+        <p:blipFill rotWithShape="1">
+          <a:blip r:embed="rId3"/>
+          <a:stretch/>
+        </p:blipFill>
+        <p:spPr bwMode="auto">
+          <a:xfrm>
+            <a:off x="12337142" y="7540624"/>
+            <a:ext cx="2228850" cy="657225"/>
+          </a:xfrm>
+          <a:prstGeom prst="rect">
+            <a:avLst/>
+          </a:prstGeom>
+        </p:spPr>
+      </p:pic>
+      <p:sp>
+        <p:nvSpPr>
+          <p:cNvPr id="3" name="Text 4">
+            <a:extLst>
+              <a:ext uri="{FF2B5EF4-FFF2-40B4-BE49-F238E27FC236}">
+                <a16:creationId xmlns:a16="http://schemas.microsoft.com/office/drawing/2014/main" xmlns="" id="{4BE62519-2CA8-F3B5-A41C-E00AD5A7FB73}"/>
+              </a:ext>
+            </a:extLst>
+          </p:cNvPr>
+          <p:cNvSpPr/>
+          <p:nvPr/>
+        </p:nvSpPr>
+        <p:spPr bwMode="auto">
+          <a:xfrm>
+            <a:off x="686441" y="3236434"/>
+            <a:ext cx="13324043" cy="3078102"/>
+          </a:xfrm>
+          <a:prstGeom prst="rect">
+            <a:avLst/>
+          </a:prstGeom>
+          <a:noFill/>
+          <a:ln/>
+        </p:spPr>
+        <p:txBody>
+          <a:bodyPr wrap="none" lIns="0" tIns="0" rIns="0" bIns="0" rtlCol="0" anchor="t"/>
+          <a:lstStyle/>
+          <a:p>
+            <a:pPr marL="342900" indent="-342900">
+              <a:lnSpc>
+                <a:spcPct val="150000"/>
+              </a:lnSpc>
+              <a:buSzPct val="100000"/>
+              <a:buAutoNum type="arabicPeriod"/>
+              <a:defRPr/>
+            </a:pPr>
+            <a:r>
+              <a:rPr lang="en-US" sz="2400" dirty="0" err="1">
+                <a:solidFill>
+                  <a:srgbClr val="E7E1E4"/>
+                </a:solidFill>
+                <a:latin typeface="Roboto"/>
+              </a:rPr>
+              <a:t>Соблюдена</a:t>
+            </a:r>
+            <a:r>
+              <a:rPr lang="en-US" sz="2400" dirty="0">
+                <a:solidFill>
+                  <a:srgbClr val="E7E1E4"/>
+                </a:solidFill>
+                <a:latin typeface="Roboto"/>
+              </a:rPr>
+              <a:t> </a:t>
+            </a:r>
+            <a:r>
+              <a:rPr lang="en-US" sz="2400" dirty="0" err="1">
+                <a:solidFill>
+                  <a:srgbClr val="E7E1E4"/>
+                </a:solidFill>
+                <a:latin typeface="Roboto"/>
+              </a:rPr>
+              <a:t>иерархия</a:t>
+            </a:r>
+            <a:r>
+              <a:rPr lang="en-US" sz="2400" dirty="0">
+                <a:solidFill>
+                  <a:srgbClr val="E7E1E4"/>
+                </a:solidFill>
+                <a:latin typeface="Roboto"/>
+              </a:rPr>
+              <a:t>: </a:t>
+            </a:r>
+            <a:r>
+              <a:rPr lang="ru-RU" sz="2400" dirty="0" err="1">
+                <a:solidFill>
+                  <a:srgbClr val="E7E1E4"/>
+                </a:solidFill>
+                <a:latin typeface="Roboto"/>
+              </a:rPr>
+              <a:t>з</a:t>
+            </a:r>
+            <a:r>
+              <a:rPr lang="en-US" sz="2400" dirty="0" err="1" smtClean="0">
+                <a:solidFill>
+                  <a:srgbClr val="E7E1E4"/>
+                </a:solidFill>
+                <a:latin typeface="Roboto"/>
+              </a:rPr>
+              <a:t>аголовок</a:t>
+            </a:r>
+            <a:r>
+              <a:rPr lang="en-US" sz="2400" dirty="0" smtClean="0">
+                <a:solidFill>
+                  <a:srgbClr val="E7E1E4"/>
+                </a:solidFill>
+                <a:latin typeface="Roboto"/>
+              </a:rPr>
+              <a:t> </a:t>
+            </a:r>
+            <a:r>
+              <a:rPr lang="en-US" sz="2400" dirty="0">
+                <a:solidFill>
+                  <a:srgbClr val="E7E1E4"/>
+                </a:solidFill>
+                <a:latin typeface="Roboto"/>
+              </a:rPr>
+              <a:t>и </a:t>
+            </a:r>
+            <a:r>
+              <a:rPr lang="en-US" sz="2400" dirty="0" err="1">
+                <a:solidFill>
+                  <a:srgbClr val="E7E1E4"/>
+                </a:solidFill>
+                <a:latin typeface="Roboto"/>
+              </a:rPr>
+              <a:t>подзаголовок</a:t>
+            </a:r>
+            <a:r>
+              <a:rPr lang="en-US" sz="2400" dirty="0">
+                <a:solidFill>
+                  <a:srgbClr val="E7E1E4"/>
+                </a:solidFill>
+                <a:latin typeface="Roboto"/>
+              </a:rPr>
+              <a:t> в </a:t>
+            </a:r>
+            <a:r>
+              <a:rPr lang="en-US" sz="2400" dirty="0" err="1">
+                <a:solidFill>
+                  <a:srgbClr val="E7E1E4"/>
+                </a:solidFill>
+                <a:latin typeface="Roboto"/>
+              </a:rPr>
+              <a:t>вашем</a:t>
+            </a:r>
+            <a:r>
+              <a:rPr lang="en-US" sz="2400" dirty="0">
+                <a:solidFill>
+                  <a:srgbClr val="E7E1E4"/>
+                </a:solidFill>
+                <a:latin typeface="Roboto"/>
+              </a:rPr>
+              <a:t> </a:t>
+            </a:r>
+            <a:r>
+              <a:rPr lang="en-US" sz="2400" dirty="0" err="1">
+                <a:solidFill>
+                  <a:srgbClr val="E7E1E4"/>
+                </a:solidFill>
+                <a:latin typeface="Roboto"/>
+              </a:rPr>
+              <a:t>стиле</a:t>
+            </a:r>
+            <a:r>
+              <a:rPr lang="en-US" sz="2400" dirty="0">
+                <a:solidFill>
+                  <a:srgbClr val="E7E1E4"/>
+                </a:solidFill>
+                <a:latin typeface="Roboto"/>
+              </a:rPr>
+              <a:t>.</a:t>
+            </a:r>
+            <a:endParaRPr lang="ru-RU" sz="2400" dirty="0">
+              <a:solidFill>
+                <a:srgbClr val="E7E1E4"/>
+              </a:solidFill>
+              <a:latin typeface="Roboto"/>
+            </a:endParaRPr>
+          </a:p>
+          <a:p>
+            <a:pPr marL="342900" indent="-342900">
+              <a:lnSpc>
+                <a:spcPct val="150000"/>
+              </a:lnSpc>
+              <a:buAutoNum type="arabicPeriod"/>
+              <a:defRPr/>
+            </a:pPr>
+            <a:r>
+              <a:rPr lang="en-US" sz="2400" dirty="0" err="1">
+                <a:solidFill>
+                  <a:srgbClr val="E7E1E4"/>
+                </a:solidFill>
+                <a:latin typeface="Roboto"/>
+              </a:rPr>
+              <a:t>Акцент</a:t>
+            </a:r>
+            <a:r>
+              <a:rPr lang="en-US" sz="2400" dirty="0">
+                <a:solidFill>
+                  <a:srgbClr val="E7E1E4"/>
+                </a:solidFill>
+                <a:latin typeface="Roboto"/>
+              </a:rPr>
+              <a:t> </a:t>
+            </a:r>
+            <a:r>
+              <a:rPr lang="en-US" sz="2400" dirty="0" err="1">
+                <a:solidFill>
+                  <a:srgbClr val="E7E1E4"/>
+                </a:solidFill>
+                <a:latin typeface="Roboto"/>
+              </a:rPr>
+              <a:t>на</a:t>
+            </a:r>
+            <a:r>
+              <a:rPr lang="en-US" sz="2400" dirty="0">
+                <a:solidFill>
+                  <a:srgbClr val="E7E1E4"/>
+                </a:solidFill>
+                <a:latin typeface="Roboto"/>
+              </a:rPr>
+              <a:t> </a:t>
+            </a:r>
+            <a:r>
+              <a:rPr lang="en-US" sz="2400" dirty="0" err="1">
+                <a:solidFill>
+                  <a:srgbClr val="E7E1E4"/>
+                </a:solidFill>
+                <a:latin typeface="Roboto"/>
+              </a:rPr>
+              <a:t>пользу</a:t>
+            </a:r>
+            <a:r>
+              <a:rPr lang="en-US" sz="2400" dirty="0">
+                <a:solidFill>
+                  <a:srgbClr val="E7E1E4"/>
+                </a:solidFill>
+                <a:latin typeface="Roboto"/>
+              </a:rPr>
+              <a:t>: </a:t>
+            </a:r>
+            <a:r>
+              <a:rPr lang="ru-RU" sz="2400" dirty="0" err="1">
+                <a:solidFill>
+                  <a:srgbClr val="E7E1E4"/>
+                </a:solidFill>
+                <a:latin typeface="Roboto"/>
+              </a:rPr>
+              <a:t>с</a:t>
+            </a:r>
+            <a:r>
+              <a:rPr lang="en-US" sz="2400" dirty="0" err="1" smtClean="0">
+                <a:solidFill>
+                  <a:srgbClr val="E7E1E4"/>
+                </a:solidFill>
+                <a:latin typeface="Roboto"/>
+              </a:rPr>
+              <a:t>разу</a:t>
+            </a:r>
+            <a:r>
+              <a:rPr lang="en-US" sz="2400" dirty="0" smtClean="0">
+                <a:solidFill>
+                  <a:srgbClr val="E7E1E4"/>
+                </a:solidFill>
+                <a:latin typeface="Roboto"/>
+              </a:rPr>
+              <a:t> </a:t>
+            </a:r>
+            <a:r>
+              <a:rPr lang="en-US" sz="2400" dirty="0" err="1">
+                <a:solidFill>
+                  <a:srgbClr val="E7E1E4"/>
+                </a:solidFill>
+                <a:latin typeface="Roboto"/>
+              </a:rPr>
+              <a:t>понятно</a:t>
+            </a:r>
+            <a:r>
+              <a:rPr lang="en-US" sz="2400" dirty="0">
+                <a:solidFill>
+                  <a:srgbClr val="E7E1E4"/>
+                </a:solidFill>
+                <a:latin typeface="Roboto"/>
+              </a:rPr>
+              <a:t>, </a:t>
+            </a:r>
+            <a:r>
+              <a:rPr lang="en-US" sz="2400" dirty="0" err="1">
+                <a:solidFill>
+                  <a:srgbClr val="E7E1E4"/>
+                </a:solidFill>
+                <a:latin typeface="Roboto"/>
+              </a:rPr>
+              <a:t>какую</a:t>
+            </a:r>
+            <a:r>
+              <a:rPr lang="en-US" sz="2400" dirty="0">
+                <a:solidFill>
+                  <a:srgbClr val="E7E1E4"/>
+                </a:solidFill>
+                <a:latin typeface="Roboto"/>
+              </a:rPr>
+              <a:t> </a:t>
+            </a:r>
+            <a:r>
+              <a:rPr lang="en-US" sz="2400" dirty="0" err="1">
+                <a:solidFill>
+                  <a:srgbClr val="E7E1E4"/>
+                </a:solidFill>
+                <a:latin typeface="Roboto"/>
+              </a:rPr>
+              <a:t>задачу</a:t>
+            </a:r>
+            <a:r>
+              <a:rPr lang="en-US" sz="2400" dirty="0">
+                <a:solidFill>
+                  <a:srgbClr val="E7E1E4"/>
+                </a:solidFill>
+                <a:latin typeface="Roboto"/>
+              </a:rPr>
+              <a:t> </a:t>
+            </a:r>
+            <a:r>
+              <a:rPr lang="en-US" sz="2400" dirty="0" err="1">
+                <a:solidFill>
+                  <a:srgbClr val="E7E1E4"/>
+                </a:solidFill>
+                <a:latin typeface="Roboto"/>
+              </a:rPr>
+              <a:t>решает</a:t>
+            </a:r>
+            <a:r>
+              <a:rPr lang="en-US" sz="2400" dirty="0">
+                <a:solidFill>
+                  <a:srgbClr val="E7E1E4"/>
+                </a:solidFill>
+                <a:latin typeface="Roboto"/>
+              </a:rPr>
+              <a:t> </a:t>
+            </a:r>
+            <a:r>
+              <a:rPr lang="en-US" sz="2400" dirty="0" err="1">
+                <a:solidFill>
+                  <a:srgbClr val="E7E1E4"/>
+                </a:solidFill>
+                <a:latin typeface="Roboto"/>
+              </a:rPr>
+              <a:t>инструмент</a:t>
+            </a:r>
+            <a:r>
+              <a:rPr lang="en-US" sz="2400" dirty="0">
+                <a:solidFill>
+                  <a:srgbClr val="E7E1E4"/>
+                </a:solidFill>
+                <a:latin typeface="Roboto"/>
+              </a:rPr>
+              <a:t> </a:t>
+            </a:r>
+            <a:r>
+              <a:rPr lang="en-US" sz="2400" dirty="0" err="1">
+                <a:solidFill>
+                  <a:srgbClr val="E7E1E4"/>
+                </a:solidFill>
+                <a:latin typeface="Roboto"/>
+              </a:rPr>
+              <a:t>для</a:t>
+            </a:r>
+            <a:r>
+              <a:rPr lang="en-US" sz="2400" dirty="0">
+                <a:solidFill>
+                  <a:srgbClr val="E7E1E4"/>
+                </a:solidFill>
+                <a:latin typeface="Roboto"/>
+              </a:rPr>
+              <a:t> </a:t>
+            </a:r>
+            <a:r>
+              <a:rPr lang="en-US" sz="2400" dirty="0" err="1">
+                <a:solidFill>
+                  <a:srgbClr val="E7E1E4"/>
+                </a:solidFill>
+                <a:latin typeface="Roboto"/>
+              </a:rPr>
+              <a:t>каждой</a:t>
+            </a:r>
+            <a:r>
+              <a:rPr lang="en-US" sz="2400" dirty="0">
+                <a:solidFill>
+                  <a:srgbClr val="E7E1E4"/>
+                </a:solidFill>
+                <a:latin typeface="Roboto"/>
+              </a:rPr>
+              <a:t> </a:t>
+            </a:r>
+            <a:r>
+              <a:rPr lang="en-US" sz="2400" dirty="0" err="1">
+                <a:solidFill>
+                  <a:srgbClr val="E7E1E4"/>
+                </a:solidFill>
+                <a:latin typeface="Roboto"/>
+              </a:rPr>
+              <a:t>группы</a:t>
+            </a:r>
+            <a:r>
+              <a:rPr lang="en-US" sz="2400" dirty="0">
+                <a:solidFill>
+                  <a:srgbClr val="E7E1E4"/>
+                </a:solidFill>
+                <a:latin typeface="Roboto"/>
+              </a:rPr>
+              <a:t>.</a:t>
+            </a:r>
+          </a:p>
+          <a:p>
+            <a:pPr marL="342900" indent="-342900">
+              <a:lnSpc>
+                <a:spcPct val="150000"/>
+              </a:lnSpc>
+              <a:buAutoNum type="arabicPeriod"/>
+              <a:defRPr/>
+            </a:pPr>
+            <a:r>
+              <a:rPr lang="en-US" sz="2400" dirty="0" err="1">
+                <a:solidFill>
+                  <a:srgbClr val="E7E1E4"/>
+                </a:solidFill>
+                <a:latin typeface="Roboto"/>
+              </a:rPr>
+              <a:t>Визуальная</a:t>
+            </a:r>
+            <a:r>
+              <a:rPr lang="en-US" sz="2400" dirty="0">
+                <a:solidFill>
+                  <a:srgbClr val="E7E1E4"/>
+                </a:solidFill>
+                <a:latin typeface="Roboto"/>
+              </a:rPr>
+              <a:t> </a:t>
+            </a:r>
+            <a:r>
+              <a:rPr lang="en-US" sz="2400" dirty="0" err="1">
+                <a:solidFill>
+                  <a:srgbClr val="E7E1E4"/>
+                </a:solidFill>
+                <a:latin typeface="Roboto"/>
+              </a:rPr>
+              <a:t>чистота</a:t>
+            </a:r>
+            <a:r>
+              <a:rPr lang="en-US" sz="2400" dirty="0">
+                <a:solidFill>
+                  <a:srgbClr val="E7E1E4"/>
+                </a:solidFill>
+                <a:latin typeface="Roboto"/>
+              </a:rPr>
+              <a:t>: </a:t>
+            </a:r>
+            <a:r>
+              <a:rPr lang="ru-RU" sz="2400" dirty="0" err="1">
+                <a:solidFill>
+                  <a:srgbClr val="E7E1E4"/>
+                </a:solidFill>
+                <a:latin typeface="Roboto"/>
+              </a:rPr>
+              <a:t>м</a:t>
+            </a:r>
+            <a:r>
+              <a:rPr lang="en-US" sz="2400" dirty="0" err="1" smtClean="0">
+                <a:solidFill>
+                  <a:srgbClr val="E7E1E4"/>
+                </a:solidFill>
+                <a:latin typeface="Roboto"/>
+              </a:rPr>
+              <a:t>инимум</a:t>
+            </a:r>
+            <a:r>
+              <a:rPr lang="en-US" sz="2400" dirty="0" smtClean="0">
+                <a:solidFill>
+                  <a:srgbClr val="E7E1E4"/>
+                </a:solidFill>
+                <a:latin typeface="Roboto"/>
+              </a:rPr>
+              <a:t> </a:t>
+            </a:r>
+            <a:r>
+              <a:rPr lang="en-US" sz="2400" dirty="0" err="1">
+                <a:solidFill>
+                  <a:srgbClr val="E7E1E4"/>
+                </a:solidFill>
+                <a:latin typeface="Roboto"/>
+              </a:rPr>
+              <a:t>текста</a:t>
+            </a:r>
+            <a:r>
+              <a:rPr lang="en-US" sz="2400" dirty="0">
+                <a:solidFill>
+                  <a:srgbClr val="E7E1E4"/>
+                </a:solidFill>
+                <a:latin typeface="Roboto"/>
+              </a:rPr>
+              <a:t>, </a:t>
+            </a:r>
+            <a:r>
+              <a:rPr lang="en-US" sz="2400" dirty="0" err="1">
+                <a:solidFill>
+                  <a:srgbClr val="E7E1E4"/>
+                </a:solidFill>
+                <a:latin typeface="Roboto"/>
+              </a:rPr>
+              <a:t>максимум</a:t>
+            </a:r>
+            <a:r>
+              <a:rPr lang="en-US" sz="2400" dirty="0">
+                <a:solidFill>
+                  <a:srgbClr val="E7E1E4"/>
+                </a:solidFill>
+                <a:latin typeface="Roboto"/>
+              </a:rPr>
+              <a:t> </a:t>
+            </a:r>
+            <a:r>
+              <a:rPr lang="en-US" sz="2400" dirty="0" err="1">
+                <a:solidFill>
+                  <a:srgbClr val="E7E1E4"/>
+                </a:solidFill>
+                <a:latin typeface="Roboto"/>
+              </a:rPr>
+              <a:t>смысла</a:t>
+            </a:r>
+            <a:r>
+              <a:rPr lang="en-US" sz="2400" dirty="0">
+                <a:solidFill>
+                  <a:srgbClr val="E7E1E4"/>
+                </a:solidFill>
+                <a:latin typeface="Roboto"/>
+              </a:rPr>
+              <a:t> — </a:t>
+            </a:r>
+            <a:r>
+              <a:rPr lang="en-US" sz="2400" dirty="0" err="1">
+                <a:solidFill>
+                  <a:srgbClr val="E7E1E4"/>
+                </a:solidFill>
+                <a:latin typeface="Roboto"/>
+              </a:rPr>
+              <a:t>как</a:t>
+            </a:r>
+            <a:r>
+              <a:rPr lang="en-US" sz="2400" dirty="0">
+                <a:solidFill>
+                  <a:srgbClr val="E7E1E4"/>
+                </a:solidFill>
+                <a:latin typeface="Roboto"/>
+              </a:rPr>
+              <a:t> </a:t>
+            </a:r>
+            <a:r>
+              <a:rPr lang="en-US" sz="2400" dirty="0" err="1">
+                <a:solidFill>
+                  <a:srgbClr val="E7E1E4"/>
+                </a:solidFill>
+                <a:latin typeface="Roboto"/>
+              </a:rPr>
+              <a:t>раз</a:t>
+            </a:r>
+            <a:r>
+              <a:rPr lang="en-US" sz="2400" dirty="0">
+                <a:solidFill>
+                  <a:srgbClr val="E7E1E4"/>
+                </a:solidFill>
+                <a:latin typeface="Roboto"/>
+              </a:rPr>
+              <a:t> </a:t>
+            </a:r>
+            <a:r>
+              <a:rPr lang="en-US" sz="2400" dirty="0" err="1">
+                <a:solidFill>
+                  <a:srgbClr val="E7E1E4"/>
+                </a:solidFill>
+                <a:latin typeface="Roboto"/>
+              </a:rPr>
+              <a:t>для</a:t>
+            </a:r>
+            <a:r>
+              <a:rPr lang="en-US" sz="2400" dirty="0">
+                <a:solidFill>
+                  <a:srgbClr val="E7E1E4"/>
+                </a:solidFill>
+                <a:latin typeface="Roboto"/>
+              </a:rPr>
+              <a:t> </a:t>
+            </a:r>
+            <a:r>
+              <a:rPr lang="en-US" sz="2400" dirty="0" err="1">
+                <a:solidFill>
+                  <a:srgbClr val="E7E1E4"/>
+                </a:solidFill>
+                <a:latin typeface="Roboto"/>
+              </a:rPr>
+              <a:t>копирования</a:t>
+            </a:r>
+            <a:r>
+              <a:rPr lang="en-US" sz="2400" dirty="0">
+                <a:solidFill>
+                  <a:srgbClr val="E7E1E4"/>
+                </a:solidFill>
+                <a:latin typeface="Roboto"/>
+              </a:rPr>
+              <a:t> </a:t>
+            </a:r>
+            <a:endParaRPr lang="ru-RU" sz="2400" dirty="0" smtClean="0">
+              <a:solidFill>
+                <a:srgbClr val="E7E1E4"/>
+              </a:solidFill>
+              <a:latin typeface="Roboto"/>
+            </a:endParaRPr>
+          </a:p>
+          <a:p>
+            <a:pPr>
+              <a:lnSpc>
+                <a:spcPct val="150000"/>
+              </a:lnSpc>
+              <a:defRPr/>
+            </a:pPr>
+            <a:r>
+              <a:rPr lang="ru-RU" sz="2400" dirty="0">
+                <a:solidFill>
+                  <a:srgbClr val="E7E1E4"/>
+                </a:solidFill>
+                <a:latin typeface="Roboto"/>
+              </a:rPr>
+              <a:t> </a:t>
+            </a:r>
+            <a:r>
+              <a:rPr lang="ru-RU" sz="2400" dirty="0" smtClean="0">
+                <a:solidFill>
+                  <a:srgbClr val="E7E1E4"/>
+                </a:solidFill>
+                <a:latin typeface="Roboto"/>
+              </a:rPr>
+              <a:t>   </a:t>
+            </a:r>
+            <a:r>
+              <a:rPr lang="en-US" sz="2400" dirty="0" err="1" smtClean="0">
+                <a:solidFill>
+                  <a:srgbClr val="E7E1E4"/>
+                </a:solidFill>
+                <a:latin typeface="Roboto"/>
+              </a:rPr>
+              <a:t>структуры</a:t>
+            </a:r>
+            <a:r>
+              <a:rPr lang="en-US" sz="2400" dirty="0" smtClean="0">
+                <a:solidFill>
+                  <a:srgbClr val="E7E1E4"/>
+                </a:solidFill>
+                <a:latin typeface="Roboto"/>
+              </a:rPr>
+              <a:t> </a:t>
+            </a:r>
+            <a:r>
+              <a:rPr lang="en-US" sz="2400" dirty="0" err="1">
+                <a:solidFill>
+                  <a:srgbClr val="E7E1E4"/>
+                </a:solidFill>
+                <a:latin typeface="Roboto"/>
+              </a:rPr>
+              <a:t>вашего</a:t>
+            </a:r>
+            <a:r>
+              <a:rPr lang="en-US" sz="2400" dirty="0">
+                <a:solidFill>
+                  <a:srgbClr val="E7E1E4"/>
+                </a:solidFill>
+                <a:latin typeface="Roboto"/>
+              </a:rPr>
+              <a:t> </a:t>
+            </a:r>
+            <a:r>
+              <a:rPr lang="en-US" sz="2400" dirty="0" err="1">
+                <a:solidFill>
+                  <a:srgbClr val="E7E1E4"/>
+                </a:solidFill>
+                <a:latin typeface="Roboto"/>
+              </a:rPr>
+              <a:t>первого</a:t>
+            </a:r>
+            <a:r>
+              <a:rPr lang="en-US" sz="2400" dirty="0">
+                <a:solidFill>
+                  <a:srgbClr val="E7E1E4"/>
+                </a:solidFill>
+                <a:latin typeface="Roboto"/>
+              </a:rPr>
+              <a:t> </a:t>
+            </a:r>
+            <a:r>
+              <a:rPr lang="en-US" sz="2400" dirty="0" err="1">
+                <a:solidFill>
+                  <a:srgbClr val="E7E1E4"/>
+                </a:solidFill>
+                <a:latin typeface="Roboto"/>
+              </a:rPr>
+              <a:t>слайда</a:t>
+            </a:r>
+            <a:r>
+              <a:rPr lang="en-US" sz="2400" dirty="0">
+                <a:solidFill>
+                  <a:srgbClr val="E7E1E4"/>
+                </a:solidFill>
+                <a:latin typeface="Roboto"/>
+              </a:rPr>
+              <a:t>.</a:t>
+            </a:r>
+          </a:p>
+          <a:p>
+            <a:pPr marL="342900" indent="-342900">
+              <a:lnSpc>
+                <a:spcPct val="150000"/>
+              </a:lnSpc>
+              <a:buSzPct val="100000"/>
+              <a:buAutoNum type="arabicPeriod"/>
+              <a:defRPr/>
+            </a:pPr>
+            <a:endParaRPr lang="en-US" sz="2400" dirty="0">
+              <a:solidFill>
+                <a:srgbClr val="E7E1E4"/>
+              </a:solidFill>
+              <a:latin typeface="Roboto"/>
+            </a:endParaRPr>
+          </a:p>
+        </p:txBody>
+      </p:sp>
+    </p:spTree>
+    <p:extLst>
+      <p:ext uri="{BB962C8B-B14F-4D97-AF65-F5344CB8AC3E}">
+        <p14:creationId xmlns:p14="http://schemas.microsoft.com/office/powerpoint/2010/main" val="3656314696"/>
+      </p:ext>
+    </p:extLst>
+  </p:cSld>
+  <p:clrMapOvr>
+    <a:masterClrMapping/>
+  </p:clrMapOvr>
+</p:sld>
+</file>
+
+<file path=ppt/slides/slide6.xml><?xml version="1.0" encoding="utf-8"?>
 <p:sld xmlns:a="http://schemas.openxmlformats.org/drawingml/2006/main" xmlns:r="http://schemas.openxmlformats.org/officeDocument/2006/relationships" xmlns:p="http://schemas.openxmlformats.org/presentationml/2006/main" showMasterPhAnim="0">
   <p:cSld name="Slide 4">
     <p:spTree>
@@ -6736,7 +8915,7 @@
 </p:sld>
 </file>
 
-<file path=ppt/slides/slide6.xml><?xml version="1.0" encoding="utf-8"?>
+<file path=ppt/slides/slide7.xml><?xml version="1.0" encoding="utf-8"?>
 <p:sld xmlns:a="http://schemas.openxmlformats.org/drawingml/2006/main" xmlns:r="http://schemas.openxmlformats.org/officeDocument/2006/relationships" xmlns:p="http://schemas.openxmlformats.org/presentationml/2006/main" showMasterPhAnim="0">
   <p:cSld name="Slide 5">
     <p:spTree>
@@ -7654,7 +9833,7 @@
 </p:sld>
 </file>
 
-<file path=ppt/slides/slide7.xml><?xml version="1.0" encoding="utf-8"?>
+<file path=ppt/slides/slide8.xml><?xml version="1.0" encoding="utf-8"?>
 <p:sld xmlns:a="http://schemas.openxmlformats.org/drawingml/2006/main" xmlns:r="http://schemas.openxmlformats.org/officeDocument/2006/relationships" xmlns:p="http://schemas.openxmlformats.org/presentationml/2006/main" showMasterPhAnim="0">
   <p:cSld name="Slide 6">
     <p:spTree>
@@ -7726,7 +9905,7 @@
           <a:blip r:embed="rId3">
             <a:extLst>
               <a:ext uri="{96DAC541-7B7A-43D3-8B79-37D633B846F1}">
-                <asvg:svgBlip xmlns:asvg="http://schemas.microsoft.com/office/drawing/2016/SVG/main" r:embed="rId4"/>
+                <asvg:svgBlip xmlns:asvg="http://schemas.microsoft.com/office/drawing/2016/SVG/main" xmlns="" r:embed="rId4"/>
               </a:ext>
             </a:extLst>
           </a:blip>
@@ -7840,7 +10019,7 @@
           <a:blip r:embed="rId5">
             <a:extLst>
               <a:ext uri="{96DAC541-7B7A-43D3-8B79-37D633B846F1}">
-                <asvg:svgBlip xmlns:asvg="http://schemas.microsoft.com/office/drawing/2016/SVG/main" r:embed="rId6"/>
+                <asvg:svgBlip xmlns:asvg="http://schemas.microsoft.com/office/drawing/2016/SVG/main" xmlns="" r:embed="rId6"/>
               </a:ext>
             </a:extLst>
           </a:blip>
@@ -7954,7 +10133,7 @@
           <a:blip r:embed="rId7">
             <a:extLst>
               <a:ext uri="{96DAC541-7B7A-43D3-8B79-37D633B846F1}">
-                <asvg:svgBlip xmlns:asvg="http://schemas.microsoft.com/office/drawing/2016/SVG/main" r:embed="rId8"/>
+                <asvg:svgBlip xmlns:asvg="http://schemas.microsoft.com/office/drawing/2016/SVG/main" xmlns="" r:embed="rId8"/>
               </a:ext>
             </a:extLst>
           </a:blip>
@@ -8068,7 +10247,7 @@
           <a:blip r:embed="rId9">
             <a:extLst>
               <a:ext uri="{96DAC541-7B7A-43D3-8B79-37D633B846F1}">
-                <asvg:svgBlip xmlns:asvg="http://schemas.microsoft.com/office/drawing/2016/SVG/main" r:embed="rId10"/>
+                <asvg:svgBlip xmlns:asvg="http://schemas.microsoft.com/office/drawing/2016/SVG/main" xmlns="" r:embed="rId10"/>
               </a:ext>
             </a:extLst>
           </a:blip>
@@ -8200,7 +10379,7 @@
 </p:sld>
 </file>
 
-<file path=ppt/slides/slide8.xml><?xml version="1.0" encoding="utf-8"?>
+<file path=ppt/slides/slide9.xml><?xml version="1.0" encoding="utf-8"?>
 <p:sld xmlns:a="http://schemas.openxmlformats.org/drawingml/2006/main" xmlns:r="http://schemas.openxmlformats.org/officeDocument/2006/relationships" xmlns:p="http://schemas.openxmlformats.org/presentationml/2006/main" showMasterPhAnim="0">
   <p:cSld name="Slide 7">
     <p:spTree>
@@ -8872,638 +11051,6 @@
         <p:spPr bwMode="auto">
           <a:xfrm>
             <a:off x="12314464" y="7540941"/>
-            <a:ext cx="2228850" cy="657225"/>
-          </a:xfrm>
-          <a:prstGeom prst="rect">
-            <a:avLst/>
-          </a:prstGeom>
-        </p:spPr>
-      </p:pic>
-    </p:spTree>
-  </p:cSld>
-  <p:clrMapOvr>
-    <a:masterClrMapping/>
-  </p:clrMapOvr>
-</p:sld>
-</file>
-
-<file path=ppt/slides/slide9.xml><?xml version="1.0" encoding="utf-8"?>
-<p:sld xmlns:a="http://schemas.openxmlformats.org/drawingml/2006/main" xmlns:r="http://schemas.openxmlformats.org/officeDocument/2006/relationships" xmlns:p="http://schemas.openxmlformats.org/presentationml/2006/main" showMasterPhAnim="0">
-  <p:cSld name="Slide 8">
-    <p:spTree>
-      <p:nvGrpSpPr>
-        <p:cNvPr id="1" name=""/>
-        <p:cNvGrpSpPr/>
-        <p:nvPr/>
-      </p:nvGrpSpPr>
-      <p:grpSpPr bwMode="auto">
-        <a:xfrm>
-          <a:off x="0" y="0"/>
-          <a:ext cx="0" cy="0"/>
-          <a:chOff x="0" y="0"/>
-          <a:chExt cx="0" cy="0"/>
-        </a:xfrm>
-      </p:grpSpPr>
-      <p:sp>
-        <p:nvSpPr>
-          <p:cNvPr id="2115312480" name="Shape 0"/>
-          <p:cNvSpPr/>
-          <p:nvPr/>
-        </p:nvSpPr>
-        <p:spPr bwMode="auto">
-          <a:xfrm>
-            <a:off x="793790" y="1445895"/>
-            <a:ext cx="1152049" cy="441484"/>
-          </a:xfrm>
-          <a:prstGeom prst="roundRect">
-            <a:avLst>
-              <a:gd name="adj" fmla="val 6165"/>
-            </a:avLst>
-          </a:prstGeom>
-          <a:noFill/>
-          <a:ln w="7620">
-            <a:solidFill>
-              <a:srgbClr val="FFBC8F"/>
-            </a:solidFill>
-            <a:prstDash val="solid"/>
-          </a:ln>
-        </p:spPr>
-      </p:sp>
-      <p:sp>
-        <p:nvSpPr>
-          <p:cNvPr id="1255541461" name="Text 1"/>
-          <p:cNvSpPr/>
-          <p:nvPr/>
-        </p:nvSpPr>
-        <p:spPr bwMode="auto">
-          <a:xfrm>
-            <a:off x="937498" y="1521500"/>
-            <a:ext cx="864632" cy="290274"/>
-          </a:xfrm>
-          <a:prstGeom prst="rect">
-            <a:avLst/>
-          </a:prstGeom>
-          <a:noFill/>
-          <a:ln/>
-        </p:spPr>
-        <p:txBody>
-          <a:bodyPr wrap="none" lIns="0" tIns="0" rIns="0" bIns="0" rtlCol="0" anchor="t"/>
-          <a:lstStyle/>
-          <a:p>
-            <a:pPr marL="0" indent="0" algn="l">
-              <a:lnSpc>
-                <a:spcPts val="2250"/>
-              </a:lnSpc>
-              <a:buNone/>
-              <a:defRPr/>
-            </a:pPr>
-            <a:r>
-              <a:rPr lang="en-US" sz="1400">
-                <a:solidFill>
-                  <a:srgbClr val="FFBC8F"/>
-                </a:solidFill>
-                <a:latin typeface="Roboto"/>
-                <a:ea typeface="Roboto"/>
-                <a:cs typeface="Roboto"/>
-              </a:rPr>
-              <a:t>ROADMAP</a:t>
-            </a:r>
-            <a:endParaRPr lang="en-US" sz="1400"/>
-          </a:p>
-        </p:txBody>
-      </p:sp>
-      <p:sp>
-        <p:nvSpPr>
-          <p:cNvPr id="722931004" name="Text 2"/>
-          <p:cNvSpPr/>
-          <p:nvPr/>
-        </p:nvSpPr>
-        <p:spPr bwMode="auto">
-          <a:xfrm>
-            <a:off x="793790" y="1978104"/>
-            <a:ext cx="6802636" cy="708779"/>
-          </a:xfrm>
-          <a:prstGeom prst="rect">
-            <a:avLst/>
-          </a:prstGeom>
-          <a:noFill/>
-          <a:ln/>
-        </p:spPr>
-        <p:txBody>
-          <a:bodyPr wrap="none" lIns="0" tIns="0" rIns="0" bIns="0" rtlCol="0" anchor="t"/>
-          <a:lstStyle/>
-          <a:p>
-            <a:pPr marL="0" indent="0" algn="l">
-              <a:lnSpc>
-                <a:spcPts val="5550"/>
-              </a:lnSpc>
-              <a:buNone/>
-              <a:defRPr/>
-            </a:pPr>
-            <a:r>
-              <a:rPr lang="en-US" sz="4450">
-                <a:solidFill>
-                  <a:srgbClr val="F3F3F2"/>
-                </a:solidFill>
-                <a:latin typeface="IBM Plex Sans Medium"/>
-                <a:ea typeface="IBM Plex Sans Medium"/>
-                <a:cs typeface="IBM Plex Sans Medium"/>
-              </a:rPr>
-              <a:t>Планы развития проекта</a:t>
-            </a:r>
-            <a:endParaRPr lang="en-US" sz="4450"/>
-          </a:p>
-        </p:txBody>
-      </p:sp>
-      <p:sp>
-        <p:nvSpPr>
-          <p:cNvPr id="138181191" name="Shape 3"/>
-          <p:cNvSpPr/>
-          <p:nvPr/>
-        </p:nvSpPr>
-        <p:spPr bwMode="auto">
-          <a:xfrm>
-            <a:off x="1133951" y="3934301"/>
-            <a:ext cx="3856077" cy="226814"/>
-          </a:xfrm>
-          <a:prstGeom prst="roundRect">
-            <a:avLst>
-              <a:gd name="adj" fmla="val 15001"/>
-            </a:avLst>
-          </a:prstGeom>
-          <a:solidFill>
-            <a:srgbClr val="484B51"/>
-          </a:solidFill>
-          <a:ln/>
-        </p:spPr>
-      </p:sp>
-      <p:sp>
-        <p:nvSpPr>
-          <p:cNvPr id="102757948" name="Shape 4"/>
-          <p:cNvSpPr/>
-          <p:nvPr/>
-        </p:nvSpPr>
-        <p:spPr bwMode="auto">
-          <a:xfrm>
-            <a:off x="793790" y="3707428"/>
-            <a:ext cx="680441" cy="680441"/>
-          </a:xfrm>
-          <a:prstGeom prst="roundRect">
-            <a:avLst>
-              <a:gd name="adj" fmla="val 67192"/>
-            </a:avLst>
-          </a:prstGeom>
-          <a:solidFill>
-            <a:srgbClr val="484B51"/>
-          </a:solidFill>
-          <a:ln/>
-        </p:spPr>
-      </p:sp>
-      <p:pic>
-        <p:nvPicPr>
-          <p:cNvPr id="77162530" name="Image 0" descr="preencoded.png"/>
-          <p:cNvPicPr>
-            <a:picLocks noChangeAspect="1"/>
-          </p:cNvPicPr>
-          <p:nvPr/>
-        </p:nvPicPr>
-        <p:blipFill rotWithShape="1">
-          <a:blip r:embed="rId3">
-            <a:extLst>
-              <a:ext uri="{96DAC541-7B7A-43D3-8B79-37D633B846F1}">
-                <asvg:svgBlip xmlns:asvg="http://schemas.microsoft.com/office/drawing/2016/SVG/main" r:embed="rId4"/>
-              </a:ext>
-            </a:extLst>
-          </a:blip>
-          <a:stretch/>
-        </p:blipFill>
-        <p:spPr bwMode="auto">
-          <a:xfrm>
-            <a:off x="963930" y="3877568"/>
-            <a:ext cx="340162" cy="340162"/>
-          </a:xfrm>
-          <a:prstGeom prst="rect">
-            <a:avLst/>
-          </a:prstGeom>
-        </p:spPr>
-      </p:pic>
-      <p:sp>
-        <p:nvSpPr>
-          <p:cNvPr id="1633818275" name="Text 5"/>
-          <p:cNvSpPr/>
-          <p:nvPr/>
-        </p:nvSpPr>
-        <p:spPr bwMode="auto">
-          <a:xfrm>
-            <a:off x="1020604" y="4614743"/>
-            <a:ext cx="2835235" cy="354330"/>
-          </a:xfrm>
-          <a:prstGeom prst="rect">
-            <a:avLst/>
-          </a:prstGeom>
-          <a:noFill/>
-          <a:ln/>
-        </p:spPr>
-        <p:txBody>
-          <a:bodyPr wrap="none" lIns="0" tIns="0" rIns="0" bIns="0" rtlCol="0" anchor="t"/>
-          <a:lstStyle/>
-          <a:p>
-            <a:pPr marL="0" indent="0" algn="l">
-              <a:lnSpc>
-                <a:spcPts val="2750"/>
-              </a:lnSpc>
-              <a:buNone/>
-              <a:defRPr/>
-            </a:pPr>
-            <a:r>
-              <a:rPr lang="en-US" sz="2200">
-                <a:solidFill>
-                  <a:srgbClr val="D4D4D1"/>
-                </a:solidFill>
-                <a:latin typeface="IBM Plex Sans Medium"/>
-                <a:ea typeface="IBM Plex Sans Medium"/>
-                <a:cs typeface="IBM Plex Sans Medium"/>
-              </a:rPr>
-              <a:t>LocalStorage API</a:t>
-            </a:r>
-            <a:endParaRPr lang="en-US" sz="2200"/>
-          </a:p>
-        </p:txBody>
-      </p:sp>
-      <p:sp>
-        <p:nvSpPr>
-          <p:cNvPr id="730369214" name="Text 6"/>
-          <p:cNvSpPr/>
-          <p:nvPr/>
-        </p:nvSpPr>
-        <p:spPr bwMode="auto">
-          <a:xfrm>
-            <a:off x="1020604" y="5105162"/>
-            <a:ext cx="3742730" cy="1451610"/>
-          </a:xfrm>
-          <a:prstGeom prst="rect">
-            <a:avLst/>
-          </a:prstGeom>
-          <a:noFill/>
-          <a:ln/>
-        </p:spPr>
-        <p:txBody>
-          <a:bodyPr wrap="square" lIns="0" tIns="0" rIns="0" bIns="0" rtlCol="0" anchor="t"/>
-          <a:lstStyle/>
-          <a:p>
-            <a:pPr marL="0" indent="0" algn="l">
-              <a:lnSpc>
-                <a:spcPts val="2850"/>
-              </a:lnSpc>
-              <a:buNone/>
-              <a:defRPr/>
-            </a:pPr>
-            <a:r>
-              <a:rPr lang="en-US" sz="1750">
-                <a:solidFill>
-                  <a:srgbClr val="D4D4D1"/>
-                </a:solidFill>
-                <a:latin typeface="Roboto"/>
-                <a:ea typeface="Roboto"/>
-                <a:cs typeface="Roboto"/>
-              </a:rPr>
-              <a:t>Сохранение работ пользователя в браузере для возможности продолжить рисование позже без потери данных</a:t>
-            </a:r>
-            <a:endParaRPr lang="en-US" sz="1750"/>
-          </a:p>
-        </p:txBody>
-      </p:sp>
-      <p:sp>
-        <p:nvSpPr>
-          <p:cNvPr id="918102026" name="Shape 7"/>
-          <p:cNvSpPr/>
-          <p:nvPr/>
-        </p:nvSpPr>
-        <p:spPr bwMode="auto">
-          <a:xfrm>
-            <a:off x="5557123" y="3594021"/>
-            <a:ext cx="3856077" cy="226814"/>
-          </a:xfrm>
-          <a:prstGeom prst="roundRect">
-            <a:avLst>
-              <a:gd name="adj" fmla="val 15001"/>
-            </a:avLst>
-          </a:prstGeom>
-          <a:solidFill>
-            <a:srgbClr val="484B51"/>
-          </a:solidFill>
-          <a:ln/>
-        </p:spPr>
-      </p:sp>
-      <p:sp>
-        <p:nvSpPr>
-          <p:cNvPr id="1134242864" name="Shape 8"/>
-          <p:cNvSpPr/>
-          <p:nvPr/>
-        </p:nvSpPr>
-        <p:spPr bwMode="auto">
-          <a:xfrm>
-            <a:off x="5216962" y="3367147"/>
-            <a:ext cx="680441" cy="680441"/>
-          </a:xfrm>
-          <a:prstGeom prst="roundRect">
-            <a:avLst>
-              <a:gd name="adj" fmla="val 67192"/>
-            </a:avLst>
-          </a:prstGeom>
-          <a:solidFill>
-            <a:srgbClr val="484B51"/>
-          </a:solidFill>
-          <a:ln/>
-        </p:spPr>
-      </p:sp>
-      <p:pic>
-        <p:nvPicPr>
-          <p:cNvPr id="697474661" name="Image 1" descr="preencoded.png"/>
-          <p:cNvPicPr>
-            <a:picLocks noChangeAspect="1"/>
-          </p:cNvPicPr>
-          <p:nvPr/>
-        </p:nvPicPr>
-        <p:blipFill rotWithShape="1">
-          <a:blip r:embed="rId5">
-            <a:extLst>
-              <a:ext uri="{96DAC541-7B7A-43D3-8B79-37D633B846F1}">
-                <asvg:svgBlip xmlns:asvg="http://schemas.microsoft.com/office/drawing/2016/SVG/main" r:embed="rId6"/>
-              </a:ext>
-            </a:extLst>
-          </a:blip>
-          <a:stretch/>
-        </p:blipFill>
-        <p:spPr bwMode="auto">
-          <a:xfrm>
-            <a:off x="5387102" y="3537287"/>
-            <a:ext cx="340162" cy="340162"/>
-          </a:xfrm>
-          <a:prstGeom prst="rect">
-            <a:avLst/>
-          </a:prstGeom>
-        </p:spPr>
-      </p:pic>
-      <p:sp>
-        <p:nvSpPr>
-          <p:cNvPr id="2104012764" name="Text 9"/>
-          <p:cNvSpPr/>
-          <p:nvPr/>
-        </p:nvSpPr>
-        <p:spPr bwMode="auto">
-          <a:xfrm>
-            <a:off x="5443776" y="4274463"/>
-            <a:ext cx="2835235" cy="354330"/>
-          </a:xfrm>
-          <a:prstGeom prst="rect">
-            <a:avLst/>
-          </a:prstGeom>
-          <a:noFill/>
-          <a:ln/>
-        </p:spPr>
-        <p:txBody>
-          <a:bodyPr wrap="none" lIns="0" tIns="0" rIns="0" bIns="0" rtlCol="0" anchor="t"/>
-          <a:lstStyle/>
-          <a:p>
-            <a:pPr marL="0" indent="0" algn="l">
-              <a:lnSpc>
-                <a:spcPts val="2750"/>
-              </a:lnSpc>
-              <a:buNone/>
-              <a:defRPr/>
-            </a:pPr>
-            <a:r>
-              <a:rPr lang="en-US" sz="2200">
-                <a:solidFill>
-                  <a:srgbClr val="D4D4D1"/>
-                </a:solidFill>
-                <a:latin typeface="IBM Plex Sans Medium"/>
-                <a:ea typeface="IBM Plex Sans Medium"/>
-                <a:cs typeface="IBM Plex Sans Medium"/>
-              </a:rPr>
-              <a:t>CSS Animations</a:t>
-            </a:r>
-            <a:endParaRPr lang="en-US" sz="2200"/>
-          </a:p>
-        </p:txBody>
-      </p:sp>
-      <p:sp>
-        <p:nvSpPr>
-          <p:cNvPr id="615366454" name="Text 10"/>
-          <p:cNvSpPr/>
-          <p:nvPr/>
-        </p:nvSpPr>
-        <p:spPr bwMode="auto">
-          <a:xfrm>
-            <a:off x="5443776" y="4764881"/>
-            <a:ext cx="3742730" cy="1451610"/>
-          </a:xfrm>
-          <a:prstGeom prst="rect">
-            <a:avLst/>
-          </a:prstGeom>
-          <a:noFill/>
-          <a:ln/>
-        </p:spPr>
-        <p:txBody>
-          <a:bodyPr wrap="square" lIns="0" tIns="0" rIns="0" bIns="0" rtlCol="0" anchor="t"/>
-          <a:lstStyle/>
-          <a:p>
-            <a:pPr marL="0" indent="0" algn="l">
-              <a:lnSpc>
-                <a:spcPts val="2850"/>
-              </a:lnSpc>
-              <a:buNone/>
-              <a:defRPr/>
-            </a:pPr>
-            <a:r>
-              <a:rPr lang="en-US" sz="1750">
-                <a:solidFill>
-                  <a:srgbClr val="D4D4D1"/>
-                </a:solidFill>
-                <a:latin typeface="Roboto"/>
-                <a:ea typeface="Roboto"/>
-                <a:cs typeface="Roboto"/>
-              </a:rPr>
-              <a:t>Генерация @keyframes для создания анимированных спрайтов с покадровой сменой box-shadow</a:t>
-            </a:r>
-            <a:endParaRPr lang="en-US" sz="1750"/>
-          </a:p>
-        </p:txBody>
-      </p:sp>
-      <p:sp>
-        <p:nvSpPr>
-          <p:cNvPr id="1730386070" name="Shape 11"/>
-          <p:cNvSpPr/>
-          <p:nvPr/>
-        </p:nvSpPr>
-        <p:spPr bwMode="auto">
-          <a:xfrm>
-            <a:off x="9980295" y="3253859"/>
-            <a:ext cx="3856077" cy="226814"/>
-          </a:xfrm>
-          <a:prstGeom prst="roundRect">
-            <a:avLst>
-              <a:gd name="adj" fmla="val 15001"/>
-            </a:avLst>
-          </a:prstGeom>
-          <a:solidFill>
-            <a:srgbClr val="484B51"/>
-          </a:solidFill>
-          <a:ln/>
-        </p:spPr>
-      </p:sp>
-      <p:sp>
-        <p:nvSpPr>
-          <p:cNvPr id="1692837634" name="Shape 12"/>
-          <p:cNvSpPr/>
-          <p:nvPr/>
-        </p:nvSpPr>
-        <p:spPr bwMode="auto">
-          <a:xfrm>
-            <a:off x="9640133" y="3026985"/>
-            <a:ext cx="680441" cy="680441"/>
-          </a:xfrm>
-          <a:prstGeom prst="roundRect">
-            <a:avLst>
-              <a:gd name="adj" fmla="val 67192"/>
-            </a:avLst>
-          </a:prstGeom>
-          <a:solidFill>
-            <a:srgbClr val="484B51"/>
-          </a:solidFill>
-          <a:ln/>
-        </p:spPr>
-      </p:sp>
-      <p:pic>
-        <p:nvPicPr>
-          <p:cNvPr id="552554926" name="Image 2" descr="preencoded.png"/>
-          <p:cNvPicPr>
-            <a:picLocks noChangeAspect="1"/>
-          </p:cNvPicPr>
-          <p:nvPr/>
-        </p:nvPicPr>
-        <p:blipFill rotWithShape="1">
-          <a:blip r:embed="rId7">
-            <a:extLst>
-              <a:ext uri="{96DAC541-7B7A-43D3-8B79-37D633B846F1}">
-                <asvg:svgBlip xmlns:asvg="http://schemas.microsoft.com/office/drawing/2016/SVG/main" r:embed="rId8"/>
-              </a:ext>
-            </a:extLst>
-          </a:blip>
-          <a:stretch/>
-        </p:blipFill>
-        <p:spPr bwMode="auto">
-          <a:xfrm>
-            <a:off x="9810274" y="3197126"/>
-            <a:ext cx="340162" cy="340162"/>
-          </a:xfrm>
-          <a:prstGeom prst="rect">
-            <a:avLst/>
-          </a:prstGeom>
-        </p:spPr>
-      </p:pic>
-      <p:sp>
-        <p:nvSpPr>
-          <p:cNvPr id="694439995" name="Text 13"/>
-          <p:cNvSpPr/>
-          <p:nvPr/>
-        </p:nvSpPr>
-        <p:spPr bwMode="auto">
-          <a:xfrm>
-            <a:off x="9866948" y="3934301"/>
-            <a:ext cx="3654981" cy="354330"/>
-          </a:xfrm>
-          <a:prstGeom prst="rect">
-            <a:avLst/>
-          </a:prstGeom>
-          <a:noFill/>
-          <a:ln/>
-        </p:spPr>
-        <p:txBody>
-          <a:bodyPr wrap="none" lIns="0" tIns="0" rIns="0" bIns="0" rtlCol="0" anchor="t"/>
-          <a:lstStyle/>
-          <a:p>
-            <a:pPr marL="0" indent="0" algn="l">
-              <a:lnSpc>
-                <a:spcPts val="2750"/>
-              </a:lnSpc>
-              <a:buNone/>
-              <a:defRPr/>
-            </a:pPr>
-            <a:r>
-              <a:rPr lang="en-US" sz="2200">
-                <a:solidFill>
-                  <a:srgbClr val="D4D4D1"/>
-                </a:solidFill>
-                <a:latin typeface="IBM Plex Sans Medium"/>
-                <a:ea typeface="IBM Plex Sans Medium"/>
-                <a:cs typeface="IBM Plex Sans Medium"/>
-              </a:rPr>
-              <a:t>Переменный размер сетки</a:t>
-            </a:r>
-            <a:endParaRPr lang="en-US" sz="2200"/>
-          </a:p>
-        </p:txBody>
-      </p:sp>
-      <p:sp>
-        <p:nvSpPr>
-          <p:cNvPr id="1289289465" name="Text 14"/>
-          <p:cNvSpPr/>
-          <p:nvPr/>
-        </p:nvSpPr>
-        <p:spPr bwMode="auto">
-          <a:xfrm>
-            <a:off x="9866948" y="4424720"/>
-            <a:ext cx="3742730" cy="1088708"/>
-          </a:xfrm>
-          <a:prstGeom prst="rect">
-            <a:avLst/>
-          </a:prstGeom>
-          <a:noFill/>
-          <a:ln/>
-        </p:spPr>
-        <p:txBody>
-          <a:bodyPr wrap="square" lIns="0" tIns="0" rIns="0" bIns="0" rtlCol="0" anchor="t"/>
-          <a:lstStyle/>
-          <a:p>
-            <a:pPr marL="0" indent="0" algn="l">
-              <a:lnSpc>
-                <a:spcPts val="2850"/>
-              </a:lnSpc>
-              <a:buNone/>
-              <a:defRPr/>
-            </a:pPr>
-            <a:r>
-              <a:rPr lang="en-US" sz="1750">
-                <a:solidFill>
-                  <a:srgbClr val="D4D4D1"/>
-                </a:solidFill>
-                <a:latin typeface="Roboto"/>
-                <a:ea typeface="Roboto"/>
-                <a:cs typeface="Roboto"/>
-              </a:rPr>
-              <a:t>Поддержка холстов 8×8, 32×32, 64×64 для более детальных или оптимизированных изображений</a:t>
-            </a:r>
-            <a:endParaRPr lang="en-US" sz="1750"/>
-          </a:p>
-        </p:txBody>
-      </p:sp>
-      <p:pic>
-        <p:nvPicPr>
-          <p:cNvPr id="729006083" name="Рисунок 729006082"/>
-          <p:cNvPicPr>
-            <a:picLocks noChangeAspect="1"/>
-          </p:cNvPicPr>
-          <p:nvPr/>
-        </p:nvPicPr>
-        <p:blipFill rotWithShape="1">
-          <a:blip r:embed="rId9"/>
-          <a:stretch/>
-        </p:blipFill>
-        <p:spPr bwMode="auto">
-          <a:xfrm>
-            <a:off x="12325803" y="7551964"/>
             <a:ext cx="2228850" cy="657225"/>
           </a:xfrm>
           <a:prstGeom prst="rect">
